--- a/03-build/pptx/C6plus_U5_docente.pptx
+++ b/03-build/pptx/C6plus_U5_docente.pptx
@@ -6660,7 +6660,6 @@
               <a:srgbClr val="E4E3DE"/>
             </a:solidFill>
           </a:ln>
-          <a:effectLst/>
           <a:effectLst>
             <a:outerShdw blurRad="90000" dist="38000" dir="5400000" rotWithShape="0">
               <a:srgbClr val="20242E">
@@ -6894,7 +6893,6 @@
               <a:srgbClr val="E4E3DE"/>
             </a:solidFill>
           </a:ln>
-          <a:effectLst/>
           <a:effectLst>
             <a:outerShdw blurRad="90000" dist="38000" dir="5400000" rotWithShape="0">
               <a:srgbClr val="20242E">
@@ -7128,7 +7126,6 @@
               <a:srgbClr val="E4E3DE"/>
             </a:solidFill>
           </a:ln>
-          <a:effectLst/>
           <a:effectLst>
             <a:outerShdw blurRad="90000" dist="38000" dir="5400000" rotWithShape="0">
               <a:srgbClr val="20242E">
@@ -7362,7 +7359,6 @@
               <a:srgbClr val="E4E3DE"/>
             </a:solidFill>
           </a:ln>
-          <a:effectLst/>
           <a:effectLst>
             <a:outerShdw blurRad="90000" dist="38000" dir="5400000" rotWithShape="0">
               <a:srgbClr val="20242E">
@@ -15593,7 +15589,6 @@
               <a:srgbClr val="E4E3DE"/>
             </a:solidFill>
           </a:ln>
-          <a:effectLst/>
           <a:effectLst>
             <a:outerShdw blurRad="90000" dist="38000" dir="5400000" rotWithShape="0">
               <a:srgbClr val="20242E">
@@ -16272,7 +16267,6 @@
               <a:srgbClr val="7C56A9"/>
             </a:solidFill>
           </a:ln>
-          <a:effectLst/>
           <a:effectLst>
             <a:outerShdw blurRad="90000" dist="38000" dir="5400000" rotWithShape="0">
               <a:srgbClr val="20242E">
@@ -23190,7 +23184,6 @@
               <a:srgbClr val="7C56A9"/>
             </a:solidFill>
           </a:ln>
-          <a:effectLst/>
           <a:effectLst>
             <a:outerShdw blurRad="90000" dist="38000" dir="5400000" rotWithShape="0">
               <a:srgbClr val="20242E">
@@ -23424,7 +23417,6 @@
               <a:srgbClr val="7C56A9"/>
             </a:solidFill>
           </a:ln>
-          <a:effectLst/>
           <a:effectLst>
             <a:outerShdw blurRad="90000" dist="38000" dir="5400000" rotWithShape="0">
               <a:srgbClr val="20242E">
@@ -23658,7 +23650,6 @@
               <a:srgbClr val="7C56A9"/>
             </a:solidFill>
           </a:ln>
-          <a:effectLst/>
           <a:effectLst>
             <a:outerShdw blurRad="90000" dist="38000" dir="5400000" rotWithShape="0">
               <a:srgbClr val="20242E">
@@ -29036,7 +29027,6 @@
               <a:srgbClr val="7C56A9"/>
             </a:solidFill>
           </a:ln>
-          <a:effectLst/>
           <a:effectLst>
             <a:outerShdw blurRad="90000" dist="38000" dir="5400000" rotWithShape="0">
               <a:srgbClr val="20242E">
@@ -29339,7 +29329,6 @@
               <a:srgbClr val="7C56A9"/>
             </a:solidFill>
           </a:ln>
-          <a:effectLst/>
           <a:effectLst>
             <a:outerShdw blurRad="90000" dist="38000" dir="5400000" rotWithShape="0">
               <a:srgbClr val="20242E">
@@ -29642,7 +29631,6 @@
               <a:srgbClr val="7C56A9"/>
             </a:solidFill>
           </a:ln>
-          <a:effectLst/>
           <a:effectLst>
             <a:outerShdw blurRad="90000" dist="38000" dir="5400000" rotWithShape="0">
               <a:srgbClr val="20242E">
@@ -29945,7 +29933,6 @@
               <a:srgbClr val="7C56A9"/>
             </a:solidFill>
           </a:ln>
-          <a:effectLst/>
           <a:effectLst>
             <a:outerShdw blurRad="90000" dist="38000" dir="5400000" rotWithShape="0">
               <a:srgbClr val="20242E">
@@ -30248,7 +30235,6 @@
               <a:srgbClr val="7C56A9"/>
             </a:solidFill>
           </a:ln>
-          <a:effectLst/>
           <a:effectLst>
             <a:outerShdw blurRad="90000" dist="38000" dir="5400000" rotWithShape="0">
               <a:srgbClr val="20242E">
@@ -30551,7 +30537,6 @@
               <a:srgbClr val="5B3E83"/>
             </a:solidFill>
           </a:ln>
-          <a:effectLst/>
           <a:effectLst>
             <a:outerShdw blurRad="90000" dist="38000" dir="5400000" rotWithShape="0">
               <a:srgbClr val="20242E">
@@ -30854,7 +30839,6 @@
               <a:srgbClr val="5B3E83"/>
             </a:solidFill>
           </a:ln>
-          <a:effectLst/>
           <a:effectLst>
             <a:outerShdw blurRad="90000" dist="38000" dir="5400000" rotWithShape="0">
               <a:srgbClr val="20242E">
@@ -31157,7 +31141,6 @@
               <a:srgbClr val="5B3E83"/>
             </a:solidFill>
           </a:ln>
-          <a:effectLst/>
           <a:effectLst>
             <a:outerShdw blurRad="90000" dist="38000" dir="5400000" rotWithShape="0">
               <a:srgbClr val="20242E">
@@ -31984,7 +31967,6 @@
           <a:ln>
             <a:noFill/>
           </a:ln>
-          <a:effectLst/>
           <a:effectLst>
             <a:outerShdw blurRad="90000" dist="38000" dir="5400000" rotWithShape="0">
               <a:srgbClr val="20242E">
@@ -33697,7 +33679,6 @@
           <a:ln>
             <a:noFill/>
           </a:ln>
-          <a:effectLst/>
           <a:effectLst>
             <a:outerShdw blurRad="90000" dist="38000" dir="5400000" rotWithShape="0">
               <a:srgbClr val="20242E">
@@ -33840,7 +33821,6 @@
           <a:ln>
             <a:noFill/>
           </a:ln>
-          <a:effectLst/>
           <a:effectLst>
             <a:outerShdw blurRad="90000" dist="38000" dir="5400000" rotWithShape="0">
               <a:srgbClr val="20242E">
@@ -33983,7 +33963,6 @@
           <a:ln>
             <a:noFill/>
           </a:ln>
-          <a:effectLst/>
           <a:effectLst>
             <a:outerShdw blurRad="90000" dist="38000" dir="5400000" rotWithShape="0">
               <a:srgbClr val="20242E">
@@ -34126,7 +34105,6 @@
           <a:ln>
             <a:noFill/>
           </a:ln>
-          <a:effectLst/>
           <a:effectLst>
             <a:outerShdw blurRad="90000" dist="38000" dir="5400000" rotWithShape="0">
               <a:srgbClr val="20242E">
@@ -34269,7 +34247,6 @@
           <a:ln>
             <a:noFill/>
           </a:ln>
-          <a:effectLst/>
           <a:effectLst>
             <a:outerShdw blurRad="90000" dist="38000" dir="5400000" rotWithShape="0">
               <a:srgbClr val="20242E">
@@ -38493,7 +38470,6 @@
           <a:ln>
             <a:noFill/>
           </a:ln>
-          <a:effectLst/>
           <a:effectLst>
             <a:outerShdw blurRad="90000" dist="38000" dir="5400000" rotWithShape="0">
               <a:srgbClr val="20242E">
@@ -45726,7 +45702,6 @@
           <a:ln>
             <a:noFill/>
           </a:ln>
-          <a:effectLst/>
           <a:effectLst>
             <a:outerShdw blurRad="90000" dist="38000" dir="5400000" rotWithShape="0">
               <a:srgbClr val="20242E">
@@ -49644,7 +49619,6 @@
               <a:srgbClr val="7C56A9"/>
             </a:solidFill>
           </a:ln>
-          <a:effectLst/>
           <a:effectLst>
             <a:outerShdw blurRad="90000" dist="38000" dir="5400000" rotWithShape="0">
               <a:srgbClr val="20242E">

--- a/03-build/pptx/C6plus_U5_docente.pptx
+++ b/03-build/pptx/C6plus_U5_docente.pptx
@@ -11,6 +11,9 @@
     <p:sldId id="259" r:id="rId11"/>
     <p:sldId id="260" r:id="rId12"/>
     <p:sldId id="261" r:id="rId13"/>
+    <p:sldId id="277" r:id="rId29"/>
+    <p:sldId id="278" r:id="rId30"/>
+    <p:sldId id="279" r:id="rId31"/>
     <p:sldId id="262" r:id="rId14"/>
     <p:sldId id="263" r:id="rId15"/>
     <p:sldId id="264" r:id="rId16"/>
@@ -1556,6 +1559,255 @@
           </p:nvPr>
         </p:nvSpPr>
         <p:spPr/>
+      </p:sp>
+    </p:spTree>
+  </p:cSld>
+  <p:clrMapOvr>
+    <a:masterClrMapping/>
+  </p:clrMapOvr>
+</p:notes>
+</file>
+
+<file path=ppt/notesSlides/notesSlide22.xml><?xml version="1.0" encoding="utf-8"?>
+<p:notes xmlns:a="http://schemas.openxmlformats.org/drawingml/2006/main" xmlns:p="http://schemas.openxmlformats.org/presentationml/2006/main" xmlns:r="http://schemas.openxmlformats.org/officeDocument/2006/relationships">
+  <p:cSld>
+    <p:spTree>
+      <p:nvGrpSpPr>
+        <p:cNvPr id="1" name=""/>
+        <p:cNvGrpSpPr/>
+        <p:nvPr/>
+      </p:nvGrpSpPr>
+      <p:grpSpPr>
+        <a:xfrm>
+          <a:off x="0" y="0"/>
+          <a:ext cx="0" cy="0"/>
+          <a:chOff x="0" y="0"/>
+          <a:chExt cx="0" cy="0"/>
+        </a:xfrm>
+      </p:grpSpPr>
+      <p:sp>
+        <p:nvSpPr>
+          <p:cNvPr id="2" name="Slide Image Placeholder 1"/>
+          <p:cNvSpPr>
+            <a:spLocks noGrp="1"/>
+          </p:cNvSpPr>
+          <p:nvPr>
+            <p:ph type="sldImg" idx="2"/>
+          </p:nvPr>
+        </p:nvSpPr>
+        <p:spPr/>
+      </p:sp>
+      <p:sp>
+        <p:nvSpPr>
+          <p:cNvPr id="3" name="Notes Placeholder 2"/>
+          <p:cNvSpPr>
+            <a:spLocks noGrp="1"/>
+          </p:cNvSpPr>
+          <p:nvPr>
+            <p:ph type="body" idx="3" sz="quarter"/>
+          </p:nvPr>
+        </p:nvSpPr>
+        <p:spPr/>
+        <p:txBody>
+          <a:bodyPr/>
+          <a:lstStyle/>
+          <a:p>
+            <a:r>
+              <a:t>RETO 1 · El obituario del héroe anónimo — ✍️ creatieve beperking</a:t>
+            </a:r>
+          </a:p>
+          <a:p>
+            <a:r>
+              <a:t>OPDRACHT: Schrijf het overlijdensbericht van iemand die niet beroemd werd, in acht zinnen.</a:t>
+            </a:r>
+          </a:p>
+          <a:p>
+            <a:r>
+              <a:t>DE REGEL: Geen beroemdheid, geen uitvinder, geen held. Iemand uit een gewoon leven — en toch moet je in één zin kunnen zeggen wat er zonder deze persoon níet zou bestaan.</a:t>
+            </a:r>
+          </a:p>
+          <a:p>
+            <a:r>
+              <a:t>VERLOOP: Piensa en alguien real o inventado, pero corriente. | Escribe la frase «gracias a él/ella, …». | Construye las otras siete alrededor. | Léelo en voz alta. ¿Se nota que importó?</a:t>
+            </a:r>
+          </a:p>
+          <a:p>
+            <a:r>
+              <a:t>SLEUTEL: De verplichte zin «gracias a él/ella, …» is het hart: hij dwingt tot een gevolg dat nog bestaat, en dus tot een contrast tussen indefinido (het leven) en presente (het gevolg).  ||  «Nunca… , pero sí…» is de tweede sleutelzin: hij maakt de anonimiteit expliciet in plaats van hem te verzwijgen.  ||  De vijf voorbeelden zijn expres alledaags. Wie toch een beroemdheid kiest, heeft de beperking gemist — en de beperking ís de opdracht.  ||  Toets de acht zinnen, de indefinido-vormen en de aanwezigheid van de gracias-zin.</a:t>
+            </a:r>
+          </a:p>
+          <a:p>
+            <a:r>
+              <a:t>NOTA: Sommige leerlingen schrijven over een eigen grootouder. Dat mag, en het levert de beste teksten op — maar niemand hoeft voor te lezen.</a:t>
+            </a:r>
+          </a:p>
+        </p:txBody>
+      </p:sp>
+    </p:spTree>
+  </p:cSld>
+  <p:clrMapOvr>
+    <a:masterClrMapping/>
+  </p:clrMapOvr>
+</p:notes>
+</file>
+
+<file path=ppt/notesSlides/notesSlide23.xml><?xml version="1.0" encoding="utf-8"?>
+<p:notes xmlns:a="http://schemas.openxmlformats.org/drawingml/2006/main" xmlns:p="http://schemas.openxmlformats.org/presentationml/2006/main" xmlns:r="http://schemas.openxmlformats.org/officeDocument/2006/relationships">
+  <p:cSld>
+    <p:spTree>
+      <p:nvGrpSpPr>
+        <p:cNvPr id="1" name=""/>
+        <p:cNvGrpSpPr/>
+        <p:nvPr/>
+      </p:nvGrpSpPr>
+      <p:grpSpPr>
+        <a:xfrm>
+          <a:off x="0" y="0"/>
+          <a:ext cx="0" cy="0"/>
+          <a:chOff x="0" y="0"/>
+          <a:chExt cx="0" cy="0"/>
+        </a:xfrm>
+      </p:grpSpPr>
+      <p:sp>
+        <p:nvSpPr>
+          <p:cNvPr id="2" name="Slide Image Placeholder 1"/>
+          <p:cNvSpPr>
+            <a:spLocks noGrp="1"/>
+          </p:cNvSpPr>
+          <p:nvPr>
+            <p:ph type="sldImg" idx="2"/>
+          </p:nvPr>
+        </p:nvSpPr>
+        <p:spPr/>
+      </p:sp>
+      <p:sp>
+        <p:nvSpPr>
+          <p:cNvPr id="3" name="Notes Placeholder 2"/>
+          <p:cNvSpPr>
+            <a:spLocks noGrp="1"/>
+          </p:cNvSpPr>
+          <p:nvPr>
+            <p:ph type="body" idx="3" sz="quarter"/>
+          </p:nvPr>
+        </p:nvSpPr>
+        <p:spPr/>
+        <p:txBody>
+          <a:bodyPr/>
+          <a:lstStyle/>
+          <a:p>
+            <a:r>
+              <a:t>RETO 5 · La leyenda mal contada — ✍️ creatieve beperking</a:t>
+            </a:r>
+          </a:p>
+          <a:p>
+            <a:r>
+              <a:t>OPDRACHT: Zet de acht delen op volgorde en vertel ze in eigen woorden.</a:t>
+            </a:r>
+          </a:p>
+          <a:p>
+            <a:r>
+              <a:t>DE REGEL: Bij het navertellen mag je geen enkele zin letterlijk overnemen. Je gebruikt de conectoren van het verhaal — érase una vez, entonces, al final — en je eigen woorden.</a:t>
+            </a:r>
+          </a:p>
+          <a:p>
+            <a:r>
+              <a:t>VERLOOP: Leed las ocho partes, desordenadas. | Ordenadlas. Dos pistas: quién aparece primero y qué causa qué. | Contadla sin leer, con vuestras palabras. | ¿Qué explica esta leyenda?</a:t>
+            </a:r>
+          </a:p>
+          <a:p>
+            <a:r>
+              <a:t>SLEUTEL: De juiste volgorde is A · C · B · D · E · F · G · H.  ||  De moeilijkste is C vóór B: eerst vraagt hij toestemming, dán stelt de vader zijn voorwaarde. Wie B eerst zet, keert oorzaak en gevolg om.  ||  H is het slot dat de legende zijn functie geeft: een verklaring voor twee echte vulkanen naast Mexico-Stad. Zonder H is het een liefdesverhaal, mét H is het een mythe.  ||  Toets het navertellen, niet het ordenen. Wie de volgorde heeft maar voorleest, heeft de reto niet gedaan.  ||  «Se querían» en «estaba lejos» staan in het imperfecto, de verteltijd van elke legende. Dat is U6-stof: hier alleen herkennen, en bij het navertellen mag de leerling ze als vaste formule overnemen. Vraag er geen analyse over.</a:t>
+            </a:r>
+          </a:p>
+          <a:p>
+            <a:r>
+              <a:t>NOTA: Toon een foto van de twee vulkanen ná het navertellen. De vorm van de Iztaccíhuatl — «la mujer dormida» — maakt het verhaal in één beeld af.</a:t>
+            </a:r>
+          </a:p>
+        </p:txBody>
+      </p:sp>
+    </p:spTree>
+  </p:cSld>
+  <p:clrMapOvr>
+    <a:masterClrMapping/>
+  </p:clrMapOvr>
+</p:notes>
+</file>
+
+<file path=ppt/notesSlides/notesSlide24.xml><?xml version="1.0" encoding="utf-8"?>
+<p:notes xmlns:a="http://schemas.openxmlformats.org/drawingml/2006/main" xmlns:p="http://schemas.openxmlformats.org/presentationml/2006/main" xmlns:r="http://schemas.openxmlformats.org/officeDocument/2006/relationships">
+  <p:cSld>
+    <p:spTree>
+      <p:nvGrpSpPr>
+        <p:cNvPr id="1" name=""/>
+        <p:cNvGrpSpPr/>
+        <p:nvPr/>
+      </p:nvGrpSpPr>
+      <p:grpSpPr>
+        <a:xfrm>
+          <a:off x="0" y="0"/>
+          <a:ext cx="0" cy="0"/>
+          <a:chOff x="0" y="0"/>
+          <a:chExt cx="0" cy="0"/>
+        </a:xfrm>
+      </p:grpSpPr>
+      <p:sp>
+        <p:nvSpPr>
+          <p:cNvPr id="2" name="Slide Image Placeholder 1"/>
+          <p:cNvSpPr>
+            <a:spLocks noGrp="1"/>
+          </p:cNvSpPr>
+          <p:nvPr>
+            <p:ph type="sldImg" idx="2"/>
+          </p:nvPr>
+        </p:nvSpPr>
+        <p:spPr/>
+      </p:sp>
+      <p:sp>
+        <p:nvSpPr>
+          <p:cNvPr id="3" name="Notes Placeholder 2"/>
+          <p:cNvSpPr>
+            <a:spLocks noGrp="1"/>
+          </p:cNvSpPr>
+          <p:nvPr>
+            <p:ph type="body" idx="3" sz="quarter"/>
+          </p:nvPr>
+        </p:nvSpPr>
+        <p:spPr/>
+        <p:txBody>
+          <a:bodyPr/>
+          <a:lstStyle/>
+          <a:p>
+            <a:r>
+              <a:t>RETO 6 · Entrevista al pasado — 🎭 simulatie met beperking</a:t>
+            </a:r>
+          </a:p>
+          <a:p>
+            <a:r>
+              <a:t>OPDRACHT: Interview het personage. Alle antwoorden in het indefinido.</a:t>
+            </a:r>
+          </a:p>
+          <a:p>
+            <a:r>
+              <a:t>DE REGEL: Het personage antwoordt uitsluitend in het indefinido — hij vertelt afgeronde feiten, geen gewoontes en geen meningen. Wie «yo creo que» zegt, is uit zijn rol.</a:t>
+            </a:r>
+          </a:p>
+          <a:p>
+            <a:r>
+              <a:t>VERLOOP: Un/a voluntario/-a elige un personaje y se sienta. | La clase prepara dos preguntas cada uno, en indefinido. | Entrevista de cinco minutos. Sin pausas largas. | Cambiad de personaje. | ¿Qué pregunta ha sido la mejor? ¿Por qué?</a:t>
+            </a:r>
+          </a:p>
+          <a:p>
+            <a:r>
+              <a:t>SLEUTEL: Het verbod op meningen dwingt tot feiten, en feiten dwingen tot het indefinido. Dat is de hele constructie: de rolregel produceert de grammatica.  ||  Elke modelvraag staat bewust in het indefinido, ook «¿de qué decisión se arrepintió?» — een vraag in het presente laat het personage meteen uit zijn tijd stappen.  ||  De beste vragen zijn die met «cuándo» en «qué hizo»: ze laten geen ontsnappingsroute naar het presente.  ||  Toets de vragen van de klas, niet het antwoord van het personage. Twee goede vragen per leerling is de opdracht.</a:t>
+            </a:r>
+          </a:p>
+          <a:p>
+            <a:r>
+              <a:t>NOTA: Bereid één personage zelf voor als de klas vastloopt. Vijf minuten in de stoel is langer dan het lijkt, en een leerkracht die het voordoet, breekt het ijs.</a:t>
+            </a:r>
+          </a:p>
+        </p:txBody>
       </p:sp>
     </p:spTree>
   </p:cSld>
@@ -34551,6 +34803,5974 @@
                 <a:latin typeface="Inter"/>
               </a:rPr>
               <a:t>21</a:t>
+            </a:r>
+          </a:p>
+        </p:txBody>
+      </p:sp>
+    </p:spTree>
+  </p:cSld>
+  <p:clrMapOvr>
+    <a:masterClrMapping/>
+  </p:clrMapOvr>
+</p:sld>
+</file>
+
+<file path=ppt/slides/slide22.xml><?xml version="1.0" encoding="utf-8"?>
+<p:sld xmlns:a="http://schemas.openxmlformats.org/drawingml/2006/main" xmlns:p="http://schemas.openxmlformats.org/presentationml/2006/main" xmlns:r="http://schemas.openxmlformats.org/officeDocument/2006/relationships">
+  <p:cSld>
+    <p:spTree>
+      <p:nvGrpSpPr>
+        <p:cNvPr id="1" name=""/>
+        <p:cNvGrpSpPr/>
+        <p:nvPr/>
+      </p:nvGrpSpPr>
+      <p:grpSpPr/>
+      <p:sp>
+        <p:nvSpPr>
+          <p:cNvPr id="2" name="Fondo"/>
+          <p:cNvSpPr/>
+          <p:nvPr/>
+        </p:nvSpPr>
+        <p:spPr>
+          <a:xfrm>
+            <a:off x="0" y="0"/>
+            <a:ext cx="12191695" cy="6858000"/>
+          </a:xfrm>
+          <a:prstGeom prst="rect">
+            <a:avLst/>
+          </a:prstGeom>
+          <a:solidFill>
+            <a:srgbClr val="FCFBF8"/>
+          </a:solidFill>
+          <a:ln>
+            <a:noFill/>
+          </a:ln>
+          <a:effectLst/>
+        </p:spPr>
+        <p:style>
+          <a:lnRef idx="1">
+            <a:schemeClr val="accent1"/>
+          </a:lnRef>
+          <a:fillRef idx="3">
+            <a:schemeClr val="accent1"/>
+          </a:fillRef>
+          <a:effectRef idx="2">
+            <a:schemeClr val="accent1"/>
+          </a:effectRef>
+          <a:fontRef idx="minor">
+            <a:schemeClr val="lt1"/>
+          </a:fontRef>
+        </p:style>
+        <p:txBody>
+          <a:bodyPr rtlCol="0" anchor="ctr"/>
+          <a:lstStyle/>
+          <a:p/>
+        </p:txBody>
+      </p:sp>
+      <p:sp>
+        <p:nvSpPr>
+          <p:cNvPr id="3" name="Cabecera"/>
+          <p:cNvSpPr/>
+          <p:nvPr/>
+        </p:nvSpPr>
+        <p:spPr>
+          <a:xfrm>
+            <a:off x="0" y="0"/>
+            <a:ext cx="12191695" cy="1078992"/>
+          </a:xfrm>
+          <a:prstGeom prst="rect">
+            <a:avLst/>
+          </a:prstGeom>
+          <a:solidFill>
+            <a:srgbClr val="7C56A9"/>
+          </a:solidFill>
+          <a:ln>
+            <a:noFill/>
+          </a:ln>
+          <a:effectLst/>
+        </p:spPr>
+        <p:style>
+          <a:lnRef idx="1">
+            <a:schemeClr val="accent1"/>
+          </a:lnRef>
+          <a:fillRef idx="3">
+            <a:schemeClr val="accent1"/>
+          </a:fillRef>
+          <a:effectRef idx="2">
+            <a:schemeClr val="accent1"/>
+          </a:effectRef>
+          <a:fontRef idx="minor">
+            <a:schemeClr val="lt1"/>
+          </a:fontRef>
+        </p:style>
+        <p:txBody>
+          <a:bodyPr rtlCol="0" anchor="ctr"/>
+          <a:lstStyle/>
+          <a:p/>
+        </p:txBody>
+      </p:sp>
+      <p:sp>
+        <p:nvSpPr>
+          <p:cNvPr id="4" name="Chip"/>
+          <p:cNvSpPr/>
+          <p:nvPr/>
+        </p:nvSpPr>
+        <p:spPr>
+          <a:xfrm>
+            <a:off x="457200" y="182880"/>
+            <a:ext cx="3017520" cy="292608"/>
+          </a:xfrm>
+          <a:prstGeom prst="roundRect">
+            <a:avLst>
+              <a:gd name="adj" fmla="val 50000"/>
+            </a:avLst>
+          </a:prstGeom>
+          <a:solidFill>
+            <a:srgbClr val="FFFFFF"/>
+          </a:solidFill>
+          <a:ln>
+            <a:noFill/>
+          </a:ln>
+          <a:effectLst/>
+        </p:spPr>
+        <p:style>
+          <a:lnRef idx="1">
+            <a:schemeClr val="accent1"/>
+          </a:lnRef>
+          <a:fillRef idx="3">
+            <a:schemeClr val="accent1"/>
+          </a:fillRef>
+          <a:effectRef idx="2">
+            <a:schemeClr val="accent1"/>
+          </a:effectRef>
+          <a:fontRef idx="minor">
+            <a:schemeClr val="lt1"/>
+          </a:fontRef>
+        </p:style>
+        <p:txBody>
+          <a:bodyPr rtlCol="0" anchor="ctr"/>
+          <a:lstStyle/>
+          <a:p/>
+        </p:txBody>
+      </p:sp>
+      <p:sp>
+        <p:nvSpPr>
+          <p:cNvPr id="5" name="ChipTxt"/>
+          <p:cNvSpPr txBox="1"/>
+          <p:nvPr/>
+        </p:nvSpPr>
+        <p:spPr>
+          <a:xfrm>
+            <a:off x="457200" y="173736"/>
+            <a:ext cx="3017520" cy="310896"/>
+          </a:xfrm>
+          <a:prstGeom prst="rect">
+            <a:avLst/>
+          </a:prstGeom>
+          <a:noFill/>
+        </p:spPr>
+        <p:txBody>
+          <a:bodyPr wrap="square" anchor="ctr" lIns="45720" rIns="45720" tIns="27432" bIns="27432">
+            <a:normAutofit/>
+          </a:bodyPr>
+          <a:lstStyle/>
+          <a:p>
+            <a:pPr algn="ctr"/>
+            <a:r>
+              <a:rPr sz="950" b="1">
+                <a:solidFill>
+                  <a:srgbClr val="5B3E83"/>
+                </a:solidFill>
+                <a:latin typeface="Inter"/>
+              </a:rPr>
+              <a:t>RETO 1 · CREATIEVE BEPERKING</a:t>
+            </a:r>
+          </a:p>
+        </p:txBody>
+      </p:sp>
+      <p:sp>
+        <p:nvSpPr>
+          <p:cNvPr id="6" name="Titulo"/>
+          <p:cNvSpPr txBox="1"/>
+          <p:nvPr/>
+        </p:nvSpPr>
+        <p:spPr>
+          <a:xfrm>
+            <a:off x="457200" y="502920"/>
+            <a:ext cx="8412480" cy="475488"/>
+          </a:xfrm>
+          <a:prstGeom prst="rect">
+            <a:avLst/>
+          </a:prstGeom>
+          <a:noFill/>
+        </p:spPr>
+        <p:txBody>
+          <a:bodyPr wrap="square" anchor="t" lIns="45720" rIns="45720" tIns="27432" bIns="27432">
+            <a:normAutofit/>
+          </a:bodyPr>
+          <a:lstStyle/>
+          <a:p>
+            <a:pPr algn="l"/>
+            <a:r>
+              <a:rPr sz="2700" b="1">
+                <a:solidFill>
+                  <a:srgbClr val="FFFFFF"/>
+                </a:solidFill>
+                <a:latin typeface="Bricolage Grotesque"/>
+              </a:rPr>
+              <a:t>El obituario del héroe anónimo</a:t>
+            </a:r>
+          </a:p>
+        </p:txBody>
+      </p:sp>
+      <p:sp>
+        <p:nvSpPr>
+          <p:cNvPr id="7" name="Badges"/>
+          <p:cNvSpPr txBox="1"/>
+          <p:nvPr/>
+        </p:nvSpPr>
+        <p:spPr>
+          <a:xfrm>
+            <a:off x="9052560" y="256032"/>
+            <a:ext cx="2651760" cy="640080"/>
+          </a:xfrm>
+          <a:prstGeom prst="rect">
+            <a:avLst/>
+          </a:prstGeom>
+          <a:noFill/>
+        </p:spPr>
+        <p:txBody>
+          <a:bodyPr wrap="square" anchor="t" lIns="45720" rIns="45720" tIns="27432" bIns="27432">
+            <a:normAutofit/>
+          </a:bodyPr>
+          <a:lstStyle/>
+          <a:p>
+            <a:pPr algn="r"/>
+            <a:r>
+              <a:rPr sz="1000">
+                <a:solidFill>
+                  <a:srgbClr val="EEE8F5"/>
+                </a:solidFill>
+                <a:latin typeface="Inter"/>
+              </a:rPr>
+              <a:t>👤 Solo</a:t>
+            </a:r>
+          </a:p>
+          <a:p>
+            <a:pPr algn="r"/>
+            <a:r>
+              <a:rPr sz="1000">
+                <a:solidFill>
+                  <a:srgbClr val="EEE8F5"/>
+                </a:solidFill>
+                <a:latin typeface="Inter"/>
+              </a:rPr>
+              <a:t>± 15 min · ★★★</a:t>
+            </a:r>
+          </a:p>
+        </p:txBody>
+      </p:sp>
+      <p:sp>
+        <p:nvSpPr>
+          <p:cNvPr id="8" name="Gancho"/>
+          <p:cNvSpPr txBox="1"/>
+          <p:nvPr/>
+        </p:nvSpPr>
+        <p:spPr>
+          <a:xfrm>
+            <a:off x="457200" y="1225296"/>
+            <a:ext cx="11274552" cy="566928"/>
+          </a:xfrm>
+          <a:prstGeom prst="rect">
+            <a:avLst/>
+          </a:prstGeom>
+          <a:noFill/>
+        </p:spPr>
+        <p:txBody>
+          <a:bodyPr wrap="square" anchor="t" lIns="45720" rIns="45720" tIns="27432" bIns="27432">
+            <a:normAutofit/>
+          </a:bodyPr>
+          <a:lstStyle/>
+          <a:p>
+            <a:pPr algn="l"/>
+            <a:r>
+              <a:rPr sz="1600" b="1">
+                <a:solidFill>
+                  <a:srgbClr val="5B3E83"/>
+                </a:solidFill>
+                <a:latin typeface="Bricolage Grotesque"/>
+              </a:rPr>
+              <a:t>Nunca salió en los periódicos. Y sin embargo cambió algo.</a:t>
+            </a:r>
+          </a:p>
+          <a:p>
+            <a:pPr algn="l"/>
+            <a:r>
+              <a:rPr sz="1100" i="1">
+                <a:solidFill>
+                  <a:srgbClr val="6A6E78"/>
+                </a:solidFill>
+                <a:latin typeface="Inter"/>
+              </a:rPr>
+              <a:t>Hij haalde nooit de krant. En tóch veranderde hij iets.</a:t>
+            </a:r>
+          </a:p>
+        </p:txBody>
+      </p:sp>
+      <p:sp>
+        <p:nvSpPr>
+          <p:cNvPr id="9" name="ReglaCaja"/>
+          <p:cNvSpPr/>
+          <p:nvPr/>
+        </p:nvSpPr>
+        <p:spPr>
+          <a:xfrm>
+            <a:off x="457200" y="1847088"/>
+            <a:ext cx="11274552" cy="658368"/>
+          </a:xfrm>
+          <a:prstGeom prst="roundRect">
+            <a:avLst>
+              <a:gd name="adj" fmla="val 5000"/>
+            </a:avLst>
+          </a:prstGeom>
+          <a:solidFill>
+            <a:srgbClr val="FBF3D6"/>
+          </a:solidFill>
+          <a:ln>
+            <a:noFill/>
+          </a:ln>
+          <a:effectLst/>
+        </p:spPr>
+        <p:style>
+          <a:lnRef idx="1">
+            <a:schemeClr val="accent1"/>
+          </a:lnRef>
+          <a:fillRef idx="3">
+            <a:schemeClr val="accent1"/>
+          </a:fillRef>
+          <a:effectRef idx="2">
+            <a:schemeClr val="accent1"/>
+          </a:effectRef>
+          <a:fontRef idx="minor">
+            <a:schemeClr val="lt1"/>
+          </a:fontRef>
+        </p:style>
+        <p:txBody>
+          <a:bodyPr rtlCol="0" anchor="ctr"/>
+          <a:lstStyle/>
+          <a:p/>
+        </p:txBody>
+      </p:sp>
+      <p:sp>
+        <p:nvSpPr>
+          <p:cNvPr id="10" name="ReglaTxt"/>
+          <p:cNvSpPr txBox="1"/>
+          <p:nvPr/>
+        </p:nvSpPr>
+        <p:spPr>
+          <a:xfrm>
+            <a:off x="603504" y="1883664"/>
+            <a:ext cx="10972800" cy="585216"/>
+          </a:xfrm>
+          <a:prstGeom prst="rect">
+            <a:avLst/>
+          </a:prstGeom>
+          <a:noFill/>
+        </p:spPr>
+        <p:txBody>
+          <a:bodyPr wrap="square" anchor="t" lIns="45720" rIns="45720" tIns="27432" bIns="27432">
+            <a:normAutofit/>
+          </a:bodyPr>
+          <a:lstStyle/>
+          <a:p>
+            <a:pPr algn="l"/>
+            <a:r>
+              <a:rPr sz="850" b="1">
+                <a:solidFill>
+                  <a:srgbClr val="B7860B"/>
+                </a:solidFill>
+                <a:latin typeface="Inter"/>
+              </a:rPr>
+              <a:t>LA REGLA DEL RETO</a:t>
+            </a:r>
+          </a:p>
+          <a:p>
+            <a:pPr algn="l"/>
+            <a:r>
+              <a:rPr sz="1100">
+                <a:solidFill>
+                  <a:srgbClr val="20242E"/>
+                </a:solidFill>
+                <a:latin typeface="Inter"/>
+              </a:rPr>
+              <a:t>Geen beroemdheid, geen uitvinder, geen held. Iemand uit een gewoon leven — en toch moet je in één zin kunnen zeggen wat er zonder deze persoon níet zou bestaan.</a:t>
+            </a:r>
+          </a:p>
+        </p:txBody>
+      </p:sp>
+      <p:sp>
+        <p:nvSpPr>
+          <p:cNvPr id="11" name="Tarjeta 0"/>
+          <p:cNvSpPr/>
+          <p:nvPr/>
+        </p:nvSpPr>
+        <p:spPr>
+          <a:xfrm>
+            <a:off x="457200" y="2670048"/>
+            <a:ext cx="2708910" cy="898398"/>
+          </a:xfrm>
+          <a:prstGeom prst="roundRect">
+            <a:avLst>
+              <a:gd name="adj" fmla="val 6000"/>
+            </a:avLst>
+          </a:prstGeom>
+          <a:solidFill>
+            <a:srgbClr val="FFFFFF"/>
+          </a:solidFill>
+          <a:ln w="12700">
+            <a:solidFill>
+              <a:srgbClr val="E4E3DE"/>
+            </a:solidFill>
+          </a:ln>
+          <a:effectLst/>
+        </p:spPr>
+        <p:style>
+          <a:lnRef idx="1">
+            <a:schemeClr val="accent1"/>
+          </a:lnRef>
+          <a:fillRef idx="3">
+            <a:schemeClr val="accent1"/>
+          </a:fillRef>
+          <a:effectRef idx="2">
+            <a:schemeClr val="accent1"/>
+          </a:effectRef>
+          <a:fontRef idx="minor">
+            <a:schemeClr val="lt1"/>
+          </a:fontRef>
+        </p:style>
+        <p:txBody>
+          <a:bodyPr rtlCol="0" anchor="ctr"/>
+          <a:lstStyle/>
+          <a:p/>
+        </p:txBody>
+      </p:sp>
+      <p:sp>
+        <p:nvSpPr>
+          <p:cNvPr id="12" name="TarjetaTxt 0"/>
+          <p:cNvSpPr txBox="1"/>
+          <p:nvPr/>
+        </p:nvSpPr>
+        <p:spPr>
+          <a:xfrm>
+            <a:off x="548640" y="2724912"/>
+            <a:ext cx="2526030" cy="788670"/>
+          </a:xfrm>
+          <a:prstGeom prst="rect">
+            <a:avLst/>
+          </a:prstGeom>
+          <a:noFill/>
+        </p:spPr>
+        <p:txBody>
+          <a:bodyPr wrap="square" anchor="t" lIns="45720" rIns="45720" tIns="27432" bIns="27432">
+            <a:normAutofit/>
+          </a:bodyPr>
+          <a:lstStyle/>
+          <a:p>
+            <a:pPr algn="l"/>
+            <a:r>
+              <a:rPr sz="1100" b="1">
+                <a:solidFill>
+                  <a:srgbClr val="5B3E83"/>
+                </a:solidFill>
+                <a:latin typeface="Bricolage Grotesque"/>
+              </a:rPr>
+              <a:t>una vida corriente</a:t>
+            </a:r>
+          </a:p>
+          <a:p>
+            <a:pPr algn="l"/>
+            <a:r>
+              <a:rPr sz="1000">
+                <a:solidFill>
+                  <a:srgbClr val="20242E"/>
+                </a:solidFill>
+                <a:latin typeface="Inter"/>
+              </a:rPr>
+              <a:t>la mujer que abrió la primera biblioteca del barrio</a:t>
+            </a:r>
+          </a:p>
+        </p:txBody>
+      </p:sp>
+      <p:sp>
+        <p:nvSpPr>
+          <p:cNvPr id="13" name="Tarjeta 1"/>
+          <p:cNvSpPr/>
+          <p:nvPr/>
+        </p:nvSpPr>
+        <p:spPr>
+          <a:xfrm>
+            <a:off x="3312414" y="2670048"/>
+            <a:ext cx="2708910" cy="898398"/>
+          </a:xfrm>
+          <a:prstGeom prst="roundRect">
+            <a:avLst>
+              <a:gd name="adj" fmla="val 6000"/>
+            </a:avLst>
+          </a:prstGeom>
+          <a:solidFill>
+            <a:srgbClr val="FFFFFF"/>
+          </a:solidFill>
+          <a:ln w="12700">
+            <a:solidFill>
+              <a:srgbClr val="E4E3DE"/>
+            </a:solidFill>
+          </a:ln>
+          <a:effectLst/>
+        </p:spPr>
+        <p:style>
+          <a:lnRef idx="1">
+            <a:schemeClr val="accent1"/>
+          </a:lnRef>
+          <a:fillRef idx="3">
+            <a:schemeClr val="accent1"/>
+          </a:fillRef>
+          <a:effectRef idx="2">
+            <a:schemeClr val="accent1"/>
+          </a:effectRef>
+          <a:fontRef idx="minor">
+            <a:schemeClr val="lt1"/>
+          </a:fontRef>
+        </p:style>
+        <p:txBody>
+          <a:bodyPr rtlCol="0" anchor="ctr"/>
+          <a:lstStyle/>
+          <a:p/>
+        </p:txBody>
+      </p:sp>
+      <p:sp>
+        <p:nvSpPr>
+          <p:cNvPr id="14" name="TarjetaTxt 1"/>
+          <p:cNvSpPr txBox="1"/>
+          <p:nvPr/>
+        </p:nvSpPr>
+        <p:spPr>
+          <a:xfrm>
+            <a:off x="3403854" y="2724912"/>
+            <a:ext cx="2526030" cy="788670"/>
+          </a:xfrm>
+          <a:prstGeom prst="rect">
+            <a:avLst/>
+          </a:prstGeom>
+          <a:noFill/>
+        </p:spPr>
+        <p:txBody>
+          <a:bodyPr wrap="square" anchor="t" lIns="45720" rIns="45720" tIns="27432" bIns="27432">
+            <a:normAutofit/>
+          </a:bodyPr>
+          <a:lstStyle/>
+          <a:p>
+            <a:pPr algn="l"/>
+            <a:r>
+              <a:rPr sz="1100" b="1">
+                <a:solidFill>
+                  <a:srgbClr val="5B3E83"/>
+                </a:solidFill>
+                <a:latin typeface="Bricolage Grotesque"/>
+              </a:rPr>
+              <a:t>una vida corriente</a:t>
+            </a:r>
+          </a:p>
+          <a:p>
+            <a:pPr algn="l"/>
+            <a:r>
+              <a:rPr sz="1000">
+                <a:solidFill>
+                  <a:srgbClr val="20242E"/>
+                </a:solidFill>
+                <a:latin typeface="Inter"/>
+              </a:rPr>
+              <a:t>el hombre que arregló bicicletas gratis durante cuarenta años</a:t>
+            </a:r>
+          </a:p>
+        </p:txBody>
+      </p:sp>
+      <p:sp>
+        <p:nvSpPr>
+          <p:cNvPr id="15" name="Tarjeta 2"/>
+          <p:cNvSpPr/>
+          <p:nvPr/>
+        </p:nvSpPr>
+        <p:spPr>
+          <a:xfrm>
+            <a:off x="6167628" y="2670048"/>
+            <a:ext cx="2708910" cy="898398"/>
+          </a:xfrm>
+          <a:prstGeom prst="roundRect">
+            <a:avLst>
+              <a:gd name="adj" fmla="val 6000"/>
+            </a:avLst>
+          </a:prstGeom>
+          <a:solidFill>
+            <a:srgbClr val="FFFFFF"/>
+          </a:solidFill>
+          <a:ln w="12700">
+            <a:solidFill>
+              <a:srgbClr val="E4E3DE"/>
+            </a:solidFill>
+          </a:ln>
+          <a:effectLst/>
+        </p:spPr>
+        <p:style>
+          <a:lnRef idx="1">
+            <a:schemeClr val="accent1"/>
+          </a:lnRef>
+          <a:fillRef idx="3">
+            <a:schemeClr val="accent1"/>
+          </a:fillRef>
+          <a:effectRef idx="2">
+            <a:schemeClr val="accent1"/>
+          </a:effectRef>
+          <a:fontRef idx="minor">
+            <a:schemeClr val="lt1"/>
+          </a:fontRef>
+        </p:style>
+        <p:txBody>
+          <a:bodyPr rtlCol="0" anchor="ctr"/>
+          <a:lstStyle/>
+          <a:p/>
+        </p:txBody>
+      </p:sp>
+      <p:sp>
+        <p:nvSpPr>
+          <p:cNvPr id="16" name="TarjetaTxt 2"/>
+          <p:cNvSpPr txBox="1"/>
+          <p:nvPr/>
+        </p:nvSpPr>
+        <p:spPr>
+          <a:xfrm>
+            <a:off x="6259068" y="2724912"/>
+            <a:ext cx="2526030" cy="788670"/>
+          </a:xfrm>
+          <a:prstGeom prst="rect">
+            <a:avLst/>
+          </a:prstGeom>
+          <a:noFill/>
+        </p:spPr>
+        <p:txBody>
+          <a:bodyPr wrap="square" anchor="t" lIns="45720" rIns="45720" tIns="27432" bIns="27432">
+            <a:normAutofit/>
+          </a:bodyPr>
+          <a:lstStyle/>
+          <a:p>
+            <a:pPr algn="l"/>
+            <a:r>
+              <a:rPr sz="1100" b="1">
+                <a:solidFill>
+                  <a:srgbClr val="5B3E83"/>
+                </a:solidFill>
+                <a:latin typeface="Bricolage Grotesque"/>
+              </a:rPr>
+              <a:t>una vida corriente</a:t>
+            </a:r>
+          </a:p>
+          <a:p>
+            <a:pPr algn="l"/>
+            <a:r>
+              <a:rPr sz="1000">
+                <a:solidFill>
+                  <a:srgbClr val="20242E"/>
+                </a:solidFill>
+                <a:latin typeface="Inter"/>
+              </a:rPr>
+              <a:t>la maestra que enseñó a leer a tres generaciones</a:t>
+            </a:r>
+          </a:p>
+        </p:txBody>
+      </p:sp>
+      <p:sp>
+        <p:nvSpPr>
+          <p:cNvPr id="17" name="Tarjeta 3"/>
+          <p:cNvSpPr/>
+          <p:nvPr/>
+        </p:nvSpPr>
+        <p:spPr>
+          <a:xfrm>
+            <a:off x="9022842" y="2670048"/>
+            <a:ext cx="2708910" cy="898398"/>
+          </a:xfrm>
+          <a:prstGeom prst="roundRect">
+            <a:avLst>
+              <a:gd name="adj" fmla="val 6000"/>
+            </a:avLst>
+          </a:prstGeom>
+          <a:solidFill>
+            <a:srgbClr val="FFFFFF"/>
+          </a:solidFill>
+          <a:ln w="12700">
+            <a:solidFill>
+              <a:srgbClr val="E4E3DE"/>
+            </a:solidFill>
+          </a:ln>
+          <a:effectLst/>
+        </p:spPr>
+        <p:style>
+          <a:lnRef idx="1">
+            <a:schemeClr val="accent1"/>
+          </a:lnRef>
+          <a:fillRef idx="3">
+            <a:schemeClr val="accent1"/>
+          </a:fillRef>
+          <a:effectRef idx="2">
+            <a:schemeClr val="accent1"/>
+          </a:effectRef>
+          <a:fontRef idx="minor">
+            <a:schemeClr val="lt1"/>
+          </a:fontRef>
+        </p:style>
+        <p:txBody>
+          <a:bodyPr rtlCol="0" anchor="ctr"/>
+          <a:lstStyle/>
+          <a:p/>
+        </p:txBody>
+      </p:sp>
+      <p:sp>
+        <p:nvSpPr>
+          <p:cNvPr id="18" name="TarjetaTxt 3"/>
+          <p:cNvSpPr txBox="1"/>
+          <p:nvPr/>
+        </p:nvSpPr>
+        <p:spPr>
+          <a:xfrm>
+            <a:off x="9114282" y="2724912"/>
+            <a:ext cx="2526030" cy="788670"/>
+          </a:xfrm>
+          <a:prstGeom prst="rect">
+            <a:avLst/>
+          </a:prstGeom>
+          <a:noFill/>
+        </p:spPr>
+        <p:txBody>
+          <a:bodyPr wrap="square" anchor="t" lIns="45720" rIns="45720" tIns="27432" bIns="27432">
+            <a:normAutofit/>
+          </a:bodyPr>
+          <a:lstStyle/>
+          <a:p>
+            <a:pPr algn="l"/>
+            <a:r>
+              <a:rPr sz="1100" b="1">
+                <a:solidFill>
+                  <a:srgbClr val="5B3E83"/>
+                </a:solidFill>
+                <a:latin typeface="Bricolage Grotesque"/>
+              </a:rPr>
+              <a:t>una vida corriente</a:t>
+            </a:r>
+          </a:p>
+          <a:p>
+            <a:pPr algn="l"/>
+            <a:r>
+              <a:rPr sz="1000">
+                <a:solidFill>
+                  <a:srgbClr val="20242E"/>
+                </a:solidFill>
+                <a:latin typeface="Inter"/>
+              </a:rPr>
+              <a:t>el vecino que plantó todos los árboles de la calle</a:t>
+            </a:r>
+          </a:p>
+        </p:txBody>
+      </p:sp>
+      <p:sp>
+        <p:nvSpPr>
+          <p:cNvPr id="19" name="Tarjeta 4"/>
+          <p:cNvSpPr/>
+          <p:nvPr/>
+        </p:nvSpPr>
+        <p:spPr>
+          <a:xfrm>
+            <a:off x="457200" y="3696462"/>
+            <a:ext cx="2708910" cy="898398"/>
+          </a:xfrm>
+          <a:prstGeom prst="roundRect">
+            <a:avLst>
+              <a:gd name="adj" fmla="val 6000"/>
+            </a:avLst>
+          </a:prstGeom>
+          <a:solidFill>
+            <a:srgbClr val="FFFFFF"/>
+          </a:solidFill>
+          <a:ln w="12700">
+            <a:solidFill>
+              <a:srgbClr val="E4E3DE"/>
+            </a:solidFill>
+          </a:ln>
+          <a:effectLst/>
+        </p:spPr>
+        <p:style>
+          <a:lnRef idx="1">
+            <a:schemeClr val="accent1"/>
+          </a:lnRef>
+          <a:fillRef idx="3">
+            <a:schemeClr val="accent1"/>
+          </a:fillRef>
+          <a:effectRef idx="2">
+            <a:schemeClr val="accent1"/>
+          </a:effectRef>
+          <a:fontRef idx="minor">
+            <a:schemeClr val="lt1"/>
+          </a:fontRef>
+        </p:style>
+        <p:txBody>
+          <a:bodyPr rtlCol="0" anchor="ctr"/>
+          <a:lstStyle/>
+          <a:p/>
+        </p:txBody>
+      </p:sp>
+      <p:sp>
+        <p:nvSpPr>
+          <p:cNvPr id="20" name="TarjetaTxt 4"/>
+          <p:cNvSpPr txBox="1"/>
+          <p:nvPr/>
+        </p:nvSpPr>
+        <p:spPr>
+          <a:xfrm>
+            <a:off x="548640" y="3751326"/>
+            <a:ext cx="2526030" cy="788670"/>
+          </a:xfrm>
+          <a:prstGeom prst="rect">
+            <a:avLst/>
+          </a:prstGeom>
+          <a:noFill/>
+        </p:spPr>
+        <p:txBody>
+          <a:bodyPr wrap="square" anchor="t" lIns="45720" rIns="45720" tIns="27432" bIns="27432">
+            <a:normAutofit/>
+          </a:bodyPr>
+          <a:lstStyle/>
+          <a:p>
+            <a:pPr algn="l"/>
+            <a:r>
+              <a:rPr sz="1100" b="1">
+                <a:solidFill>
+                  <a:srgbClr val="5B3E83"/>
+                </a:solidFill>
+                <a:latin typeface="Bricolage Grotesque"/>
+              </a:rPr>
+              <a:t>una vida corriente</a:t>
+            </a:r>
+          </a:p>
+          <a:p>
+            <a:pPr algn="l"/>
+            <a:r>
+              <a:rPr sz="1000">
+                <a:solidFill>
+                  <a:srgbClr val="20242E"/>
+                </a:solidFill>
+                <a:latin typeface="Inter"/>
+              </a:rPr>
+              <a:t>la enfermera del turno de noche que nadie vio nunca</a:t>
+            </a:r>
+          </a:p>
+        </p:txBody>
+      </p:sp>
+      <p:sp>
+        <p:nvSpPr>
+          <p:cNvPr id="21" name="Tarjeta 5"/>
+          <p:cNvSpPr/>
+          <p:nvPr/>
+        </p:nvSpPr>
+        <p:spPr>
+          <a:xfrm>
+            <a:off x="3312414" y="3696462"/>
+            <a:ext cx="2708910" cy="898398"/>
+          </a:xfrm>
+          <a:prstGeom prst="roundRect">
+            <a:avLst>
+              <a:gd name="adj" fmla="val 6000"/>
+            </a:avLst>
+          </a:prstGeom>
+          <a:solidFill>
+            <a:srgbClr val="FFFFFF"/>
+          </a:solidFill>
+          <a:ln w="12700">
+            <a:solidFill>
+              <a:srgbClr val="E4E3DE"/>
+            </a:solidFill>
+          </a:ln>
+          <a:effectLst/>
+        </p:spPr>
+        <p:style>
+          <a:lnRef idx="1">
+            <a:schemeClr val="accent1"/>
+          </a:lnRef>
+          <a:fillRef idx="3">
+            <a:schemeClr val="accent1"/>
+          </a:fillRef>
+          <a:effectRef idx="2">
+            <a:schemeClr val="accent1"/>
+          </a:effectRef>
+          <a:fontRef idx="minor">
+            <a:schemeClr val="lt1"/>
+          </a:fontRef>
+        </p:style>
+        <p:txBody>
+          <a:bodyPr rtlCol="0" anchor="ctr"/>
+          <a:lstStyle/>
+          <a:p/>
+        </p:txBody>
+      </p:sp>
+      <p:sp>
+        <p:nvSpPr>
+          <p:cNvPr id="22" name="TarjetaTxt 5"/>
+          <p:cNvSpPr txBox="1"/>
+          <p:nvPr/>
+        </p:nvSpPr>
+        <p:spPr>
+          <a:xfrm>
+            <a:off x="3403854" y="3751326"/>
+            <a:ext cx="2526030" cy="788670"/>
+          </a:xfrm>
+          <a:prstGeom prst="rect">
+            <a:avLst/>
+          </a:prstGeom>
+          <a:noFill/>
+        </p:spPr>
+        <p:txBody>
+          <a:bodyPr wrap="square" anchor="t" lIns="45720" rIns="45720" tIns="27432" bIns="27432">
+            <a:normAutofit/>
+          </a:bodyPr>
+          <a:lstStyle/>
+          <a:p>
+            <a:pPr algn="l"/>
+            <a:r>
+              <a:rPr sz="1100" b="1">
+                <a:solidFill>
+                  <a:srgbClr val="5B3E83"/>
+                </a:solidFill>
+                <a:latin typeface="Bricolage Grotesque"/>
+              </a:rPr>
+              <a:t>marco</a:t>
+            </a:r>
+          </a:p>
+          <a:p>
+            <a:pPr algn="l"/>
+            <a:r>
+              <a:rPr sz="1000">
+                <a:solidFill>
+                  <a:srgbClr val="20242E"/>
+                </a:solidFill>
+                <a:latin typeface="Inter"/>
+              </a:rPr>
+              <a:t>Nació en … en …</a:t>
+            </a:r>
+          </a:p>
+        </p:txBody>
+      </p:sp>
+      <p:sp>
+        <p:nvSpPr>
+          <p:cNvPr id="23" name="Tarjeta 6"/>
+          <p:cNvSpPr/>
+          <p:nvPr/>
+        </p:nvSpPr>
+        <p:spPr>
+          <a:xfrm>
+            <a:off x="6167628" y="3696462"/>
+            <a:ext cx="2708910" cy="898398"/>
+          </a:xfrm>
+          <a:prstGeom prst="roundRect">
+            <a:avLst>
+              <a:gd name="adj" fmla="val 6000"/>
+            </a:avLst>
+          </a:prstGeom>
+          <a:solidFill>
+            <a:srgbClr val="FFFFFF"/>
+          </a:solidFill>
+          <a:ln w="12700">
+            <a:solidFill>
+              <a:srgbClr val="E4E3DE"/>
+            </a:solidFill>
+          </a:ln>
+          <a:effectLst/>
+        </p:spPr>
+        <p:style>
+          <a:lnRef idx="1">
+            <a:schemeClr val="accent1"/>
+          </a:lnRef>
+          <a:fillRef idx="3">
+            <a:schemeClr val="accent1"/>
+          </a:fillRef>
+          <a:effectRef idx="2">
+            <a:schemeClr val="accent1"/>
+          </a:effectRef>
+          <a:fontRef idx="minor">
+            <a:schemeClr val="lt1"/>
+          </a:fontRef>
+        </p:style>
+        <p:txBody>
+          <a:bodyPr rtlCol="0" anchor="ctr"/>
+          <a:lstStyle/>
+          <a:p/>
+        </p:txBody>
+      </p:sp>
+      <p:sp>
+        <p:nvSpPr>
+          <p:cNvPr id="24" name="TarjetaTxt 6"/>
+          <p:cNvSpPr txBox="1"/>
+          <p:nvPr/>
+        </p:nvSpPr>
+        <p:spPr>
+          <a:xfrm>
+            <a:off x="6259068" y="3751326"/>
+            <a:ext cx="2526030" cy="788670"/>
+          </a:xfrm>
+          <a:prstGeom prst="rect">
+            <a:avLst/>
+          </a:prstGeom>
+          <a:noFill/>
+        </p:spPr>
+        <p:txBody>
+          <a:bodyPr wrap="square" anchor="t" lIns="45720" rIns="45720" tIns="27432" bIns="27432">
+            <a:normAutofit/>
+          </a:bodyPr>
+          <a:lstStyle/>
+          <a:p>
+            <a:pPr algn="l"/>
+            <a:r>
+              <a:rPr sz="1100" b="1">
+                <a:solidFill>
+                  <a:srgbClr val="5B3E83"/>
+                </a:solidFill>
+                <a:latin typeface="Bricolage Grotesque"/>
+              </a:rPr>
+              <a:t>marco</a:t>
+            </a:r>
+          </a:p>
+          <a:p>
+            <a:pPr algn="l"/>
+            <a:r>
+              <a:rPr sz="1000">
+                <a:solidFill>
+                  <a:srgbClr val="20242E"/>
+                </a:solidFill>
+                <a:latin typeface="Inter"/>
+              </a:rPr>
+              <a:t>Trabajó … años en …</a:t>
+            </a:r>
+          </a:p>
+        </p:txBody>
+      </p:sp>
+      <p:sp>
+        <p:nvSpPr>
+          <p:cNvPr id="25" name="Tarjeta 7"/>
+          <p:cNvSpPr/>
+          <p:nvPr/>
+        </p:nvSpPr>
+        <p:spPr>
+          <a:xfrm>
+            <a:off x="9022842" y="3696462"/>
+            <a:ext cx="2708910" cy="898398"/>
+          </a:xfrm>
+          <a:prstGeom prst="roundRect">
+            <a:avLst>
+              <a:gd name="adj" fmla="val 6000"/>
+            </a:avLst>
+          </a:prstGeom>
+          <a:solidFill>
+            <a:srgbClr val="FFFFFF"/>
+          </a:solidFill>
+          <a:ln w="12700">
+            <a:solidFill>
+              <a:srgbClr val="E4E3DE"/>
+            </a:solidFill>
+          </a:ln>
+          <a:effectLst/>
+        </p:spPr>
+        <p:style>
+          <a:lnRef idx="1">
+            <a:schemeClr val="accent1"/>
+          </a:lnRef>
+          <a:fillRef idx="3">
+            <a:schemeClr val="accent1"/>
+          </a:fillRef>
+          <a:effectRef idx="2">
+            <a:schemeClr val="accent1"/>
+          </a:effectRef>
+          <a:fontRef idx="minor">
+            <a:schemeClr val="lt1"/>
+          </a:fontRef>
+        </p:style>
+        <p:txBody>
+          <a:bodyPr rtlCol="0" anchor="ctr"/>
+          <a:lstStyle/>
+          <a:p/>
+        </p:txBody>
+      </p:sp>
+      <p:sp>
+        <p:nvSpPr>
+          <p:cNvPr id="26" name="TarjetaTxt 7"/>
+          <p:cNvSpPr txBox="1"/>
+          <p:nvPr/>
+        </p:nvSpPr>
+        <p:spPr>
+          <a:xfrm>
+            <a:off x="9114282" y="3751326"/>
+            <a:ext cx="2526030" cy="788670"/>
+          </a:xfrm>
+          <a:prstGeom prst="rect">
+            <a:avLst/>
+          </a:prstGeom>
+          <a:noFill/>
+        </p:spPr>
+        <p:txBody>
+          <a:bodyPr wrap="square" anchor="t" lIns="45720" rIns="45720" tIns="27432" bIns="27432">
+            <a:normAutofit/>
+          </a:bodyPr>
+          <a:lstStyle/>
+          <a:p>
+            <a:pPr algn="l"/>
+            <a:r>
+              <a:rPr sz="1100" b="1">
+                <a:solidFill>
+                  <a:srgbClr val="5B3E83"/>
+                </a:solidFill>
+                <a:latin typeface="Bricolage Grotesque"/>
+              </a:rPr>
+              <a:t>marco</a:t>
+            </a:r>
+          </a:p>
+          <a:p>
+            <a:pPr algn="l"/>
+            <a:r>
+              <a:rPr sz="1000">
+                <a:solidFill>
+                  <a:srgbClr val="20242E"/>
+                </a:solidFill>
+                <a:latin typeface="Inter"/>
+              </a:rPr>
+              <a:t>Nunca … , pero sí …</a:t>
+            </a:r>
+          </a:p>
+        </p:txBody>
+      </p:sp>
+      <p:sp>
+        <p:nvSpPr>
+          <p:cNvPr id="27" name="Tarjeta 8"/>
+          <p:cNvSpPr/>
+          <p:nvPr/>
+        </p:nvSpPr>
+        <p:spPr>
+          <a:xfrm>
+            <a:off x="457200" y="4722876"/>
+            <a:ext cx="2708910" cy="898398"/>
+          </a:xfrm>
+          <a:prstGeom prst="roundRect">
+            <a:avLst>
+              <a:gd name="adj" fmla="val 6000"/>
+            </a:avLst>
+          </a:prstGeom>
+          <a:solidFill>
+            <a:srgbClr val="FFFFFF"/>
+          </a:solidFill>
+          <a:ln w="12700">
+            <a:solidFill>
+              <a:srgbClr val="E4E3DE"/>
+            </a:solidFill>
+          </a:ln>
+          <a:effectLst/>
+        </p:spPr>
+        <p:style>
+          <a:lnRef idx="1">
+            <a:schemeClr val="accent1"/>
+          </a:lnRef>
+          <a:fillRef idx="3">
+            <a:schemeClr val="accent1"/>
+          </a:fillRef>
+          <a:effectRef idx="2">
+            <a:schemeClr val="accent1"/>
+          </a:effectRef>
+          <a:fontRef idx="minor">
+            <a:schemeClr val="lt1"/>
+          </a:fontRef>
+        </p:style>
+        <p:txBody>
+          <a:bodyPr rtlCol="0" anchor="ctr"/>
+          <a:lstStyle/>
+          <a:p/>
+        </p:txBody>
+      </p:sp>
+      <p:sp>
+        <p:nvSpPr>
+          <p:cNvPr id="28" name="TarjetaTxt 8"/>
+          <p:cNvSpPr txBox="1"/>
+          <p:nvPr/>
+        </p:nvSpPr>
+        <p:spPr>
+          <a:xfrm>
+            <a:off x="548640" y="4777740"/>
+            <a:ext cx="2526030" cy="788670"/>
+          </a:xfrm>
+          <a:prstGeom prst="rect">
+            <a:avLst/>
+          </a:prstGeom>
+          <a:noFill/>
+        </p:spPr>
+        <p:txBody>
+          <a:bodyPr wrap="square" anchor="t" lIns="45720" rIns="45720" tIns="27432" bIns="27432">
+            <a:normAutofit/>
+          </a:bodyPr>
+          <a:lstStyle/>
+          <a:p>
+            <a:pPr algn="l"/>
+            <a:r>
+              <a:rPr sz="1100" b="1">
+                <a:solidFill>
+                  <a:srgbClr val="5B3E83"/>
+                </a:solidFill>
+                <a:latin typeface="Bricolage Grotesque"/>
+              </a:rPr>
+              <a:t>marco</a:t>
+            </a:r>
+          </a:p>
+          <a:p>
+            <a:pPr algn="l"/>
+            <a:r>
+              <a:rPr sz="1000">
+                <a:solidFill>
+                  <a:srgbClr val="20242E"/>
+                </a:solidFill>
+                <a:latin typeface="Inter"/>
+              </a:rPr>
+              <a:t>Gracias a él/ella, …</a:t>
+            </a:r>
+          </a:p>
+        </p:txBody>
+      </p:sp>
+      <p:sp>
+        <p:nvSpPr>
+          <p:cNvPr id="29" name="Tarjeta 9"/>
+          <p:cNvSpPr/>
+          <p:nvPr/>
+        </p:nvSpPr>
+        <p:spPr>
+          <a:xfrm>
+            <a:off x="3312414" y="4722876"/>
+            <a:ext cx="2708910" cy="898398"/>
+          </a:xfrm>
+          <a:prstGeom prst="roundRect">
+            <a:avLst>
+              <a:gd name="adj" fmla="val 6000"/>
+            </a:avLst>
+          </a:prstGeom>
+          <a:solidFill>
+            <a:srgbClr val="FFFFFF"/>
+          </a:solidFill>
+          <a:ln w="12700">
+            <a:solidFill>
+              <a:srgbClr val="E4E3DE"/>
+            </a:solidFill>
+          </a:ln>
+          <a:effectLst/>
+        </p:spPr>
+        <p:style>
+          <a:lnRef idx="1">
+            <a:schemeClr val="accent1"/>
+          </a:lnRef>
+          <a:fillRef idx="3">
+            <a:schemeClr val="accent1"/>
+          </a:fillRef>
+          <a:effectRef idx="2">
+            <a:schemeClr val="accent1"/>
+          </a:effectRef>
+          <a:fontRef idx="minor">
+            <a:schemeClr val="lt1"/>
+          </a:fontRef>
+        </p:style>
+        <p:txBody>
+          <a:bodyPr rtlCol="0" anchor="ctr"/>
+          <a:lstStyle/>
+          <a:p/>
+        </p:txBody>
+      </p:sp>
+      <p:sp>
+        <p:nvSpPr>
+          <p:cNvPr id="30" name="TarjetaTxt 9"/>
+          <p:cNvSpPr txBox="1"/>
+          <p:nvPr/>
+        </p:nvSpPr>
+        <p:spPr>
+          <a:xfrm>
+            <a:off x="3403854" y="4777740"/>
+            <a:ext cx="2526030" cy="788670"/>
+          </a:xfrm>
+          <a:prstGeom prst="rect">
+            <a:avLst/>
+          </a:prstGeom>
+          <a:noFill/>
+        </p:spPr>
+        <p:txBody>
+          <a:bodyPr wrap="square" anchor="t" lIns="45720" rIns="45720" tIns="27432" bIns="27432">
+            <a:normAutofit/>
+          </a:bodyPr>
+          <a:lstStyle/>
+          <a:p>
+            <a:pPr algn="l"/>
+            <a:r>
+              <a:rPr sz="1100" b="1">
+                <a:solidFill>
+                  <a:srgbClr val="5B3E83"/>
+                </a:solidFill>
+                <a:latin typeface="Bricolage Grotesque"/>
+              </a:rPr>
+              <a:t>marco</a:t>
+            </a:r>
+          </a:p>
+          <a:p>
+            <a:pPr algn="l"/>
+            <a:r>
+              <a:rPr sz="1000">
+                <a:solidFill>
+                  <a:srgbClr val="20242E"/>
+                </a:solidFill>
+                <a:latin typeface="Inter"/>
+              </a:rPr>
+              <a:t>Murió en … , y … personas fueron a despedirlo/-la.</a:t>
+            </a:r>
+          </a:p>
+        </p:txBody>
+      </p:sp>
+      <p:sp>
+        <p:nvSpPr>
+          <p:cNvPr id="31" name="Tarjeta 10"/>
+          <p:cNvSpPr/>
+          <p:nvPr/>
+        </p:nvSpPr>
+        <p:spPr>
+          <a:xfrm>
+            <a:off x="6167628" y="4722876"/>
+            <a:ext cx="2708910" cy="898398"/>
+          </a:xfrm>
+          <a:prstGeom prst="roundRect">
+            <a:avLst>
+              <a:gd name="adj" fmla="val 6000"/>
+            </a:avLst>
+          </a:prstGeom>
+          <a:solidFill>
+            <a:srgbClr val="FFFFFF"/>
+          </a:solidFill>
+          <a:ln w="12700">
+            <a:solidFill>
+              <a:srgbClr val="E4E3DE"/>
+            </a:solidFill>
+          </a:ln>
+          <a:effectLst/>
+        </p:spPr>
+        <p:style>
+          <a:lnRef idx="1">
+            <a:schemeClr val="accent1"/>
+          </a:lnRef>
+          <a:fillRef idx="3">
+            <a:schemeClr val="accent1"/>
+          </a:fillRef>
+          <a:effectRef idx="2">
+            <a:schemeClr val="accent1"/>
+          </a:effectRef>
+          <a:fontRef idx="minor">
+            <a:schemeClr val="lt1"/>
+          </a:fontRef>
+        </p:style>
+        <p:txBody>
+          <a:bodyPr rtlCol="0" anchor="ctr"/>
+          <a:lstStyle/>
+          <a:p/>
+        </p:txBody>
+      </p:sp>
+      <p:sp>
+        <p:nvSpPr>
+          <p:cNvPr id="32" name="TarjetaTxt 10"/>
+          <p:cNvSpPr txBox="1"/>
+          <p:nvPr/>
+        </p:nvSpPr>
+        <p:spPr>
+          <a:xfrm>
+            <a:off x="6259068" y="4777740"/>
+            <a:ext cx="2526030" cy="788670"/>
+          </a:xfrm>
+          <a:prstGeom prst="rect">
+            <a:avLst/>
+          </a:prstGeom>
+          <a:noFill/>
+        </p:spPr>
+        <p:txBody>
+          <a:bodyPr wrap="square" anchor="t" lIns="45720" rIns="45720" tIns="27432" bIns="27432">
+            <a:normAutofit/>
+          </a:bodyPr>
+          <a:lstStyle/>
+          <a:p>
+            <a:pPr algn="l"/>
+            <a:r>
+              <a:rPr sz="1100" b="1">
+                <a:solidFill>
+                  <a:srgbClr val="5B3E83"/>
+                </a:solidFill>
+                <a:latin typeface="Bricolage Grotesque"/>
+              </a:rPr>
+              <a:t>marco</a:t>
+            </a:r>
+          </a:p>
+          <a:p>
+            <a:pPr algn="l"/>
+            <a:r>
+              <a:rPr sz="1000">
+                <a:solidFill>
+                  <a:srgbClr val="20242E"/>
+                </a:solidFill>
+                <a:latin typeface="Inter"/>
+              </a:rPr>
+              <a:t>Hoy … sigue …</a:t>
+            </a:r>
+          </a:p>
+        </p:txBody>
+      </p:sp>
+      <p:sp>
+        <p:nvSpPr>
+          <p:cNvPr id="33" name="Tarjeta 11"/>
+          <p:cNvSpPr/>
+          <p:nvPr/>
+        </p:nvSpPr>
+        <p:spPr>
+          <a:xfrm>
+            <a:off x="9022842" y="4722876"/>
+            <a:ext cx="2708910" cy="898398"/>
+          </a:xfrm>
+          <a:prstGeom prst="roundRect">
+            <a:avLst>
+              <a:gd name="adj" fmla="val 6000"/>
+            </a:avLst>
+          </a:prstGeom>
+          <a:solidFill>
+            <a:srgbClr val="FFFFFF"/>
+          </a:solidFill>
+          <a:ln w="12700">
+            <a:solidFill>
+              <a:srgbClr val="E4E3DE"/>
+            </a:solidFill>
+          </a:ln>
+          <a:effectLst/>
+        </p:spPr>
+        <p:style>
+          <a:lnRef idx="1">
+            <a:schemeClr val="accent1"/>
+          </a:lnRef>
+          <a:fillRef idx="3">
+            <a:schemeClr val="accent1"/>
+          </a:fillRef>
+          <a:effectRef idx="2">
+            <a:schemeClr val="accent1"/>
+          </a:effectRef>
+          <a:fontRef idx="minor">
+            <a:schemeClr val="lt1"/>
+          </a:fontRef>
+        </p:style>
+        <p:txBody>
+          <a:bodyPr rtlCol="0" anchor="ctr"/>
+          <a:lstStyle/>
+          <a:p/>
+        </p:txBody>
+      </p:sp>
+      <p:sp>
+        <p:nvSpPr>
+          <p:cNvPr id="34" name="TarjetaTxt 11"/>
+          <p:cNvSpPr txBox="1"/>
+          <p:nvPr/>
+        </p:nvSpPr>
+        <p:spPr>
+          <a:xfrm>
+            <a:off x="9114282" y="4777740"/>
+            <a:ext cx="2526030" cy="788670"/>
+          </a:xfrm>
+          <a:prstGeom prst="rect">
+            <a:avLst/>
+          </a:prstGeom>
+          <a:noFill/>
+        </p:spPr>
+        <p:txBody>
+          <a:bodyPr wrap="square" anchor="t" lIns="45720" rIns="45720" tIns="27432" bIns="27432">
+            <a:normAutofit/>
+          </a:bodyPr>
+          <a:lstStyle/>
+          <a:p>
+            <a:pPr algn="l"/>
+            <a:r>
+              <a:rPr sz="1100" b="1">
+                <a:solidFill>
+                  <a:srgbClr val="5B3E83"/>
+                </a:solidFill>
+                <a:latin typeface="Bricolage Grotesque"/>
+              </a:rPr>
+              <a:t>Verbos</a:t>
+            </a:r>
+          </a:p>
+          <a:p>
+            <a:pPr algn="l"/>
+            <a:r>
+              <a:rPr sz="1000">
+                <a:solidFill>
+                  <a:srgbClr val="20242E"/>
+                </a:solidFill>
+                <a:latin typeface="Inter"/>
+              </a:rPr>
+              <a:t>nació · creció · empezó · trabajó · abrió</a:t>
+            </a:r>
+          </a:p>
+        </p:txBody>
+      </p:sp>
+      <p:sp>
+        <p:nvSpPr>
+          <p:cNvPr id="35" name="Tarjeta 12"/>
+          <p:cNvSpPr/>
+          <p:nvPr/>
+        </p:nvSpPr>
+        <p:spPr>
+          <a:xfrm>
+            <a:off x="457200" y="5749290"/>
+            <a:ext cx="2708910" cy="898398"/>
+          </a:xfrm>
+          <a:prstGeom prst="roundRect">
+            <a:avLst>
+              <a:gd name="adj" fmla="val 6000"/>
+            </a:avLst>
+          </a:prstGeom>
+          <a:solidFill>
+            <a:srgbClr val="FFFFFF"/>
+          </a:solidFill>
+          <a:ln w="12700">
+            <a:solidFill>
+              <a:srgbClr val="E4E3DE"/>
+            </a:solidFill>
+          </a:ln>
+          <a:effectLst/>
+        </p:spPr>
+        <p:style>
+          <a:lnRef idx="1">
+            <a:schemeClr val="accent1"/>
+          </a:lnRef>
+          <a:fillRef idx="3">
+            <a:schemeClr val="accent1"/>
+          </a:fillRef>
+          <a:effectRef idx="2">
+            <a:schemeClr val="accent1"/>
+          </a:effectRef>
+          <a:fontRef idx="minor">
+            <a:schemeClr val="lt1"/>
+          </a:fontRef>
+        </p:style>
+        <p:txBody>
+          <a:bodyPr rtlCol="0" anchor="ctr"/>
+          <a:lstStyle/>
+          <a:p/>
+        </p:txBody>
+      </p:sp>
+      <p:sp>
+        <p:nvSpPr>
+          <p:cNvPr id="36" name="TarjetaTxt 12"/>
+          <p:cNvSpPr txBox="1"/>
+          <p:nvPr/>
+        </p:nvSpPr>
+        <p:spPr>
+          <a:xfrm>
+            <a:off x="548640" y="5804154"/>
+            <a:ext cx="2526030" cy="788670"/>
+          </a:xfrm>
+          <a:prstGeom prst="rect">
+            <a:avLst/>
+          </a:prstGeom>
+          <a:noFill/>
+        </p:spPr>
+        <p:txBody>
+          <a:bodyPr wrap="square" anchor="t" lIns="45720" rIns="45720" tIns="27432" bIns="27432">
+            <a:normAutofit/>
+          </a:bodyPr>
+          <a:lstStyle/>
+          <a:p>
+            <a:pPr algn="l"/>
+            <a:r>
+              <a:rPr sz="1100" b="1">
+                <a:solidFill>
+                  <a:srgbClr val="5B3E83"/>
+                </a:solidFill>
+                <a:latin typeface="Bricolage Grotesque"/>
+              </a:rPr>
+              <a:t>Verbos</a:t>
+            </a:r>
+          </a:p>
+          <a:p>
+            <a:pPr algn="l"/>
+            <a:r>
+              <a:rPr sz="1000">
+                <a:solidFill>
+                  <a:srgbClr val="20242E"/>
+                </a:solidFill>
+                <a:latin typeface="Inter"/>
+              </a:rPr>
+              <a:t>enseñó · plantó · arregló · cuidó · murió</a:t>
+            </a:r>
+          </a:p>
+        </p:txBody>
+      </p:sp>
+    </p:spTree>
+  </p:cSld>
+  <p:clrMapOvr>
+    <a:masterClrMapping/>
+  </p:clrMapOvr>
+</p:sld>
+</file>
+
+<file path=ppt/slides/slide23.xml><?xml version="1.0" encoding="utf-8"?>
+<p:sld xmlns:a="http://schemas.openxmlformats.org/drawingml/2006/main" xmlns:p="http://schemas.openxmlformats.org/presentationml/2006/main" xmlns:r="http://schemas.openxmlformats.org/officeDocument/2006/relationships">
+  <p:cSld>
+    <p:spTree>
+      <p:nvGrpSpPr>
+        <p:cNvPr id="1" name=""/>
+        <p:cNvGrpSpPr/>
+        <p:nvPr/>
+      </p:nvGrpSpPr>
+      <p:grpSpPr/>
+      <p:sp>
+        <p:nvSpPr>
+          <p:cNvPr id="2" name="Fondo"/>
+          <p:cNvSpPr/>
+          <p:nvPr/>
+        </p:nvSpPr>
+        <p:spPr>
+          <a:xfrm>
+            <a:off x="0" y="0"/>
+            <a:ext cx="12191695" cy="6858000"/>
+          </a:xfrm>
+          <a:prstGeom prst="rect">
+            <a:avLst/>
+          </a:prstGeom>
+          <a:solidFill>
+            <a:srgbClr val="FCFBF8"/>
+          </a:solidFill>
+          <a:ln>
+            <a:noFill/>
+          </a:ln>
+          <a:effectLst/>
+        </p:spPr>
+        <p:style>
+          <a:lnRef idx="1">
+            <a:schemeClr val="accent1"/>
+          </a:lnRef>
+          <a:fillRef idx="3">
+            <a:schemeClr val="accent1"/>
+          </a:fillRef>
+          <a:effectRef idx="2">
+            <a:schemeClr val="accent1"/>
+          </a:effectRef>
+          <a:fontRef idx="minor">
+            <a:schemeClr val="lt1"/>
+          </a:fontRef>
+        </p:style>
+        <p:txBody>
+          <a:bodyPr rtlCol="0" anchor="ctr"/>
+          <a:lstStyle/>
+          <a:p/>
+        </p:txBody>
+      </p:sp>
+      <p:sp>
+        <p:nvSpPr>
+          <p:cNvPr id="3" name="Cabecera"/>
+          <p:cNvSpPr/>
+          <p:nvPr/>
+        </p:nvSpPr>
+        <p:spPr>
+          <a:xfrm>
+            <a:off x="0" y="0"/>
+            <a:ext cx="12191695" cy="1078992"/>
+          </a:xfrm>
+          <a:prstGeom prst="rect">
+            <a:avLst/>
+          </a:prstGeom>
+          <a:solidFill>
+            <a:srgbClr val="7C56A9"/>
+          </a:solidFill>
+          <a:ln>
+            <a:noFill/>
+          </a:ln>
+          <a:effectLst/>
+        </p:spPr>
+        <p:style>
+          <a:lnRef idx="1">
+            <a:schemeClr val="accent1"/>
+          </a:lnRef>
+          <a:fillRef idx="3">
+            <a:schemeClr val="accent1"/>
+          </a:fillRef>
+          <a:effectRef idx="2">
+            <a:schemeClr val="accent1"/>
+          </a:effectRef>
+          <a:fontRef idx="minor">
+            <a:schemeClr val="lt1"/>
+          </a:fontRef>
+        </p:style>
+        <p:txBody>
+          <a:bodyPr rtlCol="0" anchor="ctr"/>
+          <a:lstStyle/>
+          <a:p/>
+        </p:txBody>
+      </p:sp>
+      <p:sp>
+        <p:nvSpPr>
+          <p:cNvPr id="4" name="Chip"/>
+          <p:cNvSpPr/>
+          <p:nvPr/>
+        </p:nvSpPr>
+        <p:spPr>
+          <a:xfrm>
+            <a:off x="457200" y="182880"/>
+            <a:ext cx="3017520" cy="292608"/>
+          </a:xfrm>
+          <a:prstGeom prst="roundRect">
+            <a:avLst>
+              <a:gd name="adj" fmla="val 50000"/>
+            </a:avLst>
+          </a:prstGeom>
+          <a:solidFill>
+            <a:srgbClr val="FFFFFF"/>
+          </a:solidFill>
+          <a:ln>
+            <a:noFill/>
+          </a:ln>
+          <a:effectLst/>
+        </p:spPr>
+        <p:style>
+          <a:lnRef idx="1">
+            <a:schemeClr val="accent1"/>
+          </a:lnRef>
+          <a:fillRef idx="3">
+            <a:schemeClr val="accent1"/>
+          </a:fillRef>
+          <a:effectRef idx="2">
+            <a:schemeClr val="accent1"/>
+          </a:effectRef>
+          <a:fontRef idx="minor">
+            <a:schemeClr val="lt1"/>
+          </a:fontRef>
+        </p:style>
+        <p:txBody>
+          <a:bodyPr rtlCol="0" anchor="ctr"/>
+          <a:lstStyle/>
+          <a:p/>
+        </p:txBody>
+      </p:sp>
+      <p:sp>
+        <p:nvSpPr>
+          <p:cNvPr id="5" name="ChipTxt"/>
+          <p:cNvSpPr txBox="1"/>
+          <p:nvPr/>
+        </p:nvSpPr>
+        <p:spPr>
+          <a:xfrm>
+            <a:off x="457200" y="173736"/>
+            <a:ext cx="3017520" cy="310896"/>
+          </a:xfrm>
+          <a:prstGeom prst="rect">
+            <a:avLst/>
+          </a:prstGeom>
+          <a:noFill/>
+        </p:spPr>
+        <p:txBody>
+          <a:bodyPr wrap="square" anchor="ctr" lIns="45720" rIns="45720" tIns="27432" bIns="27432">
+            <a:normAutofit/>
+          </a:bodyPr>
+          <a:lstStyle/>
+          <a:p>
+            <a:pPr algn="ctr"/>
+            <a:r>
+              <a:rPr sz="950" b="1">
+                <a:solidFill>
+                  <a:srgbClr val="5B3E83"/>
+                </a:solidFill>
+                <a:latin typeface="Inter"/>
+              </a:rPr>
+              <a:t>RETO 5 · CREATIEVE BEPERKING</a:t>
+            </a:r>
+          </a:p>
+        </p:txBody>
+      </p:sp>
+      <p:sp>
+        <p:nvSpPr>
+          <p:cNvPr id="6" name="Titulo"/>
+          <p:cNvSpPr txBox="1"/>
+          <p:nvPr/>
+        </p:nvSpPr>
+        <p:spPr>
+          <a:xfrm>
+            <a:off x="457200" y="502920"/>
+            <a:ext cx="8412480" cy="475488"/>
+          </a:xfrm>
+          <a:prstGeom prst="rect">
+            <a:avLst/>
+          </a:prstGeom>
+          <a:noFill/>
+        </p:spPr>
+        <p:txBody>
+          <a:bodyPr wrap="square" anchor="t" lIns="45720" rIns="45720" tIns="27432" bIns="27432">
+            <a:normAutofit/>
+          </a:bodyPr>
+          <a:lstStyle/>
+          <a:p>
+            <a:pPr algn="l"/>
+            <a:r>
+              <a:rPr sz="2700" b="1">
+                <a:solidFill>
+                  <a:srgbClr val="FFFFFF"/>
+                </a:solidFill>
+                <a:latin typeface="Bricolage Grotesque"/>
+              </a:rPr>
+              <a:t>La leyenda mal contada</a:t>
+            </a:r>
+          </a:p>
+        </p:txBody>
+      </p:sp>
+      <p:sp>
+        <p:nvSpPr>
+          <p:cNvPr id="7" name="Badges"/>
+          <p:cNvSpPr txBox="1"/>
+          <p:nvPr/>
+        </p:nvSpPr>
+        <p:spPr>
+          <a:xfrm>
+            <a:off x="9052560" y="256032"/>
+            <a:ext cx="2651760" cy="640080"/>
+          </a:xfrm>
+          <a:prstGeom prst="rect">
+            <a:avLst/>
+          </a:prstGeom>
+          <a:noFill/>
+        </p:spPr>
+        <p:txBody>
+          <a:bodyPr wrap="square" anchor="t" lIns="45720" rIns="45720" tIns="27432" bIns="27432">
+            <a:normAutofit/>
+          </a:bodyPr>
+          <a:lstStyle/>
+          <a:p>
+            <a:pPr algn="r"/>
+            <a:r>
+              <a:rPr sz="1000">
+                <a:solidFill>
+                  <a:srgbClr val="EEE8F5"/>
+                </a:solidFill>
+                <a:latin typeface="Inter"/>
+              </a:rPr>
+              <a:t>👥 En parejas</a:t>
+            </a:r>
+          </a:p>
+          <a:p>
+            <a:pPr algn="r"/>
+            <a:r>
+              <a:rPr sz="1000">
+                <a:solidFill>
+                  <a:srgbClr val="EEE8F5"/>
+                </a:solidFill>
+                <a:latin typeface="Inter"/>
+              </a:rPr>
+              <a:t>± 15 min · ★★★</a:t>
+            </a:r>
+          </a:p>
+        </p:txBody>
+      </p:sp>
+      <p:sp>
+        <p:nvSpPr>
+          <p:cNvPr id="8" name="Gancho"/>
+          <p:cNvSpPr txBox="1"/>
+          <p:nvPr/>
+        </p:nvSpPr>
+        <p:spPr>
+          <a:xfrm>
+            <a:off x="457200" y="1225296"/>
+            <a:ext cx="11274552" cy="566928"/>
+          </a:xfrm>
+          <a:prstGeom prst="rect">
+            <a:avLst/>
+          </a:prstGeom>
+          <a:noFill/>
+        </p:spPr>
+        <p:txBody>
+          <a:bodyPr wrap="square" anchor="t" lIns="45720" rIns="45720" tIns="27432" bIns="27432">
+            <a:normAutofit/>
+          </a:bodyPr>
+          <a:lstStyle/>
+          <a:p>
+            <a:pPr algn="l"/>
+            <a:r>
+              <a:rPr sz="1600" b="1">
+                <a:solidFill>
+                  <a:srgbClr val="5B3E83"/>
+                </a:solidFill>
+                <a:latin typeface="Bricolage Grotesque"/>
+              </a:rPr>
+              <a:t>La leyenda está bien. El orden, no.</a:t>
+            </a:r>
+          </a:p>
+          <a:p>
+            <a:pPr algn="l"/>
+            <a:r>
+              <a:rPr sz="1100" i="1">
+                <a:solidFill>
+                  <a:srgbClr val="6A6E78"/>
+                </a:solidFill>
+                <a:latin typeface="Inter"/>
+              </a:rPr>
+              <a:t>De legende klopt. De volgorde niet.</a:t>
+            </a:r>
+          </a:p>
+        </p:txBody>
+      </p:sp>
+      <p:sp>
+        <p:nvSpPr>
+          <p:cNvPr id="9" name="ReglaCaja"/>
+          <p:cNvSpPr/>
+          <p:nvPr/>
+        </p:nvSpPr>
+        <p:spPr>
+          <a:xfrm>
+            <a:off x="457200" y="1847088"/>
+            <a:ext cx="11274552" cy="658368"/>
+          </a:xfrm>
+          <a:prstGeom prst="roundRect">
+            <a:avLst>
+              <a:gd name="adj" fmla="val 5000"/>
+            </a:avLst>
+          </a:prstGeom>
+          <a:solidFill>
+            <a:srgbClr val="FBF3D6"/>
+          </a:solidFill>
+          <a:ln>
+            <a:noFill/>
+          </a:ln>
+          <a:effectLst/>
+        </p:spPr>
+        <p:style>
+          <a:lnRef idx="1">
+            <a:schemeClr val="accent1"/>
+          </a:lnRef>
+          <a:fillRef idx="3">
+            <a:schemeClr val="accent1"/>
+          </a:fillRef>
+          <a:effectRef idx="2">
+            <a:schemeClr val="accent1"/>
+          </a:effectRef>
+          <a:fontRef idx="minor">
+            <a:schemeClr val="lt1"/>
+          </a:fontRef>
+        </p:style>
+        <p:txBody>
+          <a:bodyPr rtlCol="0" anchor="ctr"/>
+          <a:lstStyle/>
+          <a:p/>
+        </p:txBody>
+      </p:sp>
+      <p:sp>
+        <p:nvSpPr>
+          <p:cNvPr id="10" name="ReglaTxt"/>
+          <p:cNvSpPr txBox="1"/>
+          <p:nvPr/>
+        </p:nvSpPr>
+        <p:spPr>
+          <a:xfrm>
+            <a:off x="603504" y="1883664"/>
+            <a:ext cx="10972800" cy="585216"/>
+          </a:xfrm>
+          <a:prstGeom prst="rect">
+            <a:avLst/>
+          </a:prstGeom>
+          <a:noFill/>
+        </p:spPr>
+        <p:txBody>
+          <a:bodyPr wrap="square" anchor="t" lIns="45720" rIns="45720" tIns="27432" bIns="27432">
+            <a:normAutofit/>
+          </a:bodyPr>
+          <a:lstStyle/>
+          <a:p>
+            <a:pPr algn="l"/>
+            <a:r>
+              <a:rPr sz="850" b="1">
+                <a:solidFill>
+                  <a:srgbClr val="B7860B"/>
+                </a:solidFill>
+                <a:latin typeface="Inter"/>
+              </a:rPr>
+              <a:t>LA REGLA DEL RETO</a:t>
+            </a:r>
+          </a:p>
+          <a:p>
+            <a:pPr algn="l"/>
+            <a:r>
+              <a:rPr sz="1100">
+                <a:solidFill>
+                  <a:srgbClr val="20242E"/>
+                </a:solidFill>
+                <a:latin typeface="Inter"/>
+              </a:rPr>
+              <a:t>Bij het navertellen mag je geen enkele zin letterlijk overnemen. Je gebruikt de conectoren van het verhaal — érase una vez, entonces, al final — en je eigen woorden.</a:t>
+            </a:r>
+          </a:p>
+        </p:txBody>
+      </p:sp>
+      <p:sp>
+        <p:nvSpPr>
+          <p:cNvPr id="11" name="Tarjeta 0"/>
+          <p:cNvSpPr/>
+          <p:nvPr/>
+        </p:nvSpPr>
+        <p:spPr>
+          <a:xfrm>
+            <a:off x="457200" y="2670048"/>
+            <a:ext cx="2708910" cy="1170432"/>
+          </a:xfrm>
+          <a:prstGeom prst="roundRect">
+            <a:avLst>
+              <a:gd name="adj" fmla="val 6000"/>
+            </a:avLst>
+          </a:prstGeom>
+          <a:solidFill>
+            <a:srgbClr val="FFFFFF"/>
+          </a:solidFill>
+          <a:ln w="12700">
+            <a:solidFill>
+              <a:srgbClr val="E4E3DE"/>
+            </a:solidFill>
+          </a:ln>
+          <a:effectLst/>
+        </p:spPr>
+        <p:style>
+          <a:lnRef idx="1">
+            <a:schemeClr val="accent1"/>
+          </a:lnRef>
+          <a:fillRef idx="3">
+            <a:schemeClr val="accent1"/>
+          </a:fillRef>
+          <a:effectRef idx="2">
+            <a:schemeClr val="accent1"/>
+          </a:effectRef>
+          <a:fontRef idx="minor">
+            <a:schemeClr val="lt1"/>
+          </a:fontRef>
+        </p:style>
+        <p:txBody>
+          <a:bodyPr rtlCol="0" anchor="ctr"/>
+          <a:lstStyle/>
+          <a:p/>
+        </p:txBody>
+      </p:sp>
+      <p:sp>
+        <p:nvSpPr>
+          <p:cNvPr id="12" name="TarjetaTxt 0"/>
+          <p:cNvSpPr txBox="1"/>
+          <p:nvPr/>
+        </p:nvSpPr>
+        <p:spPr>
+          <a:xfrm>
+            <a:off x="548640" y="2724912"/>
+            <a:ext cx="2526030" cy="859536"/>
+          </a:xfrm>
+          <a:prstGeom prst="rect">
+            <a:avLst/>
+          </a:prstGeom>
+          <a:noFill/>
+        </p:spPr>
+        <p:txBody>
+          <a:bodyPr wrap="square" anchor="t" lIns="45720" rIns="45720" tIns="27432" bIns="27432">
+            <a:normAutofit/>
+          </a:bodyPr>
+          <a:lstStyle/>
+          <a:p>
+            <a:pPr algn="l"/>
+            <a:r>
+              <a:rPr sz="1100" b="1">
+                <a:solidFill>
+                  <a:srgbClr val="5B3E83"/>
+                </a:solidFill>
+                <a:latin typeface="Bricolage Grotesque"/>
+              </a:rPr>
+              <a:t>A</a:t>
+            </a:r>
+          </a:p>
+          <a:p>
+            <a:pPr algn="l"/>
+            <a:r>
+              <a:rPr sz="1000">
+                <a:solidFill>
+                  <a:srgbClr val="20242E"/>
+                </a:solidFill>
+                <a:latin typeface="Inter"/>
+              </a:rPr>
+              <a:t>Érase una vez una princesa, Iztaccíhuatl, y un guerrero, Popocatépetl, que se querían.</a:t>
+            </a:r>
+          </a:p>
+        </p:txBody>
+      </p:sp>
+      <p:sp>
+        <p:nvSpPr>
+          <p:cNvPr id="13" name="Onthul 0"/>
+          <p:cNvSpPr/>
+          <p:nvPr/>
+        </p:nvSpPr>
+        <p:spPr>
+          <a:xfrm>
+            <a:off x="548640" y="3547872"/>
+            <a:ext cx="2526030" cy="237744"/>
+          </a:xfrm>
+          <a:prstGeom prst="roundRect">
+            <a:avLst>
+              <a:gd name="adj" fmla="val 20000"/>
+            </a:avLst>
+          </a:prstGeom>
+          <a:solidFill>
+            <a:srgbClr val="EEE8F5"/>
+          </a:solidFill>
+          <a:ln>
+            <a:noFill/>
+          </a:ln>
+          <a:effectLst/>
+        </p:spPr>
+        <p:style>
+          <a:lnRef idx="1">
+            <a:schemeClr val="accent1"/>
+          </a:lnRef>
+          <a:fillRef idx="3">
+            <a:schemeClr val="accent1"/>
+          </a:fillRef>
+          <a:effectRef idx="2">
+            <a:schemeClr val="accent1"/>
+          </a:effectRef>
+          <a:fontRef idx="minor">
+            <a:schemeClr val="lt1"/>
+          </a:fontRef>
+        </p:style>
+        <p:txBody>
+          <a:bodyPr rtlCol="0" anchor="ctr"/>
+          <a:lstStyle/>
+          <a:p/>
+        </p:txBody>
+      </p:sp>
+      <p:sp>
+        <p:nvSpPr>
+          <p:cNvPr id="14" name="OnthulTxt 0"/>
+          <p:cNvSpPr txBox="1"/>
+          <p:nvPr/>
+        </p:nvSpPr>
+        <p:spPr>
+          <a:xfrm>
+            <a:off x="566928" y="3547872"/>
+            <a:ext cx="2489454" cy="237744"/>
+          </a:xfrm>
+          <a:prstGeom prst="rect">
+            <a:avLst/>
+          </a:prstGeom>
+          <a:noFill/>
+        </p:spPr>
+        <p:txBody>
+          <a:bodyPr wrap="square" anchor="ctr" lIns="45720" rIns="45720" tIns="27432" bIns="27432">
+            <a:normAutofit/>
+          </a:bodyPr>
+          <a:lstStyle/>
+          <a:p>
+            <a:pPr algn="l"/>
+            <a:r>
+              <a:rPr sz="850" b="1">
+                <a:solidFill>
+                  <a:srgbClr val="5B3E83"/>
+                </a:solidFill>
+                <a:latin typeface="Inter"/>
+              </a:rPr>
+              <a:t>¿en qué lugar va?</a:t>
+            </a:r>
+          </a:p>
+        </p:txBody>
+      </p:sp>
+      <p:sp>
+        <p:nvSpPr>
+          <p:cNvPr id="15" name="Tarjeta 1"/>
+          <p:cNvSpPr/>
+          <p:nvPr/>
+        </p:nvSpPr>
+        <p:spPr>
+          <a:xfrm>
+            <a:off x="3312414" y="2670048"/>
+            <a:ext cx="2708910" cy="1170432"/>
+          </a:xfrm>
+          <a:prstGeom prst="roundRect">
+            <a:avLst>
+              <a:gd name="adj" fmla="val 6000"/>
+            </a:avLst>
+          </a:prstGeom>
+          <a:solidFill>
+            <a:srgbClr val="FFFFFF"/>
+          </a:solidFill>
+          <a:ln w="12700">
+            <a:solidFill>
+              <a:srgbClr val="E4E3DE"/>
+            </a:solidFill>
+          </a:ln>
+          <a:effectLst/>
+        </p:spPr>
+        <p:style>
+          <a:lnRef idx="1">
+            <a:schemeClr val="accent1"/>
+          </a:lnRef>
+          <a:fillRef idx="3">
+            <a:schemeClr val="accent1"/>
+          </a:fillRef>
+          <a:effectRef idx="2">
+            <a:schemeClr val="accent1"/>
+          </a:effectRef>
+          <a:fontRef idx="minor">
+            <a:schemeClr val="lt1"/>
+          </a:fontRef>
+        </p:style>
+        <p:txBody>
+          <a:bodyPr rtlCol="0" anchor="ctr"/>
+          <a:lstStyle/>
+          <a:p/>
+        </p:txBody>
+      </p:sp>
+      <p:sp>
+        <p:nvSpPr>
+          <p:cNvPr id="16" name="TarjetaTxt 1"/>
+          <p:cNvSpPr txBox="1"/>
+          <p:nvPr/>
+        </p:nvSpPr>
+        <p:spPr>
+          <a:xfrm>
+            <a:off x="3403854" y="2724912"/>
+            <a:ext cx="2526030" cy="859536"/>
+          </a:xfrm>
+          <a:prstGeom prst="rect">
+            <a:avLst/>
+          </a:prstGeom>
+          <a:noFill/>
+        </p:spPr>
+        <p:txBody>
+          <a:bodyPr wrap="square" anchor="t" lIns="45720" rIns="45720" tIns="27432" bIns="27432">
+            <a:normAutofit/>
+          </a:bodyPr>
+          <a:lstStyle/>
+          <a:p>
+            <a:pPr algn="l"/>
+            <a:r>
+              <a:rPr sz="1100" b="1">
+                <a:solidFill>
+                  <a:srgbClr val="5B3E83"/>
+                </a:solidFill>
+                <a:latin typeface="Bricolage Grotesque"/>
+              </a:rPr>
+              <a:t>B</a:t>
+            </a:r>
+          </a:p>
+          <a:p>
+            <a:pPr algn="l"/>
+            <a:r>
+              <a:rPr sz="1000">
+                <a:solidFill>
+                  <a:srgbClr val="20242E"/>
+                </a:solidFill>
+                <a:latin typeface="Inter"/>
+              </a:rPr>
+              <a:t>El padre de ella aceptó, pero con una condición: volver vencedor de la guerra.</a:t>
+            </a:r>
+          </a:p>
+        </p:txBody>
+      </p:sp>
+      <p:sp>
+        <p:nvSpPr>
+          <p:cNvPr id="17" name="Onthul 1"/>
+          <p:cNvSpPr/>
+          <p:nvPr/>
+        </p:nvSpPr>
+        <p:spPr>
+          <a:xfrm>
+            <a:off x="3403854" y="3547872"/>
+            <a:ext cx="2526030" cy="237744"/>
+          </a:xfrm>
+          <a:prstGeom prst="roundRect">
+            <a:avLst>
+              <a:gd name="adj" fmla="val 20000"/>
+            </a:avLst>
+          </a:prstGeom>
+          <a:solidFill>
+            <a:srgbClr val="EEE8F5"/>
+          </a:solidFill>
+          <a:ln>
+            <a:noFill/>
+          </a:ln>
+          <a:effectLst/>
+        </p:spPr>
+        <p:style>
+          <a:lnRef idx="1">
+            <a:schemeClr val="accent1"/>
+          </a:lnRef>
+          <a:fillRef idx="3">
+            <a:schemeClr val="accent1"/>
+          </a:fillRef>
+          <a:effectRef idx="2">
+            <a:schemeClr val="accent1"/>
+          </a:effectRef>
+          <a:fontRef idx="minor">
+            <a:schemeClr val="lt1"/>
+          </a:fontRef>
+        </p:style>
+        <p:txBody>
+          <a:bodyPr rtlCol="0" anchor="ctr"/>
+          <a:lstStyle/>
+          <a:p/>
+        </p:txBody>
+      </p:sp>
+      <p:sp>
+        <p:nvSpPr>
+          <p:cNvPr id="18" name="OnthulTxt 1"/>
+          <p:cNvSpPr txBox="1"/>
+          <p:nvPr/>
+        </p:nvSpPr>
+        <p:spPr>
+          <a:xfrm>
+            <a:off x="3422142" y="3547872"/>
+            <a:ext cx="2489454" cy="237744"/>
+          </a:xfrm>
+          <a:prstGeom prst="rect">
+            <a:avLst/>
+          </a:prstGeom>
+          <a:noFill/>
+        </p:spPr>
+        <p:txBody>
+          <a:bodyPr wrap="square" anchor="ctr" lIns="45720" rIns="45720" tIns="27432" bIns="27432">
+            <a:normAutofit/>
+          </a:bodyPr>
+          <a:lstStyle/>
+          <a:p>
+            <a:pPr algn="l"/>
+            <a:r>
+              <a:rPr sz="850" b="1">
+                <a:solidFill>
+                  <a:srgbClr val="5B3E83"/>
+                </a:solidFill>
+                <a:latin typeface="Inter"/>
+              </a:rPr>
+              <a:t>¿en qué lugar va?</a:t>
+            </a:r>
+          </a:p>
+        </p:txBody>
+      </p:sp>
+      <p:sp>
+        <p:nvSpPr>
+          <p:cNvPr id="19" name="Tarjeta 2"/>
+          <p:cNvSpPr/>
+          <p:nvPr/>
+        </p:nvSpPr>
+        <p:spPr>
+          <a:xfrm>
+            <a:off x="6167628" y="2670048"/>
+            <a:ext cx="2708910" cy="1170432"/>
+          </a:xfrm>
+          <a:prstGeom prst="roundRect">
+            <a:avLst>
+              <a:gd name="adj" fmla="val 6000"/>
+            </a:avLst>
+          </a:prstGeom>
+          <a:solidFill>
+            <a:srgbClr val="FFFFFF"/>
+          </a:solidFill>
+          <a:ln w="12700">
+            <a:solidFill>
+              <a:srgbClr val="E4E3DE"/>
+            </a:solidFill>
+          </a:ln>
+          <a:effectLst/>
+        </p:spPr>
+        <p:style>
+          <a:lnRef idx="1">
+            <a:schemeClr val="accent1"/>
+          </a:lnRef>
+          <a:fillRef idx="3">
+            <a:schemeClr val="accent1"/>
+          </a:fillRef>
+          <a:effectRef idx="2">
+            <a:schemeClr val="accent1"/>
+          </a:effectRef>
+          <a:fontRef idx="minor">
+            <a:schemeClr val="lt1"/>
+          </a:fontRef>
+        </p:style>
+        <p:txBody>
+          <a:bodyPr rtlCol="0" anchor="ctr"/>
+          <a:lstStyle/>
+          <a:p/>
+        </p:txBody>
+      </p:sp>
+      <p:sp>
+        <p:nvSpPr>
+          <p:cNvPr id="20" name="TarjetaTxt 2"/>
+          <p:cNvSpPr txBox="1"/>
+          <p:nvPr/>
+        </p:nvSpPr>
+        <p:spPr>
+          <a:xfrm>
+            <a:off x="6259068" y="2724912"/>
+            <a:ext cx="2526030" cy="859536"/>
+          </a:xfrm>
+          <a:prstGeom prst="rect">
+            <a:avLst/>
+          </a:prstGeom>
+          <a:noFill/>
+        </p:spPr>
+        <p:txBody>
+          <a:bodyPr wrap="square" anchor="t" lIns="45720" rIns="45720" tIns="27432" bIns="27432">
+            <a:normAutofit/>
+          </a:bodyPr>
+          <a:lstStyle/>
+          <a:p>
+            <a:pPr algn="l"/>
+            <a:r>
+              <a:rPr sz="1100" b="1">
+                <a:solidFill>
+                  <a:srgbClr val="5B3E83"/>
+                </a:solidFill>
+                <a:latin typeface="Bricolage Grotesque"/>
+              </a:rPr>
+              <a:t>C</a:t>
+            </a:r>
+          </a:p>
+          <a:p>
+            <a:pPr algn="l"/>
+            <a:r>
+              <a:rPr sz="1000">
+                <a:solidFill>
+                  <a:srgbClr val="20242E"/>
+                </a:solidFill>
+                <a:latin typeface="Inter"/>
+              </a:rPr>
+              <a:t>Popocatépetl pidió permiso para casarse con ella.</a:t>
+            </a:r>
+          </a:p>
+        </p:txBody>
+      </p:sp>
+      <p:sp>
+        <p:nvSpPr>
+          <p:cNvPr id="21" name="Onthul 2"/>
+          <p:cNvSpPr/>
+          <p:nvPr/>
+        </p:nvSpPr>
+        <p:spPr>
+          <a:xfrm>
+            <a:off x="6259068" y="3547872"/>
+            <a:ext cx="2526030" cy="237744"/>
+          </a:xfrm>
+          <a:prstGeom prst="roundRect">
+            <a:avLst>
+              <a:gd name="adj" fmla="val 20000"/>
+            </a:avLst>
+          </a:prstGeom>
+          <a:solidFill>
+            <a:srgbClr val="EEE8F5"/>
+          </a:solidFill>
+          <a:ln>
+            <a:noFill/>
+          </a:ln>
+          <a:effectLst/>
+        </p:spPr>
+        <p:style>
+          <a:lnRef idx="1">
+            <a:schemeClr val="accent1"/>
+          </a:lnRef>
+          <a:fillRef idx="3">
+            <a:schemeClr val="accent1"/>
+          </a:fillRef>
+          <a:effectRef idx="2">
+            <a:schemeClr val="accent1"/>
+          </a:effectRef>
+          <a:fontRef idx="minor">
+            <a:schemeClr val="lt1"/>
+          </a:fontRef>
+        </p:style>
+        <p:txBody>
+          <a:bodyPr rtlCol="0" anchor="ctr"/>
+          <a:lstStyle/>
+          <a:p/>
+        </p:txBody>
+      </p:sp>
+      <p:sp>
+        <p:nvSpPr>
+          <p:cNvPr id="22" name="OnthulTxt 2"/>
+          <p:cNvSpPr txBox="1"/>
+          <p:nvPr/>
+        </p:nvSpPr>
+        <p:spPr>
+          <a:xfrm>
+            <a:off x="6277356" y="3547872"/>
+            <a:ext cx="2489454" cy="237744"/>
+          </a:xfrm>
+          <a:prstGeom prst="rect">
+            <a:avLst/>
+          </a:prstGeom>
+          <a:noFill/>
+        </p:spPr>
+        <p:txBody>
+          <a:bodyPr wrap="square" anchor="ctr" lIns="45720" rIns="45720" tIns="27432" bIns="27432">
+            <a:normAutofit/>
+          </a:bodyPr>
+          <a:lstStyle/>
+          <a:p>
+            <a:pPr algn="l"/>
+            <a:r>
+              <a:rPr sz="850" b="1">
+                <a:solidFill>
+                  <a:srgbClr val="5B3E83"/>
+                </a:solidFill>
+                <a:latin typeface="Inter"/>
+              </a:rPr>
+              <a:t>¿en qué lugar va?</a:t>
+            </a:r>
+          </a:p>
+        </p:txBody>
+      </p:sp>
+      <p:sp>
+        <p:nvSpPr>
+          <p:cNvPr id="23" name="Tarjeta 3"/>
+          <p:cNvSpPr/>
+          <p:nvPr/>
+        </p:nvSpPr>
+        <p:spPr>
+          <a:xfrm>
+            <a:off x="9022842" y="2670048"/>
+            <a:ext cx="2708910" cy="1170432"/>
+          </a:xfrm>
+          <a:prstGeom prst="roundRect">
+            <a:avLst>
+              <a:gd name="adj" fmla="val 6000"/>
+            </a:avLst>
+          </a:prstGeom>
+          <a:solidFill>
+            <a:srgbClr val="FFFFFF"/>
+          </a:solidFill>
+          <a:ln w="12700">
+            <a:solidFill>
+              <a:srgbClr val="E4E3DE"/>
+            </a:solidFill>
+          </a:ln>
+          <a:effectLst/>
+        </p:spPr>
+        <p:style>
+          <a:lnRef idx="1">
+            <a:schemeClr val="accent1"/>
+          </a:lnRef>
+          <a:fillRef idx="3">
+            <a:schemeClr val="accent1"/>
+          </a:fillRef>
+          <a:effectRef idx="2">
+            <a:schemeClr val="accent1"/>
+          </a:effectRef>
+          <a:fontRef idx="minor">
+            <a:schemeClr val="lt1"/>
+          </a:fontRef>
+        </p:style>
+        <p:txBody>
+          <a:bodyPr rtlCol="0" anchor="ctr"/>
+          <a:lstStyle/>
+          <a:p/>
+        </p:txBody>
+      </p:sp>
+      <p:sp>
+        <p:nvSpPr>
+          <p:cNvPr id="24" name="TarjetaTxt 3"/>
+          <p:cNvSpPr txBox="1"/>
+          <p:nvPr/>
+        </p:nvSpPr>
+        <p:spPr>
+          <a:xfrm>
+            <a:off x="9114282" y="2724912"/>
+            <a:ext cx="2526030" cy="859536"/>
+          </a:xfrm>
+          <a:prstGeom prst="rect">
+            <a:avLst/>
+          </a:prstGeom>
+          <a:noFill/>
+        </p:spPr>
+        <p:txBody>
+          <a:bodyPr wrap="square" anchor="t" lIns="45720" rIns="45720" tIns="27432" bIns="27432">
+            <a:normAutofit/>
+          </a:bodyPr>
+          <a:lstStyle/>
+          <a:p>
+            <a:pPr algn="l"/>
+            <a:r>
+              <a:rPr sz="1100" b="1">
+                <a:solidFill>
+                  <a:srgbClr val="5B3E83"/>
+                </a:solidFill>
+                <a:latin typeface="Bricolage Grotesque"/>
+              </a:rPr>
+              <a:t>D</a:t>
+            </a:r>
+          </a:p>
+          <a:p>
+            <a:pPr algn="l"/>
+            <a:r>
+              <a:rPr sz="1000">
+                <a:solidFill>
+                  <a:srgbClr val="20242E"/>
+                </a:solidFill>
+                <a:latin typeface="Inter"/>
+              </a:rPr>
+              <a:t>Mientras él estaba lejos, alguien mintió y dijo que había muerto.</a:t>
+            </a:r>
+          </a:p>
+        </p:txBody>
+      </p:sp>
+      <p:sp>
+        <p:nvSpPr>
+          <p:cNvPr id="25" name="Onthul 3"/>
+          <p:cNvSpPr/>
+          <p:nvPr/>
+        </p:nvSpPr>
+        <p:spPr>
+          <a:xfrm>
+            <a:off x="9114282" y="3547872"/>
+            <a:ext cx="2526030" cy="237744"/>
+          </a:xfrm>
+          <a:prstGeom prst="roundRect">
+            <a:avLst>
+              <a:gd name="adj" fmla="val 20000"/>
+            </a:avLst>
+          </a:prstGeom>
+          <a:solidFill>
+            <a:srgbClr val="EEE8F5"/>
+          </a:solidFill>
+          <a:ln>
+            <a:noFill/>
+          </a:ln>
+          <a:effectLst/>
+        </p:spPr>
+        <p:style>
+          <a:lnRef idx="1">
+            <a:schemeClr val="accent1"/>
+          </a:lnRef>
+          <a:fillRef idx="3">
+            <a:schemeClr val="accent1"/>
+          </a:fillRef>
+          <a:effectRef idx="2">
+            <a:schemeClr val="accent1"/>
+          </a:effectRef>
+          <a:fontRef idx="minor">
+            <a:schemeClr val="lt1"/>
+          </a:fontRef>
+        </p:style>
+        <p:txBody>
+          <a:bodyPr rtlCol="0" anchor="ctr"/>
+          <a:lstStyle/>
+          <a:p/>
+        </p:txBody>
+      </p:sp>
+      <p:sp>
+        <p:nvSpPr>
+          <p:cNvPr id="26" name="OnthulTxt 3"/>
+          <p:cNvSpPr txBox="1"/>
+          <p:nvPr/>
+        </p:nvSpPr>
+        <p:spPr>
+          <a:xfrm>
+            <a:off x="9132570" y="3547872"/>
+            <a:ext cx="2489454" cy="237744"/>
+          </a:xfrm>
+          <a:prstGeom prst="rect">
+            <a:avLst/>
+          </a:prstGeom>
+          <a:noFill/>
+        </p:spPr>
+        <p:txBody>
+          <a:bodyPr wrap="square" anchor="ctr" lIns="45720" rIns="45720" tIns="27432" bIns="27432">
+            <a:normAutofit/>
+          </a:bodyPr>
+          <a:lstStyle/>
+          <a:p>
+            <a:pPr algn="l"/>
+            <a:r>
+              <a:rPr sz="850" b="1">
+                <a:solidFill>
+                  <a:srgbClr val="5B3E83"/>
+                </a:solidFill>
+                <a:latin typeface="Inter"/>
+              </a:rPr>
+              <a:t>¿en qué lugar va?</a:t>
+            </a:r>
+          </a:p>
+        </p:txBody>
+      </p:sp>
+      <p:sp>
+        <p:nvSpPr>
+          <p:cNvPr id="27" name="Tarjeta 4"/>
+          <p:cNvSpPr/>
+          <p:nvPr/>
+        </p:nvSpPr>
+        <p:spPr>
+          <a:xfrm>
+            <a:off x="457200" y="3968496"/>
+            <a:ext cx="2708910" cy="1170432"/>
+          </a:xfrm>
+          <a:prstGeom prst="roundRect">
+            <a:avLst>
+              <a:gd name="adj" fmla="val 6000"/>
+            </a:avLst>
+          </a:prstGeom>
+          <a:solidFill>
+            <a:srgbClr val="FFFFFF"/>
+          </a:solidFill>
+          <a:ln w="12700">
+            <a:solidFill>
+              <a:srgbClr val="E4E3DE"/>
+            </a:solidFill>
+          </a:ln>
+          <a:effectLst/>
+        </p:spPr>
+        <p:style>
+          <a:lnRef idx="1">
+            <a:schemeClr val="accent1"/>
+          </a:lnRef>
+          <a:fillRef idx="3">
+            <a:schemeClr val="accent1"/>
+          </a:fillRef>
+          <a:effectRef idx="2">
+            <a:schemeClr val="accent1"/>
+          </a:effectRef>
+          <a:fontRef idx="minor">
+            <a:schemeClr val="lt1"/>
+          </a:fontRef>
+        </p:style>
+        <p:txBody>
+          <a:bodyPr rtlCol="0" anchor="ctr"/>
+          <a:lstStyle/>
+          <a:p/>
+        </p:txBody>
+      </p:sp>
+      <p:sp>
+        <p:nvSpPr>
+          <p:cNvPr id="28" name="TarjetaTxt 4"/>
+          <p:cNvSpPr txBox="1"/>
+          <p:nvPr/>
+        </p:nvSpPr>
+        <p:spPr>
+          <a:xfrm>
+            <a:off x="548640" y="4023360"/>
+            <a:ext cx="2526030" cy="859536"/>
+          </a:xfrm>
+          <a:prstGeom prst="rect">
+            <a:avLst/>
+          </a:prstGeom>
+          <a:noFill/>
+        </p:spPr>
+        <p:txBody>
+          <a:bodyPr wrap="square" anchor="t" lIns="45720" rIns="45720" tIns="27432" bIns="27432">
+            <a:normAutofit/>
+          </a:bodyPr>
+          <a:lstStyle/>
+          <a:p>
+            <a:pPr algn="l"/>
+            <a:r>
+              <a:rPr sz="1100" b="1">
+                <a:solidFill>
+                  <a:srgbClr val="5B3E83"/>
+                </a:solidFill>
+                <a:latin typeface="Bricolage Grotesque"/>
+              </a:rPr>
+              <a:t>E</a:t>
+            </a:r>
+          </a:p>
+          <a:p>
+            <a:pPr algn="l"/>
+            <a:r>
+              <a:rPr sz="1000">
+                <a:solidFill>
+                  <a:srgbClr val="20242E"/>
+                </a:solidFill>
+                <a:latin typeface="Inter"/>
+              </a:rPr>
+              <a:t>Iztaccíhuatl se murió de tristeza.</a:t>
+            </a:r>
+          </a:p>
+        </p:txBody>
+      </p:sp>
+      <p:sp>
+        <p:nvSpPr>
+          <p:cNvPr id="29" name="Onthul 4"/>
+          <p:cNvSpPr/>
+          <p:nvPr/>
+        </p:nvSpPr>
+        <p:spPr>
+          <a:xfrm>
+            <a:off x="548640" y="4846320"/>
+            <a:ext cx="2526030" cy="237744"/>
+          </a:xfrm>
+          <a:prstGeom prst="roundRect">
+            <a:avLst>
+              <a:gd name="adj" fmla="val 20000"/>
+            </a:avLst>
+          </a:prstGeom>
+          <a:solidFill>
+            <a:srgbClr val="EEE8F5"/>
+          </a:solidFill>
+          <a:ln>
+            <a:noFill/>
+          </a:ln>
+          <a:effectLst/>
+        </p:spPr>
+        <p:style>
+          <a:lnRef idx="1">
+            <a:schemeClr val="accent1"/>
+          </a:lnRef>
+          <a:fillRef idx="3">
+            <a:schemeClr val="accent1"/>
+          </a:fillRef>
+          <a:effectRef idx="2">
+            <a:schemeClr val="accent1"/>
+          </a:effectRef>
+          <a:fontRef idx="minor">
+            <a:schemeClr val="lt1"/>
+          </a:fontRef>
+        </p:style>
+        <p:txBody>
+          <a:bodyPr rtlCol="0" anchor="ctr"/>
+          <a:lstStyle/>
+          <a:p/>
+        </p:txBody>
+      </p:sp>
+      <p:sp>
+        <p:nvSpPr>
+          <p:cNvPr id="30" name="OnthulTxt 4"/>
+          <p:cNvSpPr txBox="1"/>
+          <p:nvPr/>
+        </p:nvSpPr>
+        <p:spPr>
+          <a:xfrm>
+            <a:off x="566928" y="4846320"/>
+            <a:ext cx="2489454" cy="237744"/>
+          </a:xfrm>
+          <a:prstGeom prst="rect">
+            <a:avLst/>
+          </a:prstGeom>
+          <a:noFill/>
+        </p:spPr>
+        <p:txBody>
+          <a:bodyPr wrap="square" anchor="ctr" lIns="45720" rIns="45720" tIns="27432" bIns="27432">
+            <a:normAutofit/>
+          </a:bodyPr>
+          <a:lstStyle/>
+          <a:p>
+            <a:pPr algn="l"/>
+            <a:r>
+              <a:rPr sz="850" b="1">
+                <a:solidFill>
+                  <a:srgbClr val="5B3E83"/>
+                </a:solidFill>
+                <a:latin typeface="Inter"/>
+              </a:rPr>
+              <a:t>¿en qué lugar va?</a:t>
+            </a:r>
+          </a:p>
+        </p:txBody>
+      </p:sp>
+      <p:sp>
+        <p:nvSpPr>
+          <p:cNvPr id="31" name="Tarjeta 5"/>
+          <p:cNvSpPr/>
+          <p:nvPr/>
+        </p:nvSpPr>
+        <p:spPr>
+          <a:xfrm>
+            <a:off x="3312414" y="3968496"/>
+            <a:ext cx="2708910" cy="1170432"/>
+          </a:xfrm>
+          <a:prstGeom prst="roundRect">
+            <a:avLst>
+              <a:gd name="adj" fmla="val 6000"/>
+            </a:avLst>
+          </a:prstGeom>
+          <a:solidFill>
+            <a:srgbClr val="FFFFFF"/>
+          </a:solidFill>
+          <a:ln w="12700">
+            <a:solidFill>
+              <a:srgbClr val="E4E3DE"/>
+            </a:solidFill>
+          </a:ln>
+          <a:effectLst/>
+        </p:spPr>
+        <p:style>
+          <a:lnRef idx="1">
+            <a:schemeClr val="accent1"/>
+          </a:lnRef>
+          <a:fillRef idx="3">
+            <a:schemeClr val="accent1"/>
+          </a:fillRef>
+          <a:effectRef idx="2">
+            <a:schemeClr val="accent1"/>
+          </a:effectRef>
+          <a:fontRef idx="minor">
+            <a:schemeClr val="lt1"/>
+          </a:fontRef>
+        </p:style>
+        <p:txBody>
+          <a:bodyPr rtlCol="0" anchor="ctr"/>
+          <a:lstStyle/>
+          <a:p/>
+        </p:txBody>
+      </p:sp>
+      <p:sp>
+        <p:nvSpPr>
+          <p:cNvPr id="32" name="TarjetaTxt 5"/>
+          <p:cNvSpPr txBox="1"/>
+          <p:nvPr/>
+        </p:nvSpPr>
+        <p:spPr>
+          <a:xfrm>
+            <a:off x="3403854" y="4023360"/>
+            <a:ext cx="2526030" cy="859536"/>
+          </a:xfrm>
+          <a:prstGeom prst="rect">
+            <a:avLst/>
+          </a:prstGeom>
+          <a:noFill/>
+        </p:spPr>
+        <p:txBody>
+          <a:bodyPr wrap="square" anchor="t" lIns="45720" rIns="45720" tIns="27432" bIns="27432">
+            <a:normAutofit/>
+          </a:bodyPr>
+          <a:lstStyle/>
+          <a:p>
+            <a:pPr algn="l"/>
+            <a:r>
+              <a:rPr sz="1100" b="1">
+                <a:solidFill>
+                  <a:srgbClr val="5B3E83"/>
+                </a:solidFill>
+                <a:latin typeface="Bricolage Grotesque"/>
+              </a:rPr>
+              <a:t>F</a:t>
+            </a:r>
+          </a:p>
+          <a:p>
+            <a:pPr algn="l"/>
+            <a:r>
+              <a:rPr sz="1000">
+                <a:solidFill>
+                  <a:srgbClr val="20242E"/>
+                </a:solidFill>
+                <a:latin typeface="Inter"/>
+              </a:rPr>
+              <a:t>Popocatépetl volvió vencedor y la encontró muerta.</a:t>
+            </a:r>
+          </a:p>
+        </p:txBody>
+      </p:sp>
+      <p:sp>
+        <p:nvSpPr>
+          <p:cNvPr id="33" name="Onthul 5"/>
+          <p:cNvSpPr/>
+          <p:nvPr/>
+        </p:nvSpPr>
+        <p:spPr>
+          <a:xfrm>
+            <a:off x="3403854" y="4846320"/>
+            <a:ext cx="2526030" cy="237744"/>
+          </a:xfrm>
+          <a:prstGeom prst="roundRect">
+            <a:avLst>
+              <a:gd name="adj" fmla="val 20000"/>
+            </a:avLst>
+          </a:prstGeom>
+          <a:solidFill>
+            <a:srgbClr val="EEE8F5"/>
+          </a:solidFill>
+          <a:ln>
+            <a:noFill/>
+          </a:ln>
+          <a:effectLst/>
+        </p:spPr>
+        <p:style>
+          <a:lnRef idx="1">
+            <a:schemeClr val="accent1"/>
+          </a:lnRef>
+          <a:fillRef idx="3">
+            <a:schemeClr val="accent1"/>
+          </a:fillRef>
+          <a:effectRef idx="2">
+            <a:schemeClr val="accent1"/>
+          </a:effectRef>
+          <a:fontRef idx="minor">
+            <a:schemeClr val="lt1"/>
+          </a:fontRef>
+        </p:style>
+        <p:txBody>
+          <a:bodyPr rtlCol="0" anchor="ctr"/>
+          <a:lstStyle/>
+          <a:p/>
+        </p:txBody>
+      </p:sp>
+      <p:sp>
+        <p:nvSpPr>
+          <p:cNvPr id="34" name="OnthulTxt 5"/>
+          <p:cNvSpPr txBox="1"/>
+          <p:nvPr/>
+        </p:nvSpPr>
+        <p:spPr>
+          <a:xfrm>
+            <a:off x="3422142" y="4846320"/>
+            <a:ext cx="2489454" cy="237744"/>
+          </a:xfrm>
+          <a:prstGeom prst="rect">
+            <a:avLst/>
+          </a:prstGeom>
+          <a:noFill/>
+        </p:spPr>
+        <p:txBody>
+          <a:bodyPr wrap="square" anchor="ctr" lIns="45720" rIns="45720" tIns="27432" bIns="27432">
+            <a:normAutofit/>
+          </a:bodyPr>
+          <a:lstStyle/>
+          <a:p>
+            <a:pPr algn="l"/>
+            <a:r>
+              <a:rPr sz="850" b="1">
+                <a:solidFill>
+                  <a:srgbClr val="5B3E83"/>
+                </a:solidFill>
+                <a:latin typeface="Inter"/>
+              </a:rPr>
+              <a:t>¿en qué lugar va?</a:t>
+            </a:r>
+          </a:p>
+        </p:txBody>
+      </p:sp>
+      <p:sp>
+        <p:nvSpPr>
+          <p:cNvPr id="35" name="Tarjeta 6"/>
+          <p:cNvSpPr/>
+          <p:nvPr/>
+        </p:nvSpPr>
+        <p:spPr>
+          <a:xfrm>
+            <a:off x="6167628" y="3968496"/>
+            <a:ext cx="2708910" cy="1170432"/>
+          </a:xfrm>
+          <a:prstGeom prst="roundRect">
+            <a:avLst>
+              <a:gd name="adj" fmla="val 6000"/>
+            </a:avLst>
+          </a:prstGeom>
+          <a:solidFill>
+            <a:srgbClr val="FFFFFF"/>
+          </a:solidFill>
+          <a:ln w="12700">
+            <a:solidFill>
+              <a:srgbClr val="E4E3DE"/>
+            </a:solidFill>
+          </a:ln>
+          <a:effectLst/>
+        </p:spPr>
+        <p:style>
+          <a:lnRef idx="1">
+            <a:schemeClr val="accent1"/>
+          </a:lnRef>
+          <a:fillRef idx="3">
+            <a:schemeClr val="accent1"/>
+          </a:fillRef>
+          <a:effectRef idx="2">
+            <a:schemeClr val="accent1"/>
+          </a:effectRef>
+          <a:fontRef idx="minor">
+            <a:schemeClr val="lt1"/>
+          </a:fontRef>
+        </p:style>
+        <p:txBody>
+          <a:bodyPr rtlCol="0" anchor="ctr"/>
+          <a:lstStyle/>
+          <a:p/>
+        </p:txBody>
+      </p:sp>
+      <p:sp>
+        <p:nvSpPr>
+          <p:cNvPr id="36" name="TarjetaTxt 6"/>
+          <p:cNvSpPr txBox="1"/>
+          <p:nvPr/>
+        </p:nvSpPr>
+        <p:spPr>
+          <a:xfrm>
+            <a:off x="6259068" y="4023360"/>
+            <a:ext cx="2526030" cy="859536"/>
+          </a:xfrm>
+          <a:prstGeom prst="rect">
+            <a:avLst/>
+          </a:prstGeom>
+          <a:noFill/>
+        </p:spPr>
+        <p:txBody>
+          <a:bodyPr wrap="square" anchor="t" lIns="45720" rIns="45720" tIns="27432" bIns="27432">
+            <a:normAutofit/>
+          </a:bodyPr>
+          <a:lstStyle/>
+          <a:p>
+            <a:pPr algn="l"/>
+            <a:r>
+              <a:rPr sz="1100" b="1">
+                <a:solidFill>
+                  <a:srgbClr val="5B3E83"/>
+                </a:solidFill>
+                <a:latin typeface="Bricolage Grotesque"/>
+              </a:rPr>
+              <a:t>G</a:t>
+            </a:r>
+          </a:p>
+          <a:p>
+            <a:pPr algn="l"/>
+            <a:r>
+              <a:rPr sz="1000">
+                <a:solidFill>
+                  <a:srgbClr val="20242E"/>
+                </a:solidFill>
+                <a:latin typeface="Inter"/>
+              </a:rPr>
+              <a:t>La llevó a la montaña y se quedó a su lado con una antorcha.</a:t>
+            </a:r>
+          </a:p>
+        </p:txBody>
+      </p:sp>
+      <p:sp>
+        <p:nvSpPr>
+          <p:cNvPr id="37" name="Onthul 6"/>
+          <p:cNvSpPr/>
+          <p:nvPr/>
+        </p:nvSpPr>
+        <p:spPr>
+          <a:xfrm>
+            <a:off x="6259068" y="4846320"/>
+            <a:ext cx="2526030" cy="237744"/>
+          </a:xfrm>
+          <a:prstGeom prst="roundRect">
+            <a:avLst>
+              <a:gd name="adj" fmla="val 20000"/>
+            </a:avLst>
+          </a:prstGeom>
+          <a:solidFill>
+            <a:srgbClr val="EEE8F5"/>
+          </a:solidFill>
+          <a:ln>
+            <a:noFill/>
+          </a:ln>
+          <a:effectLst/>
+        </p:spPr>
+        <p:style>
+          <a:lnRef idx="1">
+            <a:schemeClr val="accent1"/>
+          </a:lnRef>
+          <a:fillRef idx="3">
+            <a:schemeClr val="accent1"/>
+          </a:fillRef>
+          <a:effectRef idx="2">
+            <a:schemeClr val="accent1"/>
+          </a:effectRef>
+          <a:fontRef idx="minor">
+            <a:schemeClr val="lt1"/>
+          </a:fontRef>
+        </p:style>
+        <p:txBody>
+          <a:bodyPr rtlCol="0" anchor="ctr"/>
+          <a:lstStyle/>
+          <a:p/>
+        </p:txBody>
+      </p:sp>
+      <p:sp>
+        <p:nvSpPr>
+          <p:cNvPr id="38" name="OnthulTxt 6"/>
+          <p:cNvSpPr txBox="1"/>
+          <p:nvPr/>
+        </p:nvSpPr>
+        <p:spPr>
+          <a:xfrm>
+            <a:off x="6277356" y="4846320"/>
+            <a:ext cx="2489454" cy="237744"/>
+          </a:xfrm>
+          <a:prstGeom prst="rect">
+            <a:avLst/>
+          </a:prstGeom>
+          <a:noFill/>
+        </p:spPr>
+        <p:txBody>
+          <a:bodyPr wrap="square" anchor="ctr" lIns="45720" rIns="45720" tIns="27432" bIns="27432">
+            <a:normAutofit/>
+          </a:bodyPr>
+          <a:lstStyle/>
+          <a:p>
+            <a:pPr algn="l"/>
+            <a:r>
+              <a:rPr sz="850" b="1">
+                <a:solidFill>
+                  <a:srgbClr val="5B3E83"/>
+                </a:solidFill>
+                <a:latin typeface="Inter"/>
+              </a:rPr>
+              <a:t>¿en qué lugar va?</a:t>
+            </a:r>
+          </a:p>
+        </p:txBody>
+      </p:sp>
+      <p:sp>
+        <p:nvSpPr>
+          <p:cNvPr id="39" name="Tarjeta 7"/>
+          <p:cNvSpPr/>
+          <p:nvPr/>
+        </p:nvSpPr>
+        <p:spPr>
+          <a:xfrm>
+            <a:off x="9022842" y="3968496"/>
+            <a:ext cx="2708910" cy="1170432"/>
+          </a:xfrm>
+          <a:prstGeom prst="roundRect">
+            <a:avLst>
+              <a:gd name="adj" fmla="val 6000"/>
+            </a:avLst>
+          </a:prstGeom>
+          <a:solidFill>
+            <a:srgbClr val="FFFFFF"/>
+          </a:solidFill>
+          <a:ln w="12700">
+            <a:solidFill>
+              <a:srgbClr val="E4E3DE"/>
+            </a:solidFill>
+          </a:ln>
+          <a:effectLst/>
+        </p:spPr>
+        <p:style>
+          <a:lnRef idx="1">
+            <a:schemeClr val="accent1"/>
+          </a:lnRef>
+          <a:fillRef idx="3">
+            <a:schemeClr val="accent1"/>
+          </a:fillRef>
+          <a:effectRef idx="2">
+            <a:schemeClr val="accent1"/>
+          </a:effectRef>
+          <a:fontRef idx="minor">
+            <a:schemeClr val="lt1"/>
+          </a:fontRef>
+        </p:style>
+        <p:txBody>
+          <a:bodyPr rtlCol="0" anchor="ctr"/>
+          <a:lstStyle/>
+          <a:p/>
+        </p:txBody>
+      </p:sp>
+      <p:sp>
+        <p:nvSpPr>
+          <p:cNvPr id="40" name="TarjetaTxt 7"/>
+          <p:cNvSpPr txBox="1"/>
+          <p:nvPr/>
+        </p:nvSpPr>
+        <p:spPr>
+          <a:xfrm>
+            <a:off x="9114282" y="4023360"/>
+            <a:ext cx="2526030" cy="859536"/>
+          </a:xfrm>
+          <a:prstGeom prst="rect">
+            <a:avLst/>
+          </a:prstGeom>
+          <a:noFill/>
+        </p:spPr>
+        <p:txBody>
+          <a:bodyPr wrap="square" anchor="t" lIns="45720" rIns="45720" tIns="27432" bIns="27432">
+            <a:normAutofit/>
+          </a:bodyPr>
+          <a:lstStyle/>
+          <a:p>
+            <a:pPr algn="l"/>
+            <a:r>
+              <a:rPr sz="1100" b="1">
+                <a:solidFill>
+                  <a:srgbClr val="5B3E83"/>
+                </a:solidFill>
+                <a:latin typeface="Bricolage Grotesque"/>
+              </a:rPr>
+              <a:t>H</a:t>
+            </a:r>
+          </a:p>
+          <a:p>
+            <a:pPr algn="l"/>
+            <a:r>
+              <a:rPr sz="1000">
+                <a:solidFill>
+                  <a:srgbClr val="20242E"/>
+                </a:solidFill>
+                <a:latin typeface="Inter"/>
+              </a:rPr>
+              <a:t>Por eso hoy hay dos volcanes: uno dormido y otro que todavía echa humo.</a:t>
+            </a:r>
+          </a:p>
+        </p:txBody>
+      </p:sp>
+      <p:sp>
+        <p:nvSpPr>
+          <p:cNvPr id="41" name="Onthul 7"/>
+          <p:cNvSpPr/>
+          <p:nvPr/>
+        </p:nvSpPr>
+        <p:spPr>
+          <a:xfrm>
+            <a:off x="9114282" y="4846320"/>
+            <a:ext cx="2526030" cy="237744"/>
+          </a:xfrm>
+          <a:prstGeom prst="roundRect">
+            <a:avLst>
+              <a:gd name="adj" fmla="val 20000"/>
+            </a:avLst>
+          </a:prstGeom>
+          <a:solidFill>
+            <a:srgbClr val="EEE8F5"/>
+          </a:solidFill>
+          <a:ln>
+            <a:noFill/>
+          </a:ln>
+          <a:effectLst/>
+        </p:spPr>
+        <p:style>
+          <a:lnRef idx="1">
+            <a:schemeClr val="accent1"/>
+          </a:lnRef>
+          <a:fillRef idx="3">
+            <a:schemeClr val="accent1"/>
+          </a:fillRef>
+          <a:effectRef idx="2">
+            <a:schemeClr val="accent1"/>
+          </a:effectRef>
+          <a:fontRef idx="minor">
+            <a:schemeClr val="lt1"/>
+          </a:fontRef>
+        </p:style>
+        <p:txBody>
+          <a:bodyPr rtlCol="0" anchor="ctr"/>
+          <a:lstStyle/>
+          <a:p/>
+        </p:txBody>
+      </p:sp>
+      <p:sp>
+        <p:nvSpPr>
+          <p:cNvPr id="42" name="OnthulTxt 7"/>
+          <p:cNvSpPr txBox="1"/>
+          <p:nvPr/>
+        </p:nvSpPr>
+        <p:spPr>
+          <a:xfrm>
+            <a:off x="9132570" y="4846320"/>
+            <a:ext cx="2489454" cy="237744"/>
+          </a:xfrm>
+          <a:prstGeom prst="rect">
+            <a:avLst/>
+          </a:prstGeom>
+          <a:noFill/>
+        </p:spPr>
+        <p:txBody>
+          <a:bodyPr wrap="square" anchor="ctr" lIns="45720" rIns="45720" tIns="27432" bIns="27432">
+            <a:normAutofit/>
+          </a:bodyPr>
+          <a:lstStyle/>
+          <a:p>
+            <a:pPr algn="l"/>
+            <a:r>
+              <a:rPr sz="850" b="1">
+                <a:solidFill>
+                  <a:srgbClr val="5B3E83"/>
+                </a:solidFill>
+                <a:latin typeface="Inter"/>
+              </a:rPr>
+              <a:t>¿en qué lugar va?</a:t>
+            </a:r>
+          </a:p>
+        </p:txBody>
+      </p:sp>
+      <p:sp>
+        <p:nvSpPr>
+          <p:cNvPr id="43" name="Tarjeta 8"/>
+          <p:cNvSpPr/>
+          <p:nvPr/>
+        </p:nvSpPr>
+        <p:spPr>
+          <a:xfrm>
+            <a:off x="457200" y="5266944"/>
+            <a:ext cx="2708910" cy="1170432"/>
+          </a:xfrm>
+          <a:prstGeom prst="roundRect">
+            <a:avLst>
+              <a:gd name="adj" fmla="val 6000"/>
+            </a:avLst>
+          </a:prstGeom>
+          <a:solidFill>
+            <a:srgbClr val="FFFFFF"/>
+          </a:solidFill>
+          <a:ln w="12700">
+            <a:solidFill>
+              <a:srgbClr val="E4E3DE"/>
+            </a:solidFill>
+          </a:ln>
+          <a:effectLst/>
+        </p:spPr>
+        <p:style>
+          <a:lnRef idx="1">
+            <a:schemeClr val="accent1"/>
+          </a:lnRef>
+          <a:fillRef idx="3">
+            <a:schemeClr val="accent1"/>
+          </a:fillRef>
+          <a:effectRef idx="2">
+            <a:schemeClr val="accent1"/>
+          </a:effectRef>
+          <a:fontRef idx="minor">
+            <a:schemeClr val="lt1"/>
+          </a:fontRef>
+        </p:style>
+        <p:txBody>
+          <a:bodyPr rtlCol="0" anchor="ctr"/>
+          <a:lstStyle/>
+          <a:p/>
+        </p:txBody>
+      </p:sp>
+      <p:sp>
+        <p:nvSpPr>
+          <p:cNvPr id="44" name="TarjetaTxt 8"/>
+          <p:cNvSpPr txBox="1"/>
+          <p:nvPr/>
+        </p:nvSpPr>
+        <p:spPr>
+          <a:xfrm>
+            <a:off x="548640" y="5321808"/>
+            <a:ext cx="2526030" cy="1060704"/>
+          </a:xfrm>
+          <a:prstGeom prst="rect">
+            <a:avLst/>
+          </a:prstGeom>
+          <a:noFill/>
+        </p:spPr>
+        <p:txBody>
+          <a:bodyPr wrap="square" anchor="t" lIns="45720" rIns="45720" tIns="27432" bIns="27432">
+            <a:normAutofit/>
+          </a:bodyPr>
+          <a:lstStyle/>
+          <a:p>
+            <a:pPr algn="l"/>
+            <a:r>
+              <a:rPr sz="1100" b="1">
+                <a:solidFill>
+                  <a:srgbClr val="5B3E83"/>
+                </a:solidFill>
+                <a:latin typeface="Bricolage Grotesque"/>
+              </a:rPr>
+              <a:t>Conectores</a:t>
+            </a:r>
+          </a:p>
+          <a:p>
+            <a:pPr algn="l"/>
+            <a:r>
+              <a:rPr sz="1000">
+                <a:solidFill>
+                  <a:srgbClr val="20242E"/>
+                </a:solidFill>
+                <a:latin typeface="Inter"/>
+              </a:rPr>
+              <a:t>Érase una vez · Un día · Entonces · Mientras tanto</a:t>
+            </a:r>
+          </a:p>
+        </p:txBody>
+      </p:sp>
+      <p:sp>
+        <p:nvSpPr>
+          <p:cNvPr id="45" name="Tarjeta 9"/>
+          <p:cNvSpPr/>
+          <p:nvPr/>
+        </p:nvSpPr>
+        <p:spPr>
+          <a:xfrm>
+            <a:off x="3312414" y="5266944"/>
+            <a:ext cx="2708910" cy="1170432"/>
+          </a:xfrm>
+          <a:prstGeom prst="roundRect">
+            <a:avLst>
+              <a:gd name="adj" fmla="val 6000"/>
+            </a:avLst>
+          </a:prstGeom>
+          <a:solidFill>
+            <a:srgbClr val="FFFFFF"/>
+          </a:solidFill>
+          <a:ln w="12700">
+            <a:solidFill>
+              <a:srgbClr val="E4E3DE"/>
+            </a:solidFill>
+          </a:ln>
+          <a:effectLst/>
+        </p:spPr>
+        <p:style>
+          <a:lnRef idx="1">
+            <a:schemeClr val="accent1"/>
+          </a:lnRef>
+          <a:fillRef idx="3">
+            <a:schemeClr val="accent1"/>
+          </a:fillRef>
+          <a:effectRef idx="2">
+            <a:schemeClr val="accent1"/>
+          </a:effectRef>
+          <a:fontRef idx="minor">
+            <a:schemeClr val="lt1"/>
+          </a:fontRef>
+        </p:style>
+        <p:txBody>
+          <a:bodyPr rtlCol="0" anchor="ctr"/>
+          <a:lstStyle/>
+          <a:p/>
+        </p:txBody>
+      </p:sp>
+      <p:sp>
+        <p:nvSpPr>
+          <p:cNvPr id="46" name="TarjetaTxt 9"/>
+          <p:cNvSpPr txBox="1"/>
+          <p:nvPr/>
+        </p:nvSpPr>
+        <p:spPr>
+          <a:xfrm>
+            <a:off x="3403854" y="5321808"/>
+            <a:ext cx="2526030" cy="1060704"/>
+          </a:xfrm>
+          <a:prstGeom prst="rect">
+            <a:avLst/>
+          </a:prstGeom>
+          <a:noFill/>
+        </p:spPr>
+        <p:txBody>
+          <a:bodyPr wrap="square" anchor="t" lIns="45720" rIns="45720" tIns="27432" bIns="27432">
+            <a:normAutofit/>
+          </a:bodyPr>
+          <a:lstStyle/>
+          <a:p>
+            <a:pPr algn="l"/>
+            <a:r>
+              <a:rPr sz="1100" b="1">
+                <a:solidFill>
+                  <a:srgbClr val="5B3E83"/>
+                </a:solidFill>
+                <a:latin typeface="Bricolage Grotesque"/>
+              </a:rPr>
+              <a:t>Conectores</a:t>
+            </a:r>
+          </a:p>
+          <a:p>
+            <a:pPr algn="l"/>
+            <a:r>
+              <a:rPr sz="1000">
+                <a:solidFill>
+                  <a:srgbClr val="20242E"/>
+                </a:solidFill>
+                <a:latin typeface="Inter"/>
+              </a:rPr>
+              <a:t>Cuando volvió · Desde entonces · Al final · Por eso</a:t>
+            </a:r>
+          </a:p>
+        </p:txBody>
+      </p:sp>
+    </p:spTree>
+  </p:cSld>
+  <p:clrMapOvr>
+    <a:masterClrMapping/>
+  </p:clrMapOvr>
+  <p:timing>
+    <p:tnLst>
+      <p:par>
+        <p:cTn id="1" dur="indefinite" restart="never" nodeType="tmRoot">
+          <p:childTnLst>
+            <p:seq concurrent="1" nextAc="seek">
+              <p:cTn id="2" dur="indefinite" nodeType="mainSeq">
+                <p:childTnLst>
+                  <p:par>
+                    <p:cTn id="5" fill="hold">
+                      <p:stCondLst>
+                        <p:cond delay="indefinite"/>
+                      </p:stCondLst>
+                      <p:childTnLst>
+                        <p:par>
+                          <p:cTn id="6" fill="hold">
+                            <p:stCondLst>
+                              <p:cond delay="0"/>
+                            </p:stCondLst>
+                            <p:childTnLst>
+                              <p:par>
+                                <p:cTn id="7" presetID="10" presetClass="entr" presetSubtype="0" fill="hold" grpId="0" nodeType="clickEffect">
+                                  <p:stCondLst>
+                                    <p:cond delay="0"/>
+                                  </p:stCondLst>
+                                  <p:childTnLst>
+                                    <p:set>
+                                      <p:cBhvr>
+                                        <p:cTn id="8" dur="1" fill="hold">
+                                          <p:stCondLst>
+                                            <p:cond delay="0"/>
+                                          </p:stCondLst>
+                                        </p:cTn>
+                                        <p:tgtEl>
+                                          <p:spTgt spid="13"/>
+                                        </p:tgtEl>
+                                        <p:attrNameLst>
+                                          <p:attrName>style.visibility</p:attrName>
+                                        </p:attrNameLst>
+                                      </p:cBhvr>
+                                      <p:to>
+                                        <p:strVal val="visible"/>
+                                      </p:to>
+                                    </p:set>
+                                    <p:animEffect transition="in" filter="fade">
+                                      <p:cBhvr>
+                                        <p:cTn id="9" dur="500"/>
+                                        <p:tgtEl>
+                                          <p:spTgt spid="13"/>
+                                        </p:tgtEl>
+                                      </p:cBhvr>
+                                    </p:animEffect>
+                                  </p:childTnLst>
+                                </p:cTn>
+                              </p:par>
+                            </p:childTnLst>
+                          </p:cTn>
+                        </p:par>
+                      </p:childTnLst>
+                    </p:cTn>
+                  </p:par>
+                  <p:par>
+                    <p:cTn id="10" fill="hold">
+                      <p:stCondLst>
+                        <p:cond delay="indefinite"/>
+                      </p:stCondLst>
+                      <p:childTnLst>
+                        <p:par>
+                          <p:cTn id="11" fill="hold">
+                            <p:stCondLst>
+                              <p:cond delay="0"/>
+                            </p:stCondLst>
+                            <p:childTnLst>
+                              <p:par>
+                                <p:cTn id="12" presetID="10" presetClass="entr" presetSubtype="0" fill="hold" grpId="0" nodeType="clickEffect">
+                                  <p:stCondLst>
+                                    <p:cond delay="0"/>
+                                  </p:stCondLst>
+                                  <p:childTnLst>
+                                    <p:set>
+                                      <p:cBhvr>
+                                        <p:cTn id="13" dur="1" fill="hold">
+                                          <p:stCondLst>
+                                            <p:cond delay="0"/>
+                                          </p:stCondLst>
+                                        </p:cTn>
+                                        <p:tgtEl>
+                                          <p:spTgt spid="14"/>
+                                        </p:tgtEl>
+                                        <p:attrNameLst>
+                                          <p:attrName>style.visibility</p:attrName>
+                                        </p:attrNameLst>
+                                      </p:cBhvr>
+                                      <p:to>
+                                        <p:strVal val="visible"/>
+                                      </p:to>
+                                    </p:set>
+                                    <p:animEffect transition="in" filter="fade">
+                                      <p:cBhvr>
+                                        <p:cTn id="14" dur="500"/>
+                                        <p:tgtEl>
+                                          <p:spTgt spid="14"/>
+                                        </p:tgtEl>
+                                      </p:cBhvr>
+                                    </p:animEffect>
+                                  </p:childTnLst>
+                                </p:cTn>
+                              </p:par>
+                            </p:childTnLst>
+                          </p:cTn>
+                        </p:par>
+                      </p:childTnLst>
+                    </p:cTn>
+                  </p:par>
+                  <p:par>
+                    <p:cTn id="15" fill="hold">
+                      <p:stCondLst>
+                        <p:cond delay="indefinite"/>
+                      </p:stCondLst>
+                      <p:childTnLst>
+                        <p:par>
+                          <p:cTn id="16" fill="hold">
+                            <p:stCondLst>
+                              <p:cond delay="0"/>
+                            </p:stCondLst>
+                            <p:childTnLst>
+                              <p:par>
+                                <p:cTn id="17" presetID="10" presetClass="entr" presetSubtype="0" fill="hold" grpId="0" nodeType="clickEffect">
+                                  <p:stCondLst>
+                                    <p:cond delay="0"/>
+                                  </p:stCondLst>
+                                  <p:childTnLst>
+                                    <p:set>
+                                      <p:cBhvr>
+                                        <p:cTn id="18" dur="1" fill="hold">
+                                          <p:stCondLst>
+                                            <p:cond delay="0"/>
+                                          </p:stCondLst>
+                                        </p:cTn>
+                                        <p:tgtEl>
+                                          <p:spTgt spid="17"/>
+                                        </p:tgtEl>
+                                        <p:attrNameLst>
+                                          <p:attrName>style.visibility</p:attrName>
+                                        </p:attrNameLst>
+                                      </p:cBhvr>
+                                      <p:to>
+                                        <p:strVal val="visible"/>
+                                      </p:to>
+                                    </p:set>
+                                    <p:animEffect transition="in" filter="fade">
+                                      <p:cBhvr>
+                                        <p:cTn id="19" dur="500"/>
+                                        <p:tgtEl>
+                                          <p:spTgt spid="17"/>
+                                        </p:tgtEl>
+                                      </p:cBhvr>
+                                    </p:animEffect>
+                                  </p:childTnLst>
+                                </p:cTn>
+                              </p:par>
+                            </p:childTnLst>
+                          </p:cTn>
+                        </p:par>
+                      </p:childTnLst>
+                    </p:cTn>
+                  </p:par>
+                  <p:par>
+                    <p:cTn id="20" fill="hold">
+                      <p:stCondLst>
+                        <p:cond delay="indefinite"/>
+                      </p:stCondLst>
+                      <p:childTnLst>
+                        <p:par>
+                          <p:cTn id="21" fill="hold">
+                            <p:stCondLst>
+                              <p:cond delay="0"/>
+                            </p:stCondLst>
+                            <p:childTnLst>
+                              <p:par>
+                                <p:cTn id="22" presetID="10" presetClass="entr" presetSubtype="0" fill="hold" grpId="0" nodeType="clickEffect">
+                                  <p:stCondLst>
+                                    <p:cond delay="0"/>
+                                  </p:stCondLst>
+                                  <p:childTnLst>
+                                    <p:set>
+                                      <p:cBhvr>
+                                        <p:cTn id="23" dur="1" fill="hold">
+                                          <p:stCondLst>
+                                            <p:cond delay="0"/>
+                                          </p:stCondLst>
+                                        </p:cTn>
+                                        <p:tgtEl>
+                                          <p:spTgt spid="18"/>
+                                        </p:tgtEl>
+                                        <p:attrNameLst>
+                                          <p:attrName>style.visibility</p:attrName>
+                                        </p:attrNameLst>
+                                      </p:cBhvr>
+                                      <p:to>
+                                        <p:strVal val="visible"/>
+                                      </p:to>
+                                    </p:set>
+                                    <p:animEffect transition="in" filter="fade">
+                                      <p:cBhvr>
+                                        <p:cTn id="24" dur="500"/>
+                                        <p:tgtEl>
+                                          <p:spTgt spid="18"/>
+                                        </p:tgtEl>
+                                      </p:cBhvr>
+                                    </p:animEffect>
+                                  </p:childTnLst>
+                                </p:cTn>
+                              </p:par>
+                            </p:childTnLst>
+                          </p:cTn>
+                        </p:par>
+                      </p:childTnLst>
+                    </p:cTn>
+                  </p:par>
+                  <p:par>
+                    <p:cTn id="25" fill="hold">
+                      <p:stCondLst>
+                        <p:cond delay="indefinite"/>
+                      </p:stCondLst>
+                      <p:childTnLst>
+                        <p:par>
+                          <p:cTn id="26" fill="hold">
+                            <p:stCondLst>
+                              <p:cond delay="0"/>
+                            </p:stCondLst>
+                            <p:childTnLst>
+                              <p:par>
+                                <p:cTn id="27" presetID="10" presetClass="entr" presetSubtype="0" fill="hold" grpId="0" nodeType="clickEffect">
+                                  <p:stCondLst>
+                                    <p:cond delay="0"/>
+                                  </p:stCondLst>
+                                  <p:childTnLst>
+                                    <p:set>
+                                      <p:cBhvr>
+                                        <p:cTn id="28" dur="1" fill="hold">
+                                          <p:stCondLst>
+                                            <p:cond delay="0"/>
+                                          </p:stCondLst>
+                                        </p:cTn>
+                                        <p:tgtEl>
+                                          <p:spTgt spid="21"/>
+                                        </p:tgtEl>
+                                        <p:attrNameLst>
+                                          <p:attrName>style.visibility</p:attrName>
+                                        </p:attrNameLst>
+                                      </p:cBhvr>
+                                      <p:to>
+                                        <p:strVal val="visible"/>
+                                      </p:to>
+                                    </p:set>
+                                    <p:animEffect transition="in" filter="fade">
+                                      <p:cBhvr>
+                                        <p:cTn id="29" dur="500"/>
+                                        <p:tgtEl>
+                                          <p:spTgt spid="21"/>
+                                        </p:tgtEl>
+                                      </p:cBhvr>
+                                    </p:animEffect>
+                                  </p:childTnLst>
+                                </p:cTn>
+                              </p:par>
+                            </p:childTnLst>
+                          </p:cTn>
+                        </p:par>
+                      </p:childTnLst>
+                    </p:cTn>
+                  </p:par>
+                  <p:par>
+                    <p:cTn id="30" fill="hold">
+                      <p:stCondLst>
+                        <p:cond delay="indefinite"/>
+                      </p:stCondLst>
+                      <p:childTnLst>
+                        <p:par>
+                          <p:cTn id="31" fill="hold">
+                            <p:stCondLst>
+                              <p:cond delay="0"/>
+                            </p:stCondLst>
+                            <p:childTnLst>
+                              <p:par>
+                                <p:cTn id="32" presetID="10" presetClass="entr" presetSubtype="0" fill="hold" grpId="0" nodeType="clickEffect">
+                                  <p:stCondLst>
+                                    <p:cond delay="0"/>
+                                  </p:stCondLst>
+                                  <p:childTnLst>
+                                    <p:set>
+                                      <p:cBhvr>
+                                        <p:cTn id="33" dur="1" fill="hold">
+                                          <p:stCondLst>
+                                            <p:cond delay="0"/>
+                                          </p:stCondLst>
+                                        </p:cTn>
+                                        <p:tgtEl>
+                                          <p:spTgt spid="22"/>
+                                        </p:tgtEl>
+                                        <p:attrNameLst>
+                                          <p:attrName>style.visibility</p:attrName>
+                                        </p:attrNameLst>
+                                      </p:cBhvr>
+                                      <p:to>
+                                        <p:strVal val="visible"/>
+                                      </p:to>
+                                    </p:set>
+                                    <p:animEffect transition="in" filter="fade">
+                                      <p:cBhvr>
+                                        <p:cTn id="34" dur="500"/>
+                                        <p:tgtEl>
+                                          <p:spTgt spid="22"/>
+                                        </p:tgtEl>
+                                      </p:cBhvr>
+                                    </p:animEffect>
+                                  </p:childTnLst>
+                                </p:cTn>
+                              </p:par>
+                            </p:childTnLst>
+                          </p:cTn>
+                        </p:par>
+                      </p:childTnLst>
+                    </p:cTn>
+                  </p:par>
+                  <p:par>
+                    <p:cTn id="35" fill="hold">
+                      <p:stCondLst>
+                        <p:cond delay="indefinite"/>
+                      </p:stCondLst>
+                      <p:childTnLst>
+                        <p:par>
+                          <p:cTn id="36" fill="hold">
+                            <p:stCondLst>
+                              <p:cond delay="0"/>
+                            </p:stCondLst>
+                            <p:childTnLst>
+                              <p:par>
+                                <p:cTn id="37" presetID="10" presetClass="entr" presetSubtype="0" fill="hold" grpId="0" nodeType="clickEffect">
+                                  <p:stCondLst>
+                                    <p:cond delay="0"/>
+                                  </p:stCondLst>
+                                  <p:childTnLst>
+                                    <p:set>
+                                      <p:cBhvr>
+                                        <p:cTn id="38" dur="1" fill="hold">
+                                          <p:stCondLst>
+                                            <p:cond delay="0"/>
+                                          </p:stCondLst>
+                                        </p:cTn>
+                                        <p:tgtEl>
+                                          <p:spTgt spid="25"/>
+                                        </p:tgtEl>
+                                        <p:attrNameLst>
+                                          <p:attrName>style.visibility</p:attrName>
+                                        </p:attrNameLst>
+                                      </p:cBhvr>
+                                      <p:to>
+                                        <p:strVal val="visible"/>
+                                      </p:to>
+                                    </p:set>
+                                    <p:animEffect transition="in" filter="fade">
+                                      <p:cBhvr>
+                                        <p:cTn id="39" dur="500"/>
+                                        <p:tgtEl>
+                                          <p:spTgt spid="25"/>
+                                        </p:tgtEl>
+                                      </p:cBhvr>
+                                    </p:animEffect>
+                                  </p:childTnLst>
+                                </p:cTn>
+                              </p:par>
+                            </p:childTnLst>
+                          </p:cTn>
+                        </p:par>
+                      </p:childTnLst>
+                    </p:cTn>
+                  </p:par>
+                  <p:par>
+                    <p:cTn id="40" fill="hold">
+                      <p:stCondLst>
+                        <p:cond delay="indefinite"/>
+                      </p:stCondLst>
+                      <p:childTnLst>
+                        <p:par>
+                          <p:cTn id="41" fill="hold">
+                            <p:stCondLst>
+                              <p:cond delay="0"/>
+                            </p:stCondLst>
+                            <p:childTnLst>
+                              <p:par>
+                                <p:cTn id="42" presetID="10" presetClass="entr" presetSubtype="0" fill="hold" grpId="0" nodeType="clickEffect">
+                                  <p:stCondLst>
+                                    <p:cond delay="0"/>
+                                  </p:stCondLst>
+                                  <p:childTnLst>
+                                    <p:set>
+                                      <p:cBhvr>
+                                        <p:cTn id="43" dur="1" fill="hold">
+                                          <p:stCondLst>
+                                            <p:cond delay="0"/>
+                                          </p:stCondLst>
+                                        </p:cTn>
+                                        <p:tgtEl>
+                                          <p:spTgt spid="26"/>
+                                        </p:tgtEl>
+                                        <p:attrNameLst>
+                                          <p:attrName>style.visibility</p:attrName>
+                                        </p:attrNameLst>
+                                      </p:cBhvr>
+                                      <p:to>
+                                        <p:strVal val="visible"/>
+                                      </p:to>
+                                    </p:set>
+                                    <p:animEffect transition="in" filter="fade">
+                                      <p:cBhvr>
+                                        <p:cTn id="44" dur="500"/>
+                                        <p:tgtEl>
+                                          <p:spTgt spid="26"/>
+                                        </p:tgtEl>
+                                      </p:cBhvr>
+                                    </p:animEffect>
+                                  </p:childTnLst>
+                                </p:cTn>
+                              </p:par>
+                            </p:childTnLst>
+                          </p:cTn>
+                        </p:par>
+                      </p:childTnLst>
+                    </p:cTn>
+                  </p:par>
+                  <p:par>
+                    <p:cTn id="45" fill="hold">
+                      <p:stCondLst>
+                        <p:cond delay="indefinite"/>
+                      </p:stCondLst>
+                      <p:childTnLst>
+                        <p:par>
+                          <p:cTn id="46" fill="hold">
+                            <p:stCondLst>
+                              <p:cond delay="0"/>
+                            </p:stCondLst>
+                            <p:childTnLst>
+                              <p:par>
+                                <p:cTn id="47" presetID="10" presetClass="entr" presetSubtype="0" fill="hold" grpId="0" nodeType="clickEffect">
+                                  <p:stCondLst>
+                                    <p:cond delay="0"/>
+                                  </p:stCondLst>
+                                  <p:childTnLst>
+                                    <p:set>
+                                      <p:cBhvr>
+                                        <p:cTn id="48" dur="1" fill="hold">
+                                          <p:stCondLst>
+                                            <p:cond delay="0"/>
+                                          </p:stCondLst>
+                                        </p:cTn>
+                                        <p:tgtEl>
+                                          <p:spTgt spid="29"/>
+                                        </p:tgtEl>
+                                        <p:attrNameLst>
+                                          <p:attrName>style.visibility</p:attrName>
+                                        </p:attrNameLst>
+                                      </p:cBhvr>
+                                      <p:to>
+                                        <p:strVal val="visible"/>
+                                      </p:to>
+                                    </p:set>
+                                    <p:animEffect transition="in" filter="fade">
+                                      <p:cBhvr>
+                                        <p:cTn id="49" dur="500"/>
+                                        <p:tgtEl>
+                                          <p:spTgt spid="29"/>
+                                        </p:tgtEl>
+                                      </p:cBhvr>
+                                    </p:animEffect>
+                                  </p:childTnLst>
+                                </p:cTn>
+                              </p:par>
+                            </p:childTnLst>
+                          </p:cTn>
+                        </p:par>
+                      </p:childTnLst>
+                    </p:cTn>
+                  </p:par>
+                  <p:par>
+                    <p:cTn id="50" fill="hold">
+                      <p:stCondLst>
+                        <p:cond delay="indefinite"/>
+                      </p:stCondLst>
+                      <p:childTnLst>
+                        <p:par>
+                          <p:cTn id="51" fill="hold">
+                            <p:stCondLst>
+                              <p:cond delay="0"/>
+                            </p:stCondLst>
+                            <p:childTnLst>
+                              <p:par>
+                                <p:cTn id="52" presetID="10" presetClass="entr" presetSubtype="0" fill="hold" grpId="0" nodeType="clickEffect">
+                                  <p:stCondLst>
+                                    <p:cond delay="0"/>
+                                  </p:stCondLst>
+                                  <p:childTnLst>
+                                    <p:set>
+                                      <p:cBhvr>
+                                        <p:cTn id="53" dur="1" fill="hold">
+                                          <p:stCondLst>
+                                            <p:cond delay="0"/>
+                                          </p:stCondLst>
+                                        </p:cTn>
+                                        <p:tgtEl>
+                                          <p:spTgt spid="30"/>
+                                        </p:tgtEl>
+                                        <p:attrNameLst>
+                                          <p:attrName>style.visibility</p:attrName>
+                                        </p:attrNameLst>
+                                      </p:cBhvr>
+                                      <p:to>
+                                        <p:strVal val="visible"/>
+                                      </p:to>
+                                    </p:set>
+                                    <p:animEffect transition="in" filter="fade">
+                                      <p:cBhvr>
+                                        <p:cTn id="54" dur="500"/>
+                                        <p:tgtEl>
+                                          <p:spTgt spid="30"/>
+                                        </p:tgtEl>
+                                      </p:cBhvr>
+                                    </p:animEffect>
+                                  </p:childTnLst>
+                                </p:cTn>
+                              </p:par>
+                            </p:childTnLst>
+                          </p:cTn>
+                        </p:par>
+                      </p:childTnLst>
+                    </p:cTn>
+                  </p:par>
+                  <p:par>
+                    <p:cTn id="55" fill="hold">
+                      <p:stCondLst>
+                        <p:cond delay="indefinite"/>
+                      </p:stCondLst>
+                      <p:childTnLst>
+                        <p:par>
+                          <p:cTn id="56" fill="hold">
+                            <p:stCondLst>
+                              <p:cond delay="0"/>
+                            </p:stCondLst>
+                            <p:childTnLst>
+                              <p:par>
+                                <p:cTn id="57" presetID="10" presetClass="entr" presetSubtype="0" fill="hold" grpId="0" nodeType="clickEffect">
+                                  <p:stCondLst>
+                                    <p:cond delay="0"/>
+                                  </p:stCondLst>
+                                  <p:childTnLst>
+                                    <p:set>
+                                      <p:cBhvr>
+                                        <p:cTn id="58" dur="1" fill="hold">
+                                          <p:stCondLst>
+                                            <p:cond delay="0"/>
+                                          </p:stCondLst>
+                                        </p:cTn>
+                                        <p:tgtEl>
+                                          <p:spTgt spid="33"/>
+                                        </p:tgtEl>
+                                        <p:attrNameLst>
+                                          <p:attrName>style.visibility</p:attrName>
+                                        </p:attrNameLst>
+                                      </p:cBhvr>
+                                      <p:to>
+                                        <p:strVal val="visible"/>
+                                      </p:to>
+                                    </p:set>
+                                    <p:animEffect transition="in" filter="fade">
+                                      <p:cBhvr>
+                                        <p:cTn id="59" dur="500"/>
+                                        <p:tgtEl>
+                                          <p:spTgt spid="33"/>
+                                        </p:tgtEl>
+                                      </p:cBhvr>
+                                    </p:animEffect>
+                                  </p:childTnLst>
+                                </p:cTn>
+                              </p:par>
+                            </p:childTnLst>
+                          </p:cTn>
+                        </p:par>
+                      </p:childTnLst>
+                    </p:cTn>
+                  </p:par>
+                  <p:par>
+                    <p:cTn id="60" fill="hold">
+                      <p:stCondLst>
+                        <p:cond delay="indefinite"/>
+                      </p:stCondLst>
+                      <p:childTnLst>
+                        <p:par>
+                          <p:cTn id="61" fill="hold">
+                            <p:stCondLst>
+                              <p:cond delay="0"/>
+                            </p:stCondLst>
+                            <p:childTnLst>
+                              <p:par>
+                                <p:cTn id="62" presetID="10" presetClass="entr" presetSubtype="0" fill="hold" grpId="0" nodeType="clickEffect">
+                                  <p:stCondLst>
+                                    <p:cond delay="0"/>
+                                  </p:stCondLst>
+                                  <p:childTnLst>
+                                    <p:set>
+                                      <p:cBhvr>
+                                        <p:cTn id="63" dur="1" fill="hold">
+                                          <p:stCondLst>
+                                            <p:cond delay="0"/>
+                                          </p:stCondLst>
+                                        </p:cTn>
+                                        <p:tgtEl>
+                                          <p:spTgt spid="34"/>
+                                        </p:tgtEl>
+                                        <p:attrNameLst>
+                                          <p:attrName>style.visibility</p:attrName>
+                                        </p:attrNameLst>
+                                      </p:cBhvr>
+                                      <p:to>
+                                        <p:strVal val="visible"/>
+                                      </p:to>
+                                    </p:set>
+                                    <p:animEffect transition="in" filter="fade">
+                                      <p:cBhvr>
+                                        <p:cTn id="64" dur="500"/>
+                                        <p:tgtEl>
+                                          <p:spTgt spid="34"/>
+                                        </p:tgtEl>
+                                      </p:cBhvr>
+                                    </p:animEffect>
+                                  </p:childTnLst>
+                                </p:cTn>
+                              </p:par>
+                            </p:childTnLst>
+                          </p:cTn>
+                        </p:par>
+                      </p:childTnLst>
+                    </p:cTn>
+                  </p:par>
+                  <p:par>
+                    <p:cTn id="65" fill="hold">
+                      <p:stCondLst>
+                        <p:cond delay="indefinite"/>
+                      </p:stCondLst>
+                      <p:childTnLst>
+                        <p:par>
+                          <p:cTn id="66" fill="hold">
+                            <p:stCondLst>
+                              <p:cond delay="0"/>
+                            </p:stCondLst>
+                            <p:childTnLst>
+                              <p:par>
+                                <p:cTn id="67" presetID="10" presetClass="entr" presetSubtype="0" fill="hold" grpId="0" nodeType="clickEffect">
+                                  <p:stCondLst>
+                                    <p:cond delay="0"/>
+                                  </p:stCondLst>
+                                  <p:childTnLst>
+                                    <p:set>
+                                      <p:cBhvr>
+                                        <p:cTn id="68" dur="1" fill="hold">
+                                          <p:stCondLst>
+                                            <p:cond delay="0"/>
+                                          </p:stCondLst>
+                                        </p:cTn>
+                                        <p:tgtEl>
+                                          <p:spTgt spid="37"/>
+                                        </p:tgtEl>
+                                        <p:attrNameLst>
+                                          <p:attrName>style.visibility</p:attrName>
+                                        </p:attrNameLst>
+                                      </p:cBhvr>
+                                      <p:to>
+                                        <p:strVal val="visible"/>
+                                      </p:to>
+                                    </p:set>
+                                    <p:animEffect transition="in" filter="fade">
+                                      <p:cBhvr>
+                                        <p:cTn id="69" dur="500"/>
+                                        <p:tgtEl>
+                                          <p:spTgt spid="37"/>
+                                        </p:tgtEl>
+                                      </p:cBhvr>
+                                    </p:animEffect>
+                                  </p:childTnLst>
+                                </p:cTn>
+                              </p:par>
+                            </p:childTnLst>
+                          </p:cTn>
+                        </p:par>
+                      </p:childTnLst>
+                    </p:cTn>
+                  </p:par>
+                  <p:par>
+                    <p:cTn id="70" fill="hold">
+                      <p:stCondLst>
+                        <p:cond delay="indefinite"/>
+                      </p:stCondLst>
+                      <p:childTnLst>
+                        <p:par>
+                          <p:cTn id="71" fill="hold">
+                            <p:stCondLst>
+                              <p:cond delay="0"/>
+                            </p:stCondLst>
+                            <p:childTnLst>
+                              <p:par>
+                                <p:cTn id="72" presetID="10" presetClass="entr" presetSubtype="0" fill="hold" grpId="0" nodeType="clickEffect">
+                                  <p:stCondLst>
+                                    <p:cond delay="0"/>
+                                  </p:stCondLst>
+                                  <p:childTnLst>
+                                    <p:set>
+                                      <p:cBhvr>
+                                        <p:cTn id="73" dur="1" fill="hold">
+                                          <p:stCondLst>
+                                            <p:cond delay="0"/>
+                                          </p:stCondLst>
+                                        </p:cTn>
+                                        <p:tgtEl>
+                                          <p:spTgt spid="38"/>
+                                        </p:tgtEl>
+                                        <p:attrNameLst>
+                                          <p:attrName>style.visibility</p:attrName>
+                                        </p:attrNameLst>
+                                      </p:cBhvr>
+                                      <p:to>
+                                        <p:strVal val="visible"/>
+                                      </p:to>
+                                    </p:set>
+                                    <p:animEffect transition="in" filter="fade">
+                                      <p:cBhvr>
+                                        <p:cTn id="74" dur="500"/>
+                                        <p:tgtEl>
+                                          <p:spTgt spid="38"/>
+                                        </p:tgtEl>
+                                      </p:cBhvr>
+                                    </p:animEffect>
+                                  </p:childTnLst>
+                                </p:cTn>
+                              </p:par>
+                            </p:childTnLst>
+                          </p:cTn>
+                        </p:par>
+                      </p:childTnLst>
+                    </p:cTn>
+                  </p:par>
+                  <p:par>
+                    <p:cTn id="75" fill="hold">
+                      <p:stCondLst>
+                        <p:cond delay="indefinite"/>
+                      </p:stCondLst>
+                      <p:childTnLst>
+                        <p:par>
+                          <p:cTn id="76" fill="hold">
+                            <p:stCondLst>
+                              <p:cond delay="0"/>
+                            </p:stCondLst>
+                            <p:childTnLst>
+                              <p:par>
+                                <p:cTn id="77" presetID="10" presetClass="entr" presetSubtype="0" fill="hold" grpId="0" nodeType="clickEffect">
+                                  <p:stCondLst>
+                                    <p:cond delay="0"/>
+                                  </p:stCondLst>
+                                  <p:childTnLst>
+                                    <p:set>
+                                      <p:cBhvr>
+                                        <p:cTn id="78" dur="1" fill="hold">
+                                          <p:stCondLst>
+                                            <p:cond delay="0"/>
+                                          </p:stCondLst>
+                                        </p:cTn>
+                                        <p:tgtEl>
+                                          <p:spTgt spid="41"/>
+                                        </p:tgtEl>
+                                        <p:attrNameLst>
+                                          <p:attrName>style.visibility</p:attrName>
+                                        </p:attrNameLst>
+                                      </p:cBhvr>
+                                      <p:to>
+                                        <p:strVal val="visible"/>
+                                      </p:to>
+                                    </p:set>
+                                    <p:animEffect transition="in" filter="fade">
+                                      <p:cBhvr>
+                                        <p:cTn id="79" dur="500"/>
+                                        <p:tgtEl>
+                                          <p:spTgt spid="41"/>
+                                        </p:tgtEl>
+                                      </p:cBhvr>
+                                    </p:animEffect>
+                                  </p:childTnLst>
+                                </p:cTn>
+                              </p:par>
+                            </p:childTnLst>
+                          </p:cTn>
+                        </p:par>
+                      </p:childTnLst>
+                    </p:cTn>
+                  </p:par>
+                  <p:par>
+                    <p:cTn id="80" fill="hold">
+                      <p:stCondLst>
+                        <p:cond delay="indefinite"/>
+                      </p:stCondLst>
+                      <p:childTnLst>
+                        <p:par>
+                          <p:cTn id="81" fill="hold">
+                            <p:stCondLst>
+                              <p:cond delay="0"/>
+                            </p:stCondLst>
+                            <p:childTnLst>
+                              <p:par>
+                                <p:cTn id="82" presetID="10" presetClass="entr" presetSubtype="0" fill="hold" grpId="0" nodeType="clickEffect">
+                                  <p:stCondLst>
+                                    <p:cond delay="0"/>
+                                  </p:stCondLst>
+                                  <p:childTnLst>
+                                    <p:set>
+                                      <p:cBhvr>
+                                        <p:cTn id="83" dur="1" fill="hold">
+                                          <p:stCondLst>
+                                            <p:cond delay="0"/>
+                                          </p:stCondLst>
+                                        </p:cTn>
+                                        <p:tgtEl>
+                                          <p:spTgt spid="42"/>
+                                        </p:tgtEl>
+                                        <p:attrNameLst>
+                                          <p:attrName>style.visibility</p:attrName>
+                                        </p:attrNameLst>
+                                      </p:cBhvr>
+                                      <p:to>
+                                        <p:strVal val="visible"/>
+                                      </p:to>
+                                    </p:set>
+                                    <p:animEffect transition="in" filter="fade">
+                                      <p:cBhvr>
+                                        <p:cTn id="84" dur="500"/>
+                                        <p:tgtEl>
+                                          <p:spTgt spid="42"/>
+                                        </p:tgtEl>
+                                      </p:cBhvr>
+                                    </p:animEffect>
+                                  </p:childTnLst>
+                                </p:cTn>
+                              </p:par>
+                            </p:childTnLst>
+                          </p:cTn>
+                        </p:par>
+                      </p:childTnLst>
+                    </p:cTn>
+                  </p:par>
+                </p:childTnLst>
+              </p:cTn>
+              <p:prevCondLst>
+                <p:cond evt="onPrev" delay="0">
+                  <p:tgtEl>
+                    <p:sldTgt/>
+                  </p:tgtEl>
+                </p:cond>
+              </p:prevCondLst>
+              <p:nextCondLst>
+                <p:cond evt="onNext" delay="0">
+                  <p:tgtEl>
+                    <p:sldTgt/>
+                  </p:tgtEl>
+                </p:cond>
+              </p:nextCondLst>
+            </p:seq>
+          </p:childTnLst>
+        </p:cTn>
+      </p:par>
+    </p:tnLst>
+  </p:timing>
+</p:sld>
+</file>
+
+<file path=ppt/slides/slide24.xml><?xml version="1.0" encoding="utf-8"?>
+<p:sld xmlns:a="http://schemas.openxmlformats.org/drawingml/2006/main" xmlns:p="http://schemas.openxmlformats.org/presentationml/2006/main" xmlns:r="http://schemas.openxmlformats.org/officeDocument/2006/relationships">
+  <p:cSld>
+    <p:spTree>
+      <p:nvGrpSpPr>
+        <p:cNvPr id="1" name=""/>
+        <p:cNvGrpSpPr/>
+        <p:nvPr/>
+      </p:nvGrpSpPr>
+      <p:grpSpPr/>
+      <p:sp>
+        <p:nvSpPr>
+          <p:cNvPr id="2" name="Fondo"/>
+          <p:cNvSpPr/>
+          <p:nvPr/>
+        </p:nvSpPr>
+        <p:spPr>
+          <a:xfrm>
+            <a:off x="0" y="0"/>
+            <a:ext cx="12191695" cy="6858000"/>
+          </a:xfrm>
+          <a:prstGeom prst="rect">
+            <a:avLst/>
+          </a:prstGeom>
+          <a:solidFill>
+            <a:srgbClr val="FCFBF8"/>
+          </a:solidFill>
+          <a:ln>
+            <a:noFill/>
+          </a:ln>
+          <a:effectLst/>
+        </p:spPr>
+        <p:style>
+          <a:lnRef idx="1">
+            <a:schemeClr val="accent1"/>
+          </a:lnRef>
+          <a:fillRef idx="3">
+            <a:schemeClr val="accent1"/>
+          </a:fillRef>
+          <a:effectRef idx="2">
+            <a:schemeClr val="accent1"/>
+          </a:effectRef>
+          <a:fontRef idx="minor">
+            <a:schemeClr val="lt1"/>
+          </a:fontRef>
+        </p:style>
+        <p:txBody>
+          <a:bodyPr rtlCol="0" anchor="ctr"/>
+          <a:lstStyle/>
+          <a:p/>
+        </p:txBody>
+      </p:sp>
+      <p:sp>
+        <p:nvSpPr>
+          <p:cNvPr id="3" name="Cabecera"/>
+          <p:cNvSpPr/>
+          <p:nvPr/>
+        </p:nvSpPr>
+        <p:spPr>
+          <a:xfrm>
+            <a:off x="0" y="0"/>
+            <a:ext cx="12191695" cy="1078992"/>
+          </a:xfrm>
+          <a:prstGeom prst="rect">
+            <a:avLst/>
+          </a:prstGeom>
+          <a:solidFill>
+            <a:srgbClr val="7C56A9"/>
+          </a:solidFill>
+          <a:ln>
+            <a:noFill/>
+          </a:ln>
+          <a:effectLst/>
+        </p:spPr>
+        <p:style>
+          <a:lnRef idx="1">
+            <a:schemeClr val="accent1"/>
+          </a:lnRef>
+          <a:fillRef idx="3">
+            <a:schemeClr val="accent1"/>
+          </a:fillRef>
+          <a:effectRef idx="2">
+            <a:schemeClr val="accent1"/>
+          </a:effectRef>
+          <a:fontRef idx="minor">
+            <a:schemeClr val="lt1"/>
+          </a:fontRef>
+        </p:style>
+        <p:txBody>
+          <a:bodyPr rtlCol="0" anchor="ctr"/>
+          <a:lstStyle/>
+          <a:p/>
+        </p:txBody>
+      </p:sp>
+      <p:sp>
+        <p:nvSpPr>
+          <p:cNvPr id="4" name="Chip"/>
+          <p:cNvSpPr/>
+          <p:nvPr/>
+        </p:nvSpPr>
+        <p:spPr>
+          <a:xfrm>
+            <a:off x="457200" y="182880"/>
+            <a:ext cx="3017520" cy="292608"/>
+          </a:xfrm>
+          <a:prstGeom prst="roundRect">
+            <a:avLst>
+              <a:gd name="adj" fmla="val 50000"/>
+            </a:avLst>
+          </a:prstGeom>
+          <a:solidFill>
+            <a:srgbClr val="FFFFFF"/>
+          </a:solidFill>
+          <a:ln>
+            <a:noFill/>
+          </a:ln>
+          <a:effectLst/>
+        </p:spPr>
+        <p:style>
+          <a:lnRef idx="1">
+            <a:schemeClr val="accent1"/>
+          </a:lnRef>
+          <a:fillRef idx="3">
+            <a:schemeClr val="accent1"/>
+          </a:fillRef>
+          <a:effectRef idx="2">
+            <a:schemeClr val="accent1"/>
+          </a:effectRef>
+          <a:fontRef idx="minor">
+            <a:schemeClr val="lt1"/>
+          </a:fontRef>
+        </p:style>
+        <p:txBody>
+          <a:bodyPr rtlCol="0" anchor="ctr"/>
+          <a:lstStyle/>
+          <a:p/>
+        </p:txBody>
+      </p:sp>
+      <p:sp>
+        <p:nvSpPr>
+          <p:cNvPr id="5" name="ChipTxt"/>
+          <p:cNvSpPr txBox="1"/>
+          <p:nvPr/>
+        </p:nvSpPr>
+        <p:spPr>
+          <a:xfrm>
+            <a:off x="457200" y="173736"/>
+            <a:ext cx="3017520" cy="310896"/>
+          </a:xfrm>
+          <a:prstGeom prst="rect">
+            <a:avLst/>
+          </a:prstGeom>
+          <a:noFill/>
+        </p:spPr>
+        <p:txBody>
+          <a:bodyPr wrap="square" anchor="ctr" lIns="45720" rIns="45720" tIns="27432" bIns="27432">
+            <a:normAutofit/>
+          </a:bodyPr>
+          <a:lstStyle/>
+          <a:p>
+            <a:pPr algn="ctr"/>
+            <a:r>
+              <a:rPr sz="950" b="1">
+                <a:solidFill>
+                  <a:srgbClr val="5B3E83"/>
+                </a:solidFill>
+                <a:latin typeface="Inter"/>
+              </a:rPr>
+              <a:t>RETO 6 · SIMULATIE MET BEPERKING</a:t>
+            </a:r>
+          </a:p>
+        </p:txBody>
+      </p:sp>
+      <p:sp>
+        <p:nvSpPr>
+          <p:cNvPr id="6" name="Titulo"/>
+          <p:cNvSpPr txBox="1"/>
+          <p:nvPr/>
+        </p:nvSpPr>
+        <p:spPr>
+          <a:xfrm>
+            <a:off x="457200" y="502920"/>
+            <a:ext cx="8412480" cy="475488"/>
+          </a:xfrm>
+          <a:prstGeom prst="rect">
+            <a:avLst/>
+          </a:prstGeom>
+          <a:noFill/>
+        </p:spPr>
+        <p:txBody>
+          <a:bodyPr wrap="square" anchor="t" lIns="45720" rIns="45720" tIns="27432" bIns="27432">
+            <a:normAutofit/>
+          </a:bodyPr>
+          <a:lstStyle/>
+          <a:p>
+            <a:pPr algn="l"/>
+            <a:r>
+              <a:rPr sz="2700" b="1">
+                <a:solidFill>
+                  <a:srgbClr val="FFFFFF"/>
+                </a:solidFill>
+                <a:latin typeface="Bricolage Grotesque"/>
+              </a:rPr>
+              <a:t>Entrevista al pasado</a:t>
+            </a:r>
+          </a:p>
+        </p:txBody>
+      </p:sp>
+      <p:sp>
+        <p:nvSpPr>
+          <p:cNvPr id="7" name="Badges"/>
+          <p:cNvSpPr txBox="1"/>
+          <p:nvPr/>
+        </p:nvSpPr>
+        <p:spPr>
+          <a:xfrm>
+            <a:off x="9052560" y="256032"/>
+            <a:ext cx="2651760" cy="640080"/>
+          </a:xfrm>
+          <a:prstGeom prst="rect">
+            <a:avLst/>
+          </a:prstGeom>
+          <a:noFill/>
+        </p:spPr>
+        <p:txBody>
+          <a:bodyPr wrap="square" anchor="t" lIns="45720" rIns="45720" tIns="27432" bIns="27432">
+            <a:normAutofit/>
+          </a:bodyPr>
+          <a:lstStyle/>
+          <a:p>
+            <a:pPr algn="r"/>
+            <a:r>
+              <a:rPr sz="1000">
+                <a:solidFill>
+                  <a:srgbClr val="EEE8F5"/>
+                </a:solidFill>
+                <a:latin typeface="Inter"/>
+              </a:rPr>
+              <a:t>🏫 Toda la clase</a:t>
+            </a:r>
+          </a:p>
+          <a:p>
+            <a:pPr algn="r"/>
+            <a:r>
+              <a:rPr sz="1000">
+                <a:solidFill>
+                  <a:srgbClr val="EEE8F5"/>
+                </a:solidFill>
+                <a:latin typeface="Inter"/>
+              </a:rPr>
+              <a:t>± 18 min · ★★★</a:t>
+            </a:r>
+          </a:p>
+        </p:txBody>
+      </p:sp>
+      <p:sp>
+        <p:nvSpPr>
+          <p:cNvPr id="8" name="Gancho"/>
+          <p:cNvSpPr txBox="1"/>
+          <p:nvPr/>
+        </p:nvSpPr>
+        <p:spPr>
+          <a:xfrm>
+            <a:off x="457200" y="1225296"/>
+            <a:ext cx="11274552" cy="566928"/>
+          </a:xfrm>
+          <a:prstGeom prst="rect">
+            <a:avLst/>
+          </a:prstGeom>
+          <a:noFill/>
+        </p:spPr>
+        <p:txBody>
+          <a:bodyPr wrap="square" anchor="t" lIns="45720" rIns="45720" tIns="27432" bIns="27432">
+            <a:normAutofit/>
+          </a:bodyPr>
+          <a:lstStyle/>
+          <a:p>
+            <a:pPr algn="l"/>
+            <a:r>
+              <a:rPr sz="1600" b="1">
+                <a:solidFill>
+                  <a:srgbClr val="5B3E83"/>
+                </a:solidFill>
+                <a:latin typeface="Bricolage Grotesque"/>
+              </a:rPr>
+              <a:t>Una silla, un personaje histórico y toda la clase con preguntas.</a:t>
+            </a:r>
+          </a:p>
+          <a:p>
+            <a:pPr algn="l"/>
+            <a:r>
+              <a:rPr sz="1100" i="1">
+                <a:solidFill>
+                  <a:srgbClr val="6A6E78"/>
+                </a:solidFill>
+                <a:latin typeface="Inter"/>
+              </a:rPr>
+              <a:t>Eén stoel, één historisch personage en de hele klas met vragen.</a:t>
+            </a:r>
+          </a:p>
+        </p:txBody>
+      </p:sp>
+      <p:sp>
+        <p:nvSpPr>
+          <p:cNvPr id="9" name="ReglaCaja"/>
+          <p:cNvSpPr/>
+          <p:nvPr/>
+        </p:nvSpPr>
+        <p:spPr>
+          <a:xfrm>
+            <a:off x="457200" y="1847088"/>
+            <a:ext cx="11274552" cy="658368"/>
+          </a:xfrm>
+          <a:prstGeom prst="roundRect">
+            <a:avLst>
+              <a:gd name="adj" fmla="val 5000"/>
+            </a:avLst>
+          </a:prstGeom>
+          <a:solidFill>
+            <a:srgbClr val="FBF3D6"/>
+          </a:solidFill>
+          <a:ln>
+            <a:noFill/>
+          </a:ln>
+          <a:effectLst/>
+        </p:spPr>
+        <p:style>
+          <a:lnRef idx="1">
+            <a:schemeClr val="accent1"/>
+          </a:lnRef>
+          <a:fillRef idx="3">
+            <a:schemeClr val="accent1"/>
+          </a:fillRef>
+          <a:effectRef idx="2">
+            <a:schemeClr val="accent1"/>
+          </a:effectRef>
+          <a:fontRef idx="minor">
+            <a:schemeClr val="lt1"/>
+          </a:fontRef>
+        </p:style>
+        <p:txBody>
+          <a:bodyPr rtlCol="0" anchor="ctr"/>
+          <a:lstStyle/>
+          <a:p/>
+        </p:txBody>
+      </p:sp>
+      <p:sp>
+        <p:nvSpPr>
+          <p:cNvPr id="10" name="ReglaTxt"/>
+          <p:cNvSpPr txBox="1"/>
+          <p:nvPr/>
+        </p:nvSpPr>
+        <p:spPr>
+          <a:xfrm>
+            <a:off x="603504" y="1883664"/>
+            <a:ext cx="10972800" cy="585216"/>
+          </a:xfrm>
+          <a:prstGeom prst="rect">
+            <a:avLst/>
+          </a:prstGeom>
+          <a:noFill/>
+        </p:spPr>
+        <p:txBody>
+          <a:bodyPr wrap="square" anchor="t" lIns="45720" rIns="45720" tIns="27432" bIns="27432">
+            <a:normAutofit/>
+          </a:bodyPr>
+          <a:lstStyle/>
+          <a:p>
+            <a:pPr algn="l"/>
+            <a:r>
+              <a:rPr sz="850" b="1">
+                <a:solidFill>
+                  <a:srgbClr val="B7860B"/>
+                </a:solidFill>
+                <a:latin typeface="Inter"/>
+              </a:rPr>
+              <a:t>LA REGLA DEL RETO</a:t>
+            </a:r>
+          </a:p>
+          <a:p>
+            <a:pPr algn="l"/>
+            <a:r>
+              <a:rPr sz="1100">
+                <a:solidFill>
+                  <a:srgbClr val="20242E"/>
+                </a:solidFill>
+                <a:latin typeface="Inter"/>
+              </a:rPr>
+              <a:t>Het personage antwoordt uitsluitend in het indefinido — hij vertelt afgeronde feiten, geen gewoontes en geen meningen. Wie «yo creo que» zegt, is uit zijn rol.</a:t>
+            </a:r>
+          </a:p>
+        </p:txBody>
+      </p:sp>
+      <p:sp>
+        <p:nvSpPr>
+          <p:cNvPr id="11" name="Tarjeta 0"/>
+          <p:cNvSpPr/>
+          <p:nvPr/>
+        </p:nvSpPr>
+        <p:spPr>
+          <a:xfrm>
+            <a:off x="457200" y="2670048"/>
+            <a:ext cx="2708910" cy="1170432"/>
+          </a:xfrm>
+          <a:prstGeom prst="roundRect">
+            <a:avLst>
+              <a:gd name="adj" fmla="val 6000"/>
+            </a:avLst>
+          </a:prstGeom>
+          <a:solidFill>
+            <a:srgbClr val="FFFFFF"/>
+          </a:solidFill>
+          <a:ln w="12700">
+            <a:solidFill>
+              <a:srgbClr val="E4E3DE"/>
+            </a:solidFill>
+          </a:ln>
+          <a:effectLst/>
+        </p:spPr>
+        <p:style>
+          <a:lnRef idx="1">
+            <a:schemeClr val="accent1"/>
+          </a:lnRef>
+          <a:fillRef idx="3">
+            <a:schemeClr val="accent1"/>
+          </a:fillRef>
+          <a:effectRef idx="2">
+            <a:schemeClr val="accent1"/>
+          </a:effectRef>
+          <a:fontRef idx="minor">
+            <a:schemeClr val="lt1"/>
+          </a:fontRef>
+        </p:style>
+        <p:txBody>
+          <a:bodyPr rtlCol="0" anchor="ctr"/>
+          <a:lstStyle/>
+          <a:p/>
+        </p:txBody>
+      </p:sp>
+      <p:sp>
+        <p:nvSpPr>
+          <p:cNvPr id="12" name="TarjetaTxt 0"/>
+          <p:cNvSpPr txBox="1"/>
+          <p:nvPr/>
+        </p:nvSpPr>
+        <p:spPr>
+          <a:xfrm>
+            <a:off x="548640" y="2724912"/>
+            <a:ext cx="2526030" cy="1060704"/>
+          </a:xfrm>
+          <a:prstGeom prst="rect">
+            <a:avLst/>
+          </a:prstGeom>
+          <a:noFill/>
+        </p:spPr>
+        <p:txBody>
+          <a:bodyPr wrap="square" anchor="t" lIns="45720" rIns="45720" tIns="27432" bIns="27432">
+            <a:normAutofit/>
+          </a:bodyPr>
+          <a:lstStyle/>
+          <a:p>
+            <a:pPr algn="l"/>
+            <a:r>
+              <a:rPr sz="1100" b="1">
+                <a:solidFill>
+                  <a:srgbClr val="5B3E83"/>
+                </a:solidFill>
+                <a:latin typeface="Bricolage Grotesque"/>
+              </a:rPr>
+              <a:t>Frida Kahlo</a:t>
+            </a:r>
+          </a:p>
+          <a:p>
+            <a:pPr algn="l"/>
+            <a:r>
+              <a:rPr sz="1000">
+                <a:solidFill>
+                  <a:srgbClr val="20242E"/>
+                </a:solidFill>
+                <a:latin typeface="Inter"/>
+              </a:rPr>
+              <a:t>México, 1907–1954 · pintora</a:t>
+            </a:r>
+          </a:p>
+        </p:txBody>
+      </p:sp>
+      <p:sp>
+        <p:nvSpPr>
+          <p:cNvPr id="13" name="Tarjeta 1"/>
+          <p:cNvSpPr/>
+          <p:nvPr/>
+        </p:nvSpPr>
+        <p:spPr>
+          <a:xfrm>
+            <a:off x="3312414" y="2670048"/>
+            <a:ext cx="2708910" cy="1170432"/>
+          </a:xfrm>
+          <a:prstGeom prst="roundRect">
+            <a:avLst>
+              <a:gd name="adj" fmla="val 6000"/>
+            </a:avLst>
+          </a:prstGeom>
+          <a:solidFill>
+            <a:srgbClr val="FFFFFF"/>
+          </a:solidFill>
+          <a:ln w="12700">
+            <a:solidFill>
+              <a:srgbClr val="E4E3DE"/>
+            </a:solidFill>
+          </a:ln>
+          <a:effectLst/>
+        </p:spPr>
+        <p:style>
+          <a:lnRef idx="1">
+            <a:schemeClr val="accent1"/>
+          </a:lnRef>
+          <a:fillRef idx="3">
+            <a:schemeClr val="accent1"/>
+          </a:fillRef>
+          <a:effectRef idx="2">
+            <a:schemeClr val="accent1"/>
+          </a:effectRef>
+          <a:fontRef idx="minor">
+            <a:schemeClr val="lt1"/>
+          </a:fontRef>
+        </p:style>
+        <p:txBody>
+          <a:bodyPr rtlCol="0" anchor="ctr"/>
+          <a:lstStyle/>
+          <a:p/>
+        </p:txBody>
+      </p:sp>
+      <p:sp>
+        <p:nvSpPr>
+          <p:cNvPr id="14" name="TarjetaTxt 1"/>
+          <p:cNvSpPr txBox="1"/>
+          <p:nvPr/>
+        </p:nvSpPr>
+        <p:spPr>
+          <a:xfrm>
+            <a:off x="3403854" y="2724912"/>
+            <a:ext cx="2526030" cy="1060704"/>
+          </a:xfrm>
+          <a:prstGeom prst="rect">
+            <a:avLst/>
+          </a:prstGeom>
+          <a:noFill/>
+        </p:spPr>
+        <p:txBody>
+          <a:bodyPr wrap="square" anchor="t" lIns="45720" rIns="45720" tIns="27432" bIns="27432">
+            <a:normAutofit/>
+          </a:bodyPr>
+          <a:lstStyle/>
+          <a:p>
+            <a:pPr algn="l"/>
+            <a:r>
+              <a:rPr sz="1100" b="1">
+                <a:solidFill>
+                  <a:srgbClr val="5B3E83"/>
+                </a:solidFill>
+                <a:latin typeface="Bricolage Grotesque"/>
+              </a:rPr>
+              <a:t>Simón Bolívar</a:t>
+            </a:r>
+          </a:p>
+          <a:p>
+            <a:pPr algn="l"/>
+            <a:r>
+              <a:rPr sz="1000">
+                <a:solidFill>
+                  <a:srgbClr val="20242E"/>
+                </a:solidFill>
+                <a:latin typeface="Inter"/>
+              </a:rPr>
+              <a:t>Venezuela, 1783–1830 · libertador</a:t>
+            </a:r>
+          </a:p>
+        </p:txBody>
+      </p:sp>
+      <p:sp>
+        <p:nvSpPr>
+          <p:cNvPr id="15" name="Tarjeta 2"/>
+          <p:cNvSpPr/>
+          <p:nvPr/>
+        </p:nvSpPr>
+        <p:spPr>
+          <a:xfrm>
+            <a:off x="6167628" y="2670048"/>
+            <a:ext cx="2708910" cy="1170432"/>
+          </a:xfrm>
+          <a:prstGeom prst="roundRect">
+            <a:avLst>
+              <a:gd name="adj" fmla="val 6000"/>
+            </a:avLst>
+          </a:prstGeom>
+          <a:solidFill>
+            <a:srgbClr val="FFFFFF"/>
+          </a:solidFill>
+          <a:ln w="12700">
+            <a:solidFill>
+              <a:srgbClr val="E4E3DE"/>
+            </a:solidFill>
+          </a:ln>
+          <a:effectLst/>
+        </p:spPr>
+        <p:style>
+          <a:lnRef idx="1">
+            <a:schemeClr val="accent1"/>
+          </a:lnRef>
+          <a:fillRef idx="3">
+            <a:schemeClr val="accent1"/>
+          </a:fillRef>
+          <a:effectRef idx="2">
+            <a:schemeClr val="accent1"/>
+          </a:effectRef>
+          <a:fontRef idx="minor">
+            <a:schemeClr val="lt1"/>
+          </a:fontRef>
+        </p:style>
+        <p:txBody>
+          <a:bodyPr rtlCol="0" anchor="ctr"/>
+          <a:lstStyle/>
+          <a:p/>
+        </p:txBody>
+      </p:sp>
+      <p:sp>
+        <p:nvSpPr>
+          <p:cNvPr id="16" name="TarjetaTxt 2"/>
+          <p:cNvSpPr txBox="1"/>
+          <p:nvPr/>
+        </p:nvSpPr>
+        <p:spPr>
+          <a:xfrm>
+            <a:off x="6259068" y="2724912"/>
+            <a:ext cx="2526030" cy="1060704"/>
+          </a:xfrm>
+          <a:prstGeom prst="rect">
+            <a:avLst/>
+          </a:prstGeom>
+          <a:noFill/>
+        </p:spPr>
+        <p:txBody>
+          <a:bodyPr wrap="square" anchor="t" lIns="45720" rIns="45720" tIns="27432" bIns="27432">
+            <a:normAutofit/>
+          </a:bodyPr>
+          <a:lstStyle/>
+          <a:p>
+            <a:pPr algn="l"/>
+            <a:r>
+              <a:rPr sz="1100" b="1">
+                <a:solidFill>
+                  <a:srgbClr val="5B3E83"/>
+                </a:solidFill>
+                <a:latin typeface="Bricolage Grotesque"/>
+              </a:rPr>
+              <a:t>Rigoberta Menchú</a:t>
+            </a:r>
+          </a:p>
+          <a:p>
+            <a:pPr algn="l"/>
+            <a:r>
+              <a:rPr sz="1000">
+                <a:solidFill>
+                  <a:srgbClr val="20242E"/>
+                </a:solidFill>
+                <a:latin typeface="Inter"/>
+              </a:rPr>
+              <a:t>Guatemala, 1959 · Nobel de la Paz</a:t>
+            </a:r>
+          </a:p>
+        </p:txBody>
+      </p:sp>
+      <p:sp>
+        <p:nvSpPr>
+          <p:cNvPr id="17" name="Tarjeta 3"/>
+          <p:cNvSpPr/>
+          <p:nvPr/>
+        </p:nvSpPr>
+        <p:spPr>
+          <a:xfrm>
+            <a:off x="9022842" y="2670048"/>
+            <a:ext cx="2708910" cy="1170432"/>
+          </a:xfrm>
+          <a:prstGeom prst="roundRect">
+            <a:avLst>
+              <a:gd name="adj" fmla="val 6000"/>
+            </a:avLst>
+          </a:prstGeom>
+          <a:solidFill>
+            <a:srgbClr val="FFFFFF"/>
+          </a:solidFill>
+          <a:ln w="12700">
+            <a:solidFill>
+              <a:srgbClr val="E4E3DE"/>
+            </a:solidFill>
+          </a:ln>
+          <a:effectLst/>
+        </p:spPr>
+        <p:style>
+          <a:lnRef idx="1">
+            <a:schemeClr val="accent1"/>
+          </a:lnRef>
+          <a:fillRef idx="3">
+            <a:schemeClr val="accent1"/>
+          </a:fillRef>
+          <a:effectRef idx="2">
+            <a:schemeClr val="accent1"/>
+          </a:effectRef>
+          <a:fontRef idx="minor">
+            <a:schemeClr val="lt1"/>
+          </a:fontRef>
+        </p:style>
+        <p:txBody>
+          <a:bodyPr rtlCol="0" anchor="ctr"/>
+          <a:lstStyle/>
+          <a:p/>
+        </p:txBody>
+      </p:sp>
+      <p:sp>
+        <p:nvSpPr>
+          <p:cNvPr id="18" name="TarjetaTxt 3"/>
+          <p:cNvSpPr txBox="1"/>
+          <p:nvPr/>
+        </p:nvSpPr>
+        <p:spPr>
+          <a:xfrm>
+            <a:off x="9114282" y="2724912"/>
+            <a:ext cx="2526030" cy="1060704"/>
+          </a:xfrm>
+          <a:prstGeom prst="rect">
+            <a:avLst/>
+          </a:prstGeom>
+          <a:noFill/>
+        </p:spPr>
+        <p:txBody>
+          <a:bodyPr wrap="square" anchor="t" lIns="45720" rIns="45720" tIns="27432" bIns="27432">
+            <a:normAutofit/>
+          </a:bodyPr>
+          <a:lstStyle/>
+          <a:p>
+            <a:pPr algn="l"/>
+            <a:r>
+              <a:rPr sz="1100" b="1">
+                <a:solidFill>
+                  <a:srgbClr val="5B3E83"/>
+                </a:solidFill>
+                <a:latin typeface="Bricolage Grotesque"/>
+              </a:rPr>
+              <a:t>Violeta Parra</a:t>
+            </a:r>
+          </a:p>
+          <a:p>
+            <a:pPr algn="l"/>
+            <a:r>
+              <a:rPr sz="1000">
+                <a:solidFill>
+                  <a:srgbClr val="20242E"/>
+                </a:solidFill>
+                <a:latin typeface="Inter"/>
+              </a:rPr>
+              <a:t>Chile, 1917–1967 · música</a:t>
+            </a:r>
+          </a:p>
+        </p:txBody>
+      </p:sp>
+      <p:sp>
+        <p:nvSpPr>
+          <p:cNvPr id="19" name="Tarjeta 4"/>
+          <p:cNvSpPr/>
+          <p:nvPr/>
+        </p:nvSpPr>
+        <p:spPr>
+          <a:xfrm>
+            <a:off x="457200" y="3968496"/>
+            <a:ext cx="2708910" cy="1170432"/>
+          </a:xfrm>
+          <a:prstGeom prst="roundRect">
+            <a:avLst>
+              <a:gd name="adj" fmla="val 6000"/>
+            </a:avLst>
+          </a:prstGeom>
+          <a:solidFill>
+            <a:srgbClr val="FFFFFF"/>
+          </a:solidFill>
+          <a:ln w="12700">
+            <a:solidFill>
+              <a:srgbClr val="E4E3DE"/>
+            </a:solidFill>
+          </a:ln>
+          <a:effectLst/>
+        </p:spPr>
+        <p:style>
+          <a:lnRef idx="1">
+            <a:schemeClr val="accent1"/>
+          </a:lnRef>
+          <a:fillRef idx="3">
+            <a:schemeClr val="accent1"/>
+          </a:fillRef>
+          <a:effectRef idx="2">
+            <a:schemeClr val="accent1"/>
+          </a:effectRef>
+          <a:fontRef idx="minor">
+            <a:schemeClr val="lt1"/>
+          </a:fontRef>
+        </p:style>
+        <p:txBody>
+          <a:bodyPr rtlCol="0" anchor="ctr"/>
+          <a:lstStyle/>
+          <a:p/>
+        </p:txBody>
+      </p:sp>
+      <p:sp>
+        <p:nvSpPr>
+          <p:cNvPr id="20" name="TarjetaTxt 4"/>
+          <p:cNvSpPr txBox="1"/>
+          <p:nvPr/>
+        </p:nvSpPr>
+        <p:spPr>
+          <a:xfrm>
+            <a:off x="548640" y="4023360"/>
+            <a:ext cx="2526030" cy="1060704"/>
+          </a:xfrm>
+          <a:prstGeom prst="rect">
+            <a:avLst/>
+          </a:prstGeom>
+          <a:noFill/>
+        </p:spPr>
+        <p:txBody>
+          <a:bodyPr wrap="square" anchor="t" lIns="45720" rIns="45720" tIns="27432" bIns="27432">
+            <a:normAutofit/>
+          </a:bodyPr>
+          <a:lstStyle/>
+          <a:p>
+            <a:pPr algn="l"/>
+            <a:r>
+              <a:rPr sz="1100" b="1">
+                <a:solidFill>
+                  <a:srgbClr val="5B3E83"/>
+                </a:solidFill>
+                <a:latin typeface="Bricolage Grotesque"/>
+              </a:rPr>
+              <a:t>Bartolomé de las Casas</a:t>
+            </a:r>
+          </a:p>
+          <a:p>
+            <a:pPr algn="l"/>
+            <a:r>
+              <a:rPr sz="1000">
+                <a:solidFill>
+                  <a:srgbClr val="20242E"/>
+                </a:solidFill>
+                <a:latin typeface="Inter"/>
+              </a:rPr>
+              <a:t>España, 1484–1566 · cronista</a:t>
+            </a:r>
+          </a:p>
+        </p:txBody>
+      </p:sp>
+      <p:sp>
+        <p:nvSpPr>
+          <p:cNvPr id="21" name="Tarjeta 5"/>
+          <p:cNvSpPr/>
+          <p:nvPr/>
+        </p:nvSpPr>
+        <p:spPr>
+          <a:xfrm>
+            <a:off x="3312414" y="3968496"/>
+            <a:ext cx="2708910" cy="1170432"/>
+          </a:xfrm>
+          <a:prstGeom prst="roundRect">
+            <a:avLst>
+              <a:gd name="adj" fmla="val 6000"/>
+            </a:avLst>
+          </a:prstGeom>
+          <a:solidFill>
+            <a:srgbClr val="FFFFFF"/>
+          </a:solidFill>
+          <a:ln w="12700">
+            <a:solidFill>
+              <a:srgbClr val="E4E3DE"/>
+            </a:solidFill>
+          </a:ln>
+          <a:effectLst/>
+        </p:spPr>
+        <p:style>
+          <a:lnRef idx="1">
+            <a:schemeClr val="accent1"/>
+          </a:lnRef>
+          <a:fillRef idx="3">
+            <a:schemeClr val="accent1"/>
+          </a:fillRef>
+          <a:effectRef idx="2">
+            <a:schemeClr val="accent1"/>
+          </a:effectRef>
+          <a:fontRef idx="minor">
+            <a:schemeClr val="lt1"/>
+          </a:fontRef>
+        </p:style>
+        <p:txBody>
+          <a:bodyPr rtlCol="0" anchor="ctr"/>
+          <a:lstStyle/>
+          <a:p/>
+        </p:txBody>
+      </p:sp>
+      <p:sp>
+        <p:nvSpPr>
+          <p:cNvPr id="22" name="TarjetaTxt 5"/>
+          <p:cNvSpPr txBox="1"/>
+          <p:nvPr/>
+        </p:nvSpPr>
+        <p:spPr>
+          <a:xfrm>
+            <a:off x="3403854" y="4023360"/>
+            <a:ext cx="2526030" cy="1060704"/>
+          </a:xfrm>
+          <a:prstGeom prst="rect">
+            <a:avLst/>
+          </a:prstGeom>
+          <a:noFill/>
+        </p:spPr>
+        <p:txBody>
+          <a:bodyPr wrap="square" anchor="t" lIns="45720" rIns="45720" tIns="27432" bIns="27432">
+            <a:normAutofit/>
+          </a:bodyPr>
+          <a:lstStyle/>
+          <a:p>
+            <a:pPr algn="l"/>
+            <a:r>
+              <a:rPr sz="1100" b="1">
+                <a:solidFill>
+                  <a:srgbClr val="5B3E83"/>
+                </a:solidFill>
+                <a:latin typeface="Bricolage Grotesque"/>
+              </a:rPr>
+              <a:t>Mercedes Sosa</a:t>
+            </a:r>
+          </a:p>
+          <a:p>
+            <a:pPr algn="l"/>
+            <a:r>
+              <a:rPr sz="1000">
+                <a:solidFill>
+                  <a:srgbClr val="20242E"/>
+                </a:solidFill>
+                <a:latin typeface="Inter"/>
+              </a:rPr>
+              <a:t>Argentina, 1935–2009 · cantante</a:t>
+            </a:r>
+          </a:p>
+        </p:txBody>
+      </p:sp>
+      <p:sp>
+        <p:nvSpPr>
+          <p:cNvPr id="23" name="Tarjeta 6"/>
+          <p:cNvSpPr/>
+          <p:nvPr/>
+        </p:nvSpPr>
+        <p:spPr>
+          <a:xfrm>
+            <a:off x="6167628" y="3968496"/>
+            <a:ext cx="2708910" cy="1170432"/>
+          </a:xfrm>
+          <a:prstGeom prst="roundRect">
+            <a:avLst>
+              <a:gd name="adj" fmla="val 6000"/>
+            </a:avLst>
+          </a:prstGeom>
+          <a:solidFill>
+            <a:srgbClr val="FFFFFF"/>
+          </a:solidFill>
+          <a:ln w="12700">
+            <a:solidFill>
+              <a:srgbClr val="E4E3DE"/>
+            </a:solidFill>
+          </a:ln>
+          <a:effectLst/>
+        </p:spPr>
+        <p:style>
+          <a:lnRef idx="1">
+            <a:schemeClr val="accent1"/>
+          </a:lnRef>
+          <a:fillRef idx="3">
+            <a:schemeClr val="accent1"/>
+          </a:fillRef>
+          <a:effectRef idx="2">
+            <a:schemeClr val="accent1"/>
+          </a:effectRef>
+          <a:fontRef idx="minor">
+            <a:schemeClr val="lt1"/>
+          </a:fontRef>
+        </p:style>
+        <p:txBody>
+          <a:bodyPr rtlCol="0" anchor="ctr"/>
+          <a:lstStyle/>
+          <a:p/>
+        </p:txBody>
+      </p:sp>
+      <p:sp>
+        <p:nvSpPr>
+          <p:cNvPr id="24" name="TarjetaTxt 6"/>
+          <p:cNvSpPr txBox="1"/>
+          <p:nvPr/>
+        </p:nvSpPr>
+        <p:spPr>
+          <a:xfrm>
+            <a:off x="6259068" y="4023360"/>
+            <a:ext cx="2526030" cy="1060704"/>
+          </a:xfrm>
+          <a:prstGeom prst="rect">
+            <a:avLst/>
+          </a:prstGeom>
+          <a:noFill/>
+        </p:spPr>
+        <p:txBody>
+          <a:bodyPr wrap="square" anchor="t" lIns="45720" rIns="45720" tIns="27432" bIns="27432">
+            <a:normAutofit/>
+          </a:bodyPr>
+          <a:lstStyle/>
+          <a:p>
+            <a:pPr algn="l"/>
+            <a:r>
+              <a:rPr sz="1100" b="1">
+                <a:solidFill>
+                  <a:srgbClr val="5B3E83"/>
+                </a:solidFill>
+                <a:latin typeface="Bricolage Grotesque"/>
+              </a:rPr>
+              <a:t>pregunta modelo</a:t>
+            </a:r>
+          </a:p>
+          <a:p>
+            <a:pPr algn="l"/>
+            <a:r>
+              <a:rPr sz="1000">
+                <a:solidFill>
+                  <a:srgbClr val="20242E"/>
+                </a:solidFill>
+                <a:latin typeface="Inter"/>
+              </a:rPr>
+              <a:t>¿Cuándo salió usted de su país por primera vez?</a:t>
+            </a:r>
+          </a:p>
+        </p:txBody>
+      </p:sp>
+      <p:sp>
+        <p:nvSpPr>
+          <p:cNvPr id="25" name="Tarjeta 7"/>
+          <p:cNvSpPr/>
+          <p:nvPr/>
+        </p:nvSpPr>
+        <p:spPr>
+          <a:xfrm>
+            <a:off x="9022842" y="3968496"/>
+            <a:ext cx="2708910" cy="1170432"/>
+          </a:xfrm>
+          <a:prstGeom prst="roundRect">
+            <a:avLst>
+              <a:gd name="adj" fmla="val 6000"/>
+            </a:avLst>
+          </a:prstGeom>
+          <a:solidFill>
+            <a:srgbClr val="FFFFFF"/>
+          </a:solidFill>
+          <a:ln w="12700">
+            <a:solidFill>
+              <a:srgbClr val="E4E3DE"/>
+            </a:solidFill>
+          </a:ln>
+          <a:effectLst/>
+        </p:spPr>
+        <p:style>
+          <a:lnRef idx="1">
+            <a:schemeClr val="accent1"/>
+          </a:lnRef>
+          <a:fillRef idx="3">
+            <a:schemeClr val="accent1"/>
+          </a:fillRef>
+          <a:effectRef idx="2">
+            <a:schemeClr val="accent1"/>
+          </a:effectRef>
+          <a:fontRef idx="minor">
+            <a:schemeClr val="lt1"/>
+          </a:fontRef>
+        </p:style>
+        <p:txBody>
+          <a:bodyPr rtlCol="0" anchor="ctr"/>
+          <a:lstStyle/>
+          <a:p/>
+        </p:txBody>
+      </p:sp>
+      <p:sp>
+        <p:nvSpPr>
+          <p:cNvPr id="26" name="TarjetaTxt 7"/>
+          <p:cNvSpPr txBox="1"/>
+          <p:nvPr/>
+        </p:nvSpPr>
+        <p:spPr>
+          <a:xfrm>
+            <a:off x="9114282" y="4023360"/>
+            <a:ext cx="2526030" cy="1060704"/>
+          </a:xfrm>
+          <a:prstGeom prst="rect">
+            <a:avLst/>
+          </a:prstGeom>
+          <a:noFill/>
+        </p:spPr>
+        <p:txBody>
+          <a:bodyPr wrap="square" anchor="t" lIns="45720" rIns="45720" tIns="27432" bIns="27432">
+            <a:normAutofit/>
+          </a:bodyPr>
+          <a:lstStyle/>
+          <a:p>
+            <a:pPr algn="l"/>
+            <a:r>
+              <a:rPr sz="1100" b="1">
+                <a:solidFill>
+                  <a:srgbClr val="5B3E83"/>
+                </a:solidFill>
+                <a:latin typeface="Bricolage Grotesque"/>
+              </a:rPr>
+              <a:t>pregunta modelo</a:t>
+            </a:r>
+          </a:p>
+          <a:p>
+            <a:pPr algn="l"/>
+            <a:r>
+              <a:rPr sz="1000">
+                <a:solidFill>
+                  <a:srgbClr val="20242E"/>
+                </a:solidFill>
+                <a:latin typeface="Inter"/>
+              </a:rPr>
+              <a:t>¿Qué hizo el día más difícil de su vida?</a:t>
+            </a:r>
+          </a:p>
+        </p:txBody>
+      </p:sp>
+      <p:sp>
+        <p:nvSpPr>
+          <p:cNvPr id="27" name="Tarjeta 8"/>
+          <p:cNvSpPr/>
+          <p:nvPr/>
+        </p:nvSpPr>
+        <p:spPr>
+          <a:xfrm>
+            <a:off x="457200" y="5266944"/>
+            <a:ext cx="2708910" cy="1170432"/>
+          </a:xfrm>
+          <a:prstGeom prst="roundRect">
+            <a:avLst>
+              <a:gd name="adj" fmla="val 6000"/>
+            </a:avLst>
+          </a:prstGeom>
+          <a:solidFill>
+            <a:srgbClr val="FFFFFF"/>
+          </a:solidFill>
+          <a:ln w="12700">
+            <a:solidFill>
+              <a:srgbClr val="E4E3DE"/>
+            </a:solidFill>
+          </a:ln>
+          <a:effectLst/>
+        </p:spPr>
+        <p:style>
+          <a:lnRef idx="1">
+            <a:schemeClr val="accent1"/>
+          </a:lnRef>
+          <a:fillRef idx="3">
+            <a:schemeClr val="accent1"/>
+          </a:fillRef>
+          <a:effectRef idx="2">
+            <a:schemeClr val="accent1"/>
+          </a:effectRef>
+          <a:fontRef idx="minor">
+            <a:schemeClr val="lt1"/>
+          </a:fontRef>
+        </p:style>
+        <p:txBody>
+          <a:bodyPr rtlCol="0" anchor="ctr"/>
+          <a:lstStyle/>
+          <a:p/>
+        </p:txBody>
+      </p:sp>
+      <p:sp>
+        <p:nvSpPr>
+          <p:cNvPr id="28" name="TarjetaTxt 8"/>
+          <p:cNvSpPr txBox="1"/>
+          <p:nvPr/>
+        </p:nvSpPr>
+        <p:spPr>
+          <a:xfrm>
+            <a:off x="548640" y="5321808"/>
+            <a:ext cx="2526030" cy="1060704"/>
+          </a:xfrm>
+          <a:prstGeom prst="rect">
+            <a:avLst/>
+          </a:prstGeom>
+          <a:noFill/>
+        </p:spPr>
+        <p:txBody>
+          <a:bodyPr wrap="square" anchor="t" lIns="45720" rIns="45720" tIns="27432" bIns="27432">
+            <a:normAutofit/>
+          </a:bodyPr>
+          <a:lstStyle/>
+          <a:p>
+            <a:pPr algn="l"/>
+            <a:r>
+              <a:rPr sz="1100" b="1">
+                <a:solidFill>
+                  <a:srgbClr val="5B3E83"/>
+                </a:solidFill>
+                <a:latin typeface="Bricolage Grotesque"/>
+              </a:rPr>
+              <a:t>pregunta modelo</a:t>
+            </a:r>
+          </a:p>
+          <a:p>
+            <a:pPr algn="l"/>
+            <a:r>
+              <a:rPr sz="1000">
+                <a:solidFill>
+                  <a:srgbClr val="20242E"/>
+                </a:solidFill>
+                <a:latin typeface="Inter"/>
+              </a:rPr>
+              <a:t>¿Quién le ayudó cuando nadie más lo hizo?</a:t>
+            </a:r>
+          </a:p>
+        </p:txBody>
+      </p:sp>
+      <p:sp>
+        <p:nvSpPr>
+          <p:cNvPr id="29" name="Tarjeta 9"/>
+          <p:cNvSpPr/>
+          <p:nvPr/>
+        </p:nvSpPr>
+        <p:spPr>
+          <a:xfrm>
+            <a:off x="3312414" y="5266944"/>
+            <a:ext cx="2708910" cy="1170432"/>
+          </a:xfrm>
+          <a:prstGeom prst="roundRect">
+            <a:avLst>
+              <a:gd name="adj" fmla="val 6000"/>
+            </a:avLst>
+          </a:prstGeom>
+          <a:solidFill>
+            <a:srgbClr val="FFFFFF"/>
+          </a:solidFill>
+          <a:ln w="12700">
+            <a:solidFill>
+              <a:srgbClr val="E4E3DE"/>
+            </a:solidFill>
+          </a:ln>
+          <a:effectLst/>
+        </p:spPr>
+        <p:style>
+          <a:lnRef idx="1">
+            <a:schemeClr val="accent1"/>
+          </a:lnRef>
+          <a:fillRef idx="3">
+            <a:schemeClr val="accent1"/>
+          </a:fillRef>
+          <a:effectRef idx="2">
+            <a:schemeClr val="accent1"/>
+          </a:effectRef>
+          <a:fontRef idx="minor">
+            <a:schemeClr val="lt1"/>
+          </a:fontRef>
+        </p:style>
+        <p:txBody>
+          <a:bodyPr rtlCol="0" anchor="ctr"/>
+          <a:lstStyle/>
+          <a:p/>
+        </p:txBody>
+      </p:sp>
+      <p:sp>
+        <p:nvSpPr>
+          <p:cNvPr id="30" name="TarjetaTxt 9"/>
+          <p:cNvSpPr txBox="1"/>
+          <p:nvPr/>
+        </p:nvSpPr>
+        <p:spPr>
+          <a:xfrm>
+            <a:off x="3403854" y="5321808"/>
+            <a:ext cx="2526030" cy="1060704"/>
+          </a:xfrm>
+          <a:prstGeom prst="rect">
+            <a:avLst/>
+          </a:prstGeom>
+          <a:noFill/>
+        </p:spPr>
+        <p:txBody>
+          <a:bodyPr wrap="square" anchor="t" lIns="45720" rIns="45720" tIns="27432" bIns="27432">
+            <a:normAutofit/>
+          </a:bodyPr>
+          <a:lstStyle/>
+          <a:p>
+            <a:pPr algn="l"/>
+            <a:r>
+              <a:rPr sz="1100" b="1">
+                <a:solidFill>
+                  <a:srgbClr val="5B3E83"/>
+                </a:solidFill>
+                <a:latin typeface="Bricolage Grotesque"/>
+              </a:rPr>
+              <a:t>pregunta modelo</a:t>
+            </a:r>
+          </a:p>
+          <a:p>
+            <a:pPr algn="l"/>
+            <a:r>
+              <a:rPr sz="1000">
+                <a:solidFill>
+                  <a:srgbClr val="20242E"/>
+                </a:solidFill>
+                <a:latin typeface="Inter"/>
+              </a:rPr>
+              <a:t>¿De qué decisión se arrepintió después?</a:t>
+            </a:r>
+          </a:p>
+        </p:txBody>
+      </p:sp>
+      <p:sp>
+        <p:nvSpPr>
+          <p:cNvPr id="31" name="Tarjeta 10"/>
+          <p:cNvSpPr/>
+          <p:nvPr/>
+        </p:nvSpPr>
+        <p:spPr>
+          <a:xfrm>
+            <a:off x="6167628" y="5266944"/>
+            <a:ext cx="2708910" cy="1170432"/>
+          </a:xfrm>
+          <a:prstGeom prst="roundRect">
+            <a:avLst>
+              <a:gd name="adj" fmla="val 6000"/>
+            </a:avLst>
+          </a:prstGeom>
+          <a:solidFill>
+            <a:srgbClr val="FFFFFF"/>
+          </a:solidFill>
+          <a:ln w="12700">
+            <a:solidFill>
+              <a:srgbClr val="E4E3DE"/>
+            </a:solidFill>
+          </a:ln>
+          <a:effectLst/>
+        </p:spPr>
+        <p:style>
+          <a:lnRef idx="1">
+            <a:schemeClr val="accent1"/>
+          </a:lnRef>
+          <a:fillRef idx="3">
+            <a:schemeClr val="accent1"/>
+          </a:fillRef>
+          <a:effectRef idx="2">
+            <a:schemeClr val="accent1"/>
+          </a:effectRef>
+          <a:fontRef idx="minor">
+            <a:schemeClr val="lt1"/>
+          </a:fontRef>
+        </p:style>
+        <p:txBody>
+          <a:bodyPr rtlCol="0" anchor="ctr"/>
+          <a:lstStyle/>
+          <a:p/>
+        </p:txBody>
+      </p:sp>
+      <p:sp>
+        <p:nvSpPr>
+          <p:cNvPr id="32" name="TarjetaTxt 10"/>
+          <p:cNvSpPr txBox="1"/>
+          <p:nvPr/>
+        </p:nvSpPr>
+        <p:spPr>
+          <a:xfrm>
+            <a:off x="6259068" y="5321808"/>
+            <a:ext cx="2526030" cy="1060704"/>
+          </a:xfrm>
+          <a:prstGeom prst="rect">
+            <a:avLst/>
+          </a:prstGeom>
+          <a:noFill/>
+        </p:spPr>
+        <p:txBody>
+          <a:bodyPr wrap="square" anchor="t" lIns="45720" rIns="45720" tIns="27432" bIns="27432">
+            <a:normAutofit/>
+          </a:bodyPr>
+          <a:lstStyle/>
+          <a:p>
+            <a:pPr algn="l"/>
+            <a:r>
+              <a:rPr sz="1100" b="1">
+                <a:solidFill>
+                  <a:srgbClr val="5B3E83"/>
+                </a:solidFill>
+                <a:latin typeface="Bricolage Grotesque"/>
+              </a:rPr>
+              <a:t>pregunta modelo</a:t>
+            </a:r>
+          </a:p>
+          <a:p>
+            <a:pPr algn="l"/>
+            <a:r>
+              <a:rPr sz="1000">
+                <a:solidFill>
+                  <a:srgbClr val="20242E"/>
+                </a:solidFill>
+                <a:latin typeface="Inter"/>
+              </a:rPr>
+              <a:t>¿Cuándo supo que su trabajo importaba?</a:t>
+            </a:r>
+          </a:p>
+        </p:txBody>
+      </p:sp>
+      <p:sp>
+        <p:nvSpPr>
+          <p:cNvPr id="33" name="Tarjeta 11"/>
+          <p:cNvSpPr/>
+          <p:nvPr/>
+        </p:nvSpPr>
+        <p:spPr>
+          <a:xfrm>
+            <a:off x="9022842" y="5266944"/>
+            <a:ext cx="2708910" cy="1170432"/>
+          </a:xfrm>
+          <a:prstGeom prst="roundRect">
+            <a:avLst>
+              <a:gd name="adj" fmla="val 6000"/>
+            </a:avLst>
+          </a:prstGeom>
+          <a:solidFill>
+            <a:srgbClr val="FFFFFF"/>
+          </a:solidFill>
+          <a:ln w="12700">
+            <a:solidFill>
+              <a:srgbClr val="E4E3DE"/>
+            </a:solidFill>
+          </a:ln>
+          <a:effectLst/>
+        </p:spPr>
+        <p:style>
+          <a:lnRef idx="1">
+            <a:schemeClr val="accent1"/>
+          </a:lnRef>
+          <a:fillRef idx="3">
+            <a:schemeClr val="accent1"/>
+          </a:fillRef>
+          <a:effectRef idx="2">
+            <a:schemeClr val="accent1"/>
+          </a:effectRef>
+          <a:fontRef idx="minor">
+            <a:schemeClr val="lt1"/>
+          </a:fontRef>
+        </p:style>
+        <p:txBody>
+          <a:bodyPr rtlCol="0" anchor="ctr"/>
+          <a:lstStyle/>
+          <a:p/>
+        </p:txBody>
+      </p:sp>
+      <p:sp>
+        <p:nvSpPr>
+          <p:cNvPr id="34" name="TarjetaTxt 11"/>
+          <p:cNvSpPr txBox="1"/>
+          <p:nvPr/>
+        </p:nvSpPr>
+        <p:spPr>
+          <a:xfrm>
+            <a:off x="9114282" y="5321808"/>
+            <a:ext cx="2526030" cy="1060704"/>
+          </a:xfrm>
+          <a:prstGeom prst="rect">
+            <a:avLst/>
+          </a:prstGeom>
+          <a:noFill/>
+        </p:spPr>
+        <p:txBody>
+          <a:bodyPr wrap="square" anchor="t" lIns="45720" rIns="45720" tIns="27432" bIns="27432">
+            <a:normAutofit/>
+          </a:bodyPr>
+          <a:lstStyle/>
+          <a:p>
+            <a:pPr algn="l"/>
+            <a:r>
+              <a:rPr sz="1100" b="1">
+                <a:solidFill>
+                  <a:srgbClr val="5B3E83"/>
+                </a:solidFill>
+                <a:latin typeface="Bricolage Grotesque"/>
+              </a:rPr>
+              <a:t>PROHIBIDO al personaje</a:t>
+            </a:r>
+          </a:p>
+          <a:p>
+            <a:pPr algn="l"/>
+            <a:r>
+              <a:rPr sz="1000">
+                <a:solidFill>
+                  <a:srgbClr val="20242E"/>
+                </a:solidFill>
+                <a:latin typeface="Inter"/>
+              </a:rPr>
+              <a:t>yo creo que · normalmente · siempre hacía · hoy en día · en mi opinión</a:t>
             </a:r>
           </a:p>
         </p:txBody>
